--- a/.codex-finalizer/phase2-candidate.pptx
+++ b/.codex-finalizer/phase2-candidate.pptx
@@ -2,46 +2,46 @@
 <file path=ppt/presentation.xml><?xml version="1.0" encoding="utf-8"?>
 <p:presentation xmlns:p="http://schemas.openxmlformats.org/presentationml/2006/main">
   <p:sldMasterIdLst>
-    <p:sldMasterId xmlns:r="http://schemas.openxmlformats.org/officeDocument/2006/relationships" id="2147483648" r:id="R4bb80f95c0d14ba3"/>
+    <p:sldMasterId xmlns:r="http://schemas.openxmlformats.org/officeDocument/2006/relationships" id="2147483648" r:id="Rc0634adf22804446"/>
   </p:sldMasterIdLst>
   <p:notesMasterIdLst>
-    <p:notesMasterId xmlns:r="http://schemas.openxmlformats.org/officeDocument/2006/relationships" r:id="Rec7963a324a34649"/>
+    <p:notesMasterId xmlns:r="http://schemas.openxmlformats.org/officeDocument/2006/relationships" r:id="Raec18a233373447c"/>
   </p:notesMasterIdLst>
   <p:sldIdLst>
-    <p:sldId xmlns:r="http://schemas.openxmlformats.org/officeDocument/2006/relationships" id="256" r:id="R7abca60558224e8c"/>
-    <p:sldId xmlns:r="http://schemas.openxmlformats.org/officeDocument/2006/relationships" id="257" r:id="Ra03529f27fd5480b"/>
-    <p:sldId xmlns:r="http://schemas.openxmlformats.org/officeDocument/2006/relationships" id="258" r:id="R062c070d368a414c"/>
-    <p:sldId xmlns:r="http://schemas.openxmlformats.org/officeDocument/2006/relationships" id="259" r:id="R7dfe7d006cac4e16"/>
-    <p:sldId xmlns:r="http://schemas.openxmlformats.org/officeDocument/2006/relationships" id="260" r:id="R8297f0faf84a4398"/>
-    <p:sldId xmlns:r="http://schemas.openxmlformats.org/officeDocument/2006/relationships" id="261" r:id="R7c9d5bae21004553"/>
-    <p:sldId xmlns:r="http://schemas.openxmlformats.org/officeDocument/2006/relationships" id="262" r:id="R153715e7274f4353"/>
-    <p:sldId xmlns:r="http://schemas.openxmlformats.org/officeDocument/2006/relationships" id="263" r:id="Ra56519d4bc0e419d"/>
-    <p:sldId xmlns:r="http://schemas.openxmlformats.org/officeDocument/2006/relationships" id="264" r:id="Ra8e727a989d2445e"/>
-    <p:sldId xmlns:r="http://schemas.openxmlformats.org/officeDocument/2006/relationships" id="265" r:id="R2619472aa9d142c9"/>
-    <p:sldId xmlns:r="http://schemas.openxmlformats.org/officeDocument/2006/relationships" id="266" r:id="Ra95906de1d334393"/>
-    <p:sldId xmlns:r="http://schemas.openxmlformats.org/officeDocument/2006/relationships" id="267" r:id="Red01eab3730f401e"/>
-    <p:sldId xmlns:r="http://schemas.openxmlformats.org/officeDocument/2006/relationships" id="268" r:id="R85a77354370c40b1"/>
-    <p:sldId xmlns:r="http://schemas.openxmlformats.org/officeDocument/2006/relationships" id="269" r:id="Rcbf569111fab4a63"/>
-    <p:sldId xmlns:r="http://schemas.openxmlformats.org/officeDocument/2006/relationships" id="270" r:id="R34c9590cef9749d5"/>
-    <p:sldId xmlns:r="http://schemas.openxmlformats.org/officeDocument/2006/relationships" id="271" r:id="R92886eb4afd74854"/>
-    <p:sldId xmlns:r="http://schemas.openxmlformats.org/officeDocument/2006/relationships" id="272" r:id="Rec5f8e0e6923410e"/>
-    <p:sldId xmlns:r="http://schemas.openxmlformats.org/officeDocument/2006/relationships" id="273" r:id="R806f044f53f848bb"/>
-    <p:sldId xmlns:r="http://schemas.openxmlformats.org/officeDocument/2006/relationships" id="274" r:id="R2bcada483196413d"/>
-    <p:sldId xmlns:r="http://schemas.openxmlformats.org/officeDocument/2006/relationships" id="275" r:id="R2c4743a989b34ea8"/>
-    <p:sldId xmlns:r="http://schemas.openxmlformats.org/officeDocument/2006/relationships" id="276" r:id="Ref8f119fe2fa462e"/>
-    <p:sldId xmlns:r="http://schemas.openxmlformats.org/officeDocument/2006/relationships" id="277" r:id="Rf12ba4de0b7b4ad3"/>
-    <p:sldId xmlns:r="http://schemas.openxmlformats.org/officeDocument/2006/relationships" id="278" r:id="R60e9d49c2c244162"/>
-    <p:sldId xmlns:r="http://schemas.openxmlformats.org/officeDocument/2006/relationships" id="279" r:id="Rab2d3f18538c4998"/>
-    <p:sldId xmlns:r="http://schemas.openxmlformats.org/officeDocument/2006/relationships" id="280" r:id="R17552d081b4741bc"/>
-    <p:sldId xmlns:r="http://schemas.openxmlformats.org/officeDocument/2006/relationships" id="281" r:id="R5ede6c846c9a4c2f"/>
-    <p:sldId xmlns:r="http://schemas.openxmlformats.org/officeDocument/2006/relationships" id="282" r:id="Rb3153604763e4603"/>
-    <p:sldId xmlns:r="http://schemas.openxmlformats.org/officeDocument/2006/relationships" id="283" r:id="R2fadf86610b64b1a"/>
-    <p:sldId xmlns:r="http://schemas.openxmlformats.org/officeDocument/2006/relationships" id="284" r:id="R8bb5897539314790"/>
-    <p:sldId xmlns:r="http://schemas.openxmlformats.org/officeDocument/2006/relationships" id="285" r:id="Rfebe0d21ca2849d6"/>
-    <p:sldId xmlns:r="http://schemas.openxmlformats.org/officeDocument/2006/relationships" id="286" r:id="Refed959e41214dc0"/>
-    <p:sldId xmlns:r="http://schemas.openxmlformats.org/officeDocument/2006/relationships" id="287" r:id="R5ecb0b0d99d542bc"/>
-    <p:sldId xmlns:r="http://schemas.openxmlformats.org/officeDocument/2006/relationships" id="288" r:id="R8ab19229f87c420c"/>
-    <p:sldId xmlns:r="http://schemas.openxmlformats.org/officeDocument/2006/relationships" id="289" r:id="Ra67806f19cd54626"/>
+    <p:sldId xmlns:r="http://schemas.openxmlformats.org/officeDocument/2006/relationships" id="256" r:id="R8aeb57cb5f50494a"/>
+    <p:sldId xmlns:r="http://schemas.openxmlformats.org/officeDocument/2006/relationships" id="257" r:id="Rc925e1538f4b42c2"/>
+    <p:sldId xmlns:r="http://schemas.openxmlformats.org/officeDocument/2006/relationships" id="258" r:id="R724ca1aa991e417d"/>
+    <p:sldId xmlns:r="http://schemas.openxmlformats.org/officeDocument/2006/relationships" id="259" r:id="R65792de5079040ea"/>
+    <p:sldId xmlns:r="http://schemas.openxmlformats.org/officeDocument/2006/relationships" id="260" r:id="R32f6b118c9474073"/>
+    <p:sldId xmlns:r="http://schemas.openxmlformats.org/officeDocument/2006/relationships" id="261" r:id="R42acebce8bb240cf"/>
+    <p:sldId xmlns:r="http://schemas.openxmlformats.org/officeDocument/2006/relationships" id="262" r:id="Rbea15e93044a4221"/>
+    <p:sldId xmlns:r="http://schemas.openxmlformats.org/officeDocument/2006/relationships" id="263" r:id="Ra19e5fd2ce8f4510"/>
+    <p:sldId xmlns:r="http://schemas.openxmlformats.org/officeDocument/2006/relationships" id="264" r:id="R7d15d7cb16004a50"/>
+    <p:sldId xmlns:r="http://schemas.openxmlformats.org/officeDocument/2006/relationships" id="265" r:id="R1b5926deae6a4534"/>
+    <p:sldId xmlns:r="http://schemas.openxmlformats.org/officeDocument/2006/relationships" id="266" r:id="R76176cab93454e14"/>
+    <p:sldId xmlns:r="http://schemas.openxmlformats.org/officeDocument/2006/relationships" id="267" r:id="R705b827ed16b41aa"/>
+    <p:sldId xmlns:r="http://schemas.openxmlformats.org/officeDocument/2006/relationships" id="268" r:id="Rbb77d51228684129"/>
+    <p:sldId xmlns:r="http://schemas.openxmlformats.org/officeDocument/2006/relationships" id="269" r:id="R8caaaf8a67554a80"/>
+    <p:sldId xmlns:r="http://schemas.openxmlformats.org/officeDocument/2006/relationships" id="270" r:id="R870d87dc7def4a4e"/>
+    <p:sldId xmlns:r="http://schemas.openxmlformats.org/officeDocument/2006/relationships" id="271" r:id="R3476ba3c16904506"/>
+    <p:sldId xmlns:r="http://schemas.openxmlformats.org/officeDocument/2006/relationships" id="272" r:id="R61d3f7a14d1f4e09"/>
+    <p:sldId xmlns:r="http://schemas.openxmlformats.org/officeDocument/2006/relationships" id="273" r:id="R95c1daa8c1d04ee3"/>
+    <p:sldId xmlns:r="http://schemas.openxmlformats.org/officeDocument/2006/relationships" id="274" r:id="R34630200f6164788"/>
+    <p:sldId xmlns:r="http://schemas.openxmlformats.org/officeDocument/2006/relationships" id="275" r:id="Rbbe487e0d74c4932"/>
+    <p:sldId xmlns:r="http://schemas.openxmlformats.org/officeDocument/2006/relationships" id="276" r:id="Rade24b1ed32741d1"/>
+    <p:sldId xmlns:r="http://schemas.openxmlformats.org/officeDocument/2006/relationships" id="277" r:id="R69c1c188e8e24e6c"/>
+    <p:sldId xmlns:r="http://schemas.openxmlformats.org/officeDocument/2006/relationships" id="278" r:id="R316673e509dd4fa1"/>
+    <p:sldId xmlns:r="http://schemas.openxmlformats.org/officeDocument/2006/relationships" id="279" r:id="R8244776367174780"/>
+    <p:sldId xmlns:r="http://schemas.openxmlformats.org/officeDocument/2006/relationships" id="280" r:id="Raf4a9b4130df4a98"/>
+    <p:sldId xmlns:r="http://schemas.openxmlformats.org/officeDocument/2006/relationships" id="281" r:id="Rd0d8da82a84f4238"/>
+    <p:sldId xmlns:r="http://schemas.openxmlformats.org/officeDocument/2006/relationships" id="282" r:id="Re2fa52d19f594b3d"/>
+    <p:sldId xmlns:r="http://schemas.openxmlformats.org/officeDocument/2006/relationships" id="283" r:id="R34a94b06fadb4e88"/>
+    <p:sldId xmlns:r="http://schemas.openxmlformats.org/officeDocument/2006/relationships" id="284" r:id="Rd7a1c498ffda44ce"/>
+    <p:sldId xmlns:r="http://schemas.openxmlformats.org/officeDocument/2006/relationships" id="285" r:id="Rdc94cefc6f4e4d0f"/>
+    <p:sldId xmlns:r="http://schemas.openxmlformats.org/officeDocument/2006/relationships" id="286" r:id="R408078eb4cb141d6"/>
+    <p:sldId xmlns:r="http://schemas.openxmlformats.org/officeDocument/2006/relationships" id="287" r:id="R23dcc150d6f145c4"/>
+    <p:sldId xmlns:r="http://schemas.openxmlformats.org/officeDocument/2006/relationships" id="288" r:id="R5babaf6f5fa54488"/>
+    <p:sldId xmlns:r="http://schemas.openxmlformats.org/officeDocument/2006/relationships" id="289" r:id="R8b06f2d6af784237"/>
   </p:sldIdLst>
   <p:sldSz cx="12192000" cy="6858000"/>
   <p:notesSz cx="6858000" cy="9144000"/>
@@ -629,7 +629,31 @@
         <p:txBody>
           <a:bodyPr xmlns:a="http://schemas.openxmlformats.org/drawingml/2006/main"/>
           <a:lstStyle xmlns:a="http://schemas.openxmlformats.org/drawingml/2006/main"/>
-          <a:p xmlns:a="http://schemas.openxmlformats.org/drawingml/2006/main"/>
+          <a:p xmlns:a="http://schemas.openxmlformats.org/drawingml/2006/main">
+            <a:r>
+              <a:t>[1] https://doc.binocs.co/18174/CIM/Project_DeLorean_CIM_Meaningful_Partners_(3)_(4).pdf?page=22</a:t>
+            </a:r>
+          </a:p>
+          <a:p xmlns:a="http://schemas.openxmlformats.org/drawingml/2006/main">
+            <a:r>
+              <a:t>[2] https://doc.binocs.co/18174/CIM/Project_DeLorean_CIM_Meaningful_Partners_(3)_(4).pdf?page=23</a:t>
+            </a:r>
+          </a:p>
+          <a:p xmlns:a="http://schemas.openxmlformats.org/drawingml/2006/main">
+            <a:r>
+              <a:t>[3] https://doc.binocs.co/18174/CIM/Project_DeLorean_CIM_Meaningful_Partners_(3)_(4).pdf?page=24</a:t>
+            </a:r>
+          </a:p>
+          <a:p xmlns:a="http://schemas.openxmlformats.org/drawingml/2006/main">
+            <a:r>
+              <a:t>[4] https://doc.binocs.co/18174/CIM/Project_DeLorean_CIM_Meaningful_Partners_(3)_(4).pdf?page=51</a:t>
+            </a:r>
+          </a:p>
+          <a:p xmlns:a="http://schemas.openxmlformats.org/drawingml/2006/main">
+            <a:r>
+              <a:t>[5] https://doc.binocs.co/18174/CIM/Project_DeLorean_CIM_Meaningful_Partners_(3)_(4).pdf?page=47</a:t>
+            </a:r>
+          </a:p>
         </p:txBody>
       </p:sp>
       <p:sp>
@@ -800,7 +824,46 @@
         <p:txBody>
           <a:bodyPr xmlns:a="http://schemas.openxmlformats.org/drawingml/2006/main"/>
           <a:lstStyle xmlns:a="http://schemas.openxmlformats.org/drawingml/2006/main"/>
-          <a:p xmlns:a="http://schemas.openxmlformats.org/drawingml/2006/main"/>
+          <a:p xmlns:a="http://schemas.openxmlformats.org/drawingml/2006/main">
+            <a:r>
+              <a:t>[10] https://doc.binocs.co/18174/CIM/Project_DeLorean_CIM_Meaningful_Partners_(3)_(4).pdf?page=44</a:t>
+            </a:r>
+          </a:p>
+          <a:p xmlns:a="http://schemas.openxmlformats.org/drawingml/2006/main">
+            <a:r>
+              <a:t>[11] https://doc.binocs.co/18174/CIM/Project_DeLorean_CIM_Meaningful_Partners_(3)_(4).pdf?page=45</a:t>
+            </a:r>
+          </a:p>
+          <a:p xmlns:a="http://schemas.openxmlformats.org/drawingml/2006/main">
+            <a:r>
+              <a:t>[12] https://doc.binocs.co/18174/CIM/Project_DeLorean_CIM_Meaningful_Partners_(3)_(4).pdf?page=50</a:t>
+            </a:r>
+          </a:p>
+          <a:p xmlns:a="http://schemas.openxmlformats.org/drawingml/2006/main">
+            <a:r>
+              <a:t>[4] https://doc.binocs.co/18174/CIM/Project_DeLorean_CIM_Meaningful_Partners_(3)_(4).pdf?page=51</a:t>
+            </a:r>
+          </a:p>
+          <a:p xmlns:a="http://schemas.openxmlformats.org/drawingml/2006/main">
+            <a:r>
+              <a:t>[6] https://doc.binocs.co/18174/CIM/Project_DeLorean_CIM_Meaningful_Partners_(3)_(4).pdf?page=15</a:t>
+            </a:r>
+          </a:p>
+          <a:p xmlns:a="http://schemas.openxmlformats.org/drawingml/2006/main">
+            <a:r>
+              <a:t>[7] https://doc.binocs.co/18174/CIM/Project_DeLorean_CIM_Meaningful_Partners_(3)_(4).pdf?page=41</a:t>
+            </a:r>
+          </a:p>
+          <a:p xmlns:a="http://schemas.openxmlformats.org/drawingml/2006/main">
+            <a:r>
+              <a:t>[8] https://doc.binocs.co/18174/CIM/Project_DeLorean_CIM_Meaningful_Partners_(3)_(4).pdf?page=42</a:t>
+            </a:r>
+          </a:p>
+          <a:p xmlns:a="http://schemas.openxmlformats.org/drawingml/2006/main">
+            <a:r>
+              <a:t>[9] https://doc.binocs.co/18174/CIM/Project_DeLorean_CIM_Meaningful_Partners_(3)_(4).pdf?page=43</a:t>
+            </a:r>
+          </a:p>
         </p:txBody>
       </p:sp>
       <p:sp>
@@ -941,7 +1004,16 @@
         <p:txBody>
           <a:bodyPr xmlns:a="http://schemas.openxmlformats.org/drawingml/2006/main"/>
           <a:lstStyle xmlns:a="http://schemas.openxmlformats.org/drawingml/2006/main"/>
-          <a:p xmlns:a="http://schemas.openxmlformats.org/drawingml/2006/main"/>
+          <a:p xmlns:a="http://schemas.openxmlformats.org/drawingml/2006/main">
+            <a:r>
+              <a:t>[13] https://doc.binocs.co/18174/CIM/Project_DeLorean_CIM_Meaningful_Partners_(3)_(4).pdf?page=13</a:t>
+            </a:r>
+          </a:p>
+          <a:p xmlns:a="http://schemas.openxmlformats.org/drawingml/2006/main">
+            <a:r>
+              <a:t>[4] https://doc.binocs.co/18174/CIM/Project_DeLorean_CIM_Meaningful_Partners_(3)_(4).pdf?page=51</a:t>
+            </a:r>
+          </a:p>
         </p:txBody>
       </p:sp>
       <p:sp>
@@ -3135,7 +3207,7 @@
   </p:cSld>
   <p:clrMap bg1="lt1" tx1="dk1" bg2="lt2" tx2="dk2" accent1="accent1" accent2="accent2" accent3="accent3" accent4="accent4" accent5="accent5" accent6="accent6" hlink="hlink" folHlink="folHlink"/>
   <p:sldLayoutIdLst>
-    <p:sldLayoutId xmlns:r="http://schemas.openxmlformats.org/officeDocument/2006/relationships" id="2147483649" r:id="R2743fef577de4ed8"/>
+    <p:sldLayoutId xmlns:r="http://schemas.openxmlformats.org/officeDocument/2006/relationships" id="2147483649" r:id="R3bdcbcf8e59848fa"/>
   </p:sldLayoutIdLst>
   <p:txStyles>
     <p:titleStyle>
@@ -3799,6 +3871,7 @@
         <c:numFmt formatCode="General"/>
         <c:majorTickMark val="none"/>
         <c:minorTickMark val="none"/>
+        <c:tickLblPos val="low"/>
         <c:spPr>
           <a:ln xmlns:a="http://schemas.openxmlformats.org/drawingml/2006/main" w="9525">
             <a:solidFill>
@@ -3829,6 +3902,8 @@
         <c:axId val="48672768"/>
         <c:scaling>
           <c:orientation val="minMax"/>
+          <c:max val="5"/>
+          <c:min val="-1"/>
         </c:scaling>
         <c:delete val="0"/>
         <c:axPos val="l"/>
@@ -3903,6 +3978,7 @@
         </c:txPr>
         <c:crossAx val="48650112"/>
         <c:crossBetween val="between"/>
+        <c:majorUnit val="1"/>
       </c:valAx>
       <c:spPr>
         <a:solidFill xmlns:a="http://schemas.openxmlformats.org/drawingml/2006/main">
@@ -4793,6 +4869,7 @@
         <c:numFmt formatCode="General"/>
         <c:majorTickMark val="none"/>
         <c:minorTickMark val="none"/>
+        <c:tickLblPos val="low"/>
         <c:spPr>
           <a:ln xmlns:a="http://schemas.openxmlformats.org/drawingml/2006/main" w="9525">
             <a:solidFill>
@@ -4823,6 +4900,8 @@
         <c:axId val="48672768"/>
         <c:scaling>
           <c:orientation val="minMax"/>
+          <c:max val="5"/>
+          <c:min val="-1"/>
         </c:scaling>
         <c:delete val="0"/>
         <c:axPos val="l"/>
@@ -4897,6 +4976,7 @@
         </c:txPr>
         <c:crossAx val="48650112"/>
         <c:crossBetween val="between"/>
+        <c:majorUnit val="1"/>
       </c:valAx>
       <c:spPr>
         <a:solidFill xmlns:a="http://schemas.openxmlformats.org/drawingml/2006/main">
@@ -5012,10 +5092,10 @@
                 <c:v>Management adjusted</c:v>
               </c:pt>
               <c:pt idx="1">
-                <c:v>Non-recurring income &amp; expense</c:v>
+                <c:v>Non-recurring items</c:v>
               </c:pt>
               <c:pt idx="2">
-                <c:v>Sales and cost corrections</c:v>
+                <c:v>Sales/cost corrections</c:v>
               </c:pt>
               <c:pt idx="3">
                 <c:v>Inventory true-ups</c:v>
@@ -5024,7 +5104,7 @@
                 <c:v>Changes to operations</c:v>
               </c:pt>
               <c:pt idx="5">
-                <c:v>Cash to accrual adjustments</c:v>
+                <c:v>Cash/accrual adjustment</c:v>
               </c:pt>
               <c:pt idx="6">
                 <c:v>Recommended</c:v>
@@ -5098,10 +5178,10 @@
                 <c:v>Management adjusted</c:v>
               </c:pt>
               <c:pt idx="1">
-                <c:v>Non-recurring income &amp; expense</c:v>
+                <c:v>Non-recurring items</c:v>
               </c:pt>
               <c:pt idx="2">
-                <c:v>Sales and cost corrections</c:v>
+                <c:v>Sales/cost corrections</c:v>
               </c:pt>
               <c:pt idx="3">
                 <c:v>Inventory true-ups</c:v>
@@ -5110,7 +5190,7 @@
                 <c:v>Changes to operations</c:v>
               </c:pt>
               <c:pt idx="5">
-                <c:v>Cash to accrual adjustments</c:v>
+                <c:v>Cash/accrual adjustment</c:v>
               </c:pt>
               <c:pt idx="6">
                 <c:v>Recommended</c:v>
@@ -5190,6 +5270,7 @@
         <c:numFmt formatCode="General"/>
         <c:majorTickMark val="none"/>
         <c:minorTickMark val="none"/>
+        <c:tickLblPos val="low"/>
         <c:spPr>
           <a:ln xmlns:a="http://schemas.openxmlformats.org/drawingml/2006/main" w="9525">
             <a:solidFill>
@@ -5220,6 +5301,8 @@
         <c:axId val="48672768"/>
         <c:scaling>
           <c:orientation val="minMax"/>
+          <c:max val="5"/>
+          <c:min val="-1"/>
         </c:scaling>
         <c:delete val="0"/>
         <c:axPos val="l"/>
@@ -5294,6 +5377,7 @@
         </c:txPr>
         <c:crossAx val="48650112"/>
         <c:crossBetween val="between"/>
+        <c:majorUnit val="1"/>
       </c:valAx>
       <c:spPr>
         <a:solidFill xmlns:a="http://schemas.openxmlformats.org/drawingml/2006/main">
@@ -5899,7 +5983,7 @@
           <p:cNvPr id="4" name="">
             <a:extLst xmlns:a="http://schemas.openxmlformats.org/drawingml/2006/main">
               <a:ext uri="{FF2B5EF4-FFF2-40B4-BE49-F238E27FC236}">
-                <a16:creationId xmlns:a16="http://schemas.microsoft.com/office/drawing/2014/main" id="{6752A1C6-CEB9-4A16-ADAD-220904BCFDFE}"/>
+                <a16:creationId xmlns:a16="http://schemas.microsoft.com/office/drawing/2014/main" id="{16C1F21F-268F-4530-9BDF-00A060D3FCA1}"/>
               </a:ext>
             </a:extLst>
           </p:cNvPr>
@@ -5929,7 +6013,7 @@
           <p:cNvPr id="2" name="">
             <a:extLst xmlns:a="http://schemas.openxmlformats.org/drawingml/2006/main">
               <a:ext uri="{FF2B5EF4-FFF2-40B4-BE49-F238E27FC236}">
-                <a16:creationId xmlns:a16="http://schemas.microsoft.com/office/drawing/2014/main" id="{A65190DF-00C6-4777-87A4-0DF50349B850}"/>
+                <a16:creationId xmlns:a16="http://schemas.microsoft.com/office/drawing/2014/main" id="{BFE4DB8D-9311-40BF-A0B9-B8361A6DDF16}"/>
               </a:ext>
             </a:extLst>
           </p:cNvPr>
@@ -5986,7 +6070,7 @@
           <p:cNvPr id="3" name="">
             <a:extLst xmlns:a="http://schemas.openxmlformats.org/drawingml/2006/main">
               <a:ext uri="{FF2B5EF4-FFF2-40B4-BE49-F238E27FC236}">
-                <a16:creationId xmlns:a16="http://schemas.microsoft.com/office/drawing/2014/main" id="{DA18F275-580D-474E-84DB-AB6F9F51B1DA}"/>
+                <a16:creationId xmlns:a16="http://schemas.microsoft.com/office/drawing/2014/main" id="{CDDCC5E5-FD33-4D01-BC28-778487D404B1}"/>
               </a:ext>
             </a:extLst>
           </p:cNvPr>
@@ -6041,7 +6125,7 @@
     </p:spTree>
     <p:extLst>
       <p:ext uri="{BB962C8B-B14F-4D97-AF65-F5344CB8AC3E}">
-        <p14:creationId xmlns:p14="http://schemas.microsoft.com/office/powerpoint/2010/main" val="1986852689"/>
+        <p14:creationId xmlns:p14="http://schemas.microsoft.com/office/powerpoint/2010/main" val="1765712116"/>
       </p:ext>
     </p:extLst>
   </p:cSld>
@@ -6069,10 +6153,10 @@
       </p:grpSpPr>
       <p:sp>
         <p:nvSpPr>
-          <p:cNvPr id="8" name="">
-            <a:extLst xmlns:a="http://schemas.openxmlformats.org/drawingml/2006/main">
-              <a:ext uri="{FF2B5EF4-FFF2-40B4-BE49-F238E27FC236}">
-                <a16:creationId xmlns:a16="http://schemas.microsoft.com/office/drawing/2014/main" id="{BD4795FD-216F-4C27-BD31-86D3A09DB9F2}"/>
+          <p:cNvPr id="7" name="">
+            <a:extLst xmlns:a="http://schemas.openxmlformats.org/drawingml/2006/main">
+              <a:ext uri="{FF2B5EF4-FFF2-40B4-BE49-F238E27FC236}">
+                <a16:creationId xmlns:a16="http://schemas.microsoft.com/office/drawing/2014/main" id="{DE508637-465A-453D-9F1F-9D54267E5641}"/>
               </a:ext>
             </a:extLst>
           </p:cNvPr>
@@ -6129,7 +6213,7 @@
           <p:cNvPr id="2" name="title-rule">
             <a:extLst xmlns:a="http://schemas.openxmlformats.org/drawingml/2006/main">
               <a:ext uri="{FF2B5EF4-FFF2-40B4-BE49-F238E27FC236}">
-                <a16:creationId xmlns:a16="http://schemas.microsoft.com/office/drawing/2014/main" id="{207EFFBD-E496-4C0C-AC7D-B05692C869D3}"/>
+                <a16:creationId xmlns:a16="http://schemas.microsoft.com/office/drawing/2014/main" id="{E7367B2A-EC3D-4B13-9C5E-55C5F7A4160D}"/>
               </a:ext>
             </a:extLst>
           </p:cNvPr>
@@ -6159,18 +6243,18 @@
           <p:cNvPr id="3" name="">
             <a:extLst xmlns:a="http://schemas.openxmlformats.org/drawingml/2006/main">
               <a:ext uri="{FF2B5EF4-FFF2-40B4-BE49-F238E27FC236}">
-                <a16:creationId xmlns:a16="http://schemas.microsoft.com/office/drawing/2014/main" id="{0D530EEB-56F8-451A-B722-19FA5BF120EF}"/>
-              </a:ext>
-            </a:extLst>
-          </p:cNvPr>
-          <p:cNvSpPr>
-            <a:spLocks xmlns:a="http://schemas.openxmlformats.org/drawingml/2006/main" noGrp="1"/>
-          </p:cNvSpPr>
-          <p:nvPr/>
-        </p:nvSpPr>
-        <p:spPr>
-          <a:xfrm xmlns:a="http://schemas.openxmlformats.org/drawingml/2006/main">
-            <a:off x="914400" y="1600200"/>
+                <a16:creationId xmlns:a16="http://schemas.microsoft.com/office/drawing/2014/main" id="{FCEA9DD3-72EF-4BAA-9B52-BD19C52AB3A0}"/>
+              </a:ext>
+            </a:extLst>
+          </p:cNvPr>
+          <p:cNvSpPr>
+            <a:spLocks xmlns:a="http://schemas.openxmlformats.org/drawingml/2006/main" noGrp="1"/>
+          </p:cNvSpPr>
+          <p:nvPr/>
+        </p:nvSpPr>
+        <p:spPr>
+          <a:xfrm xmlns:a="http://schemas.openxmlformats.org/drawingml/2006/main">
+            <a:off x="914400" y="2376488"/>
             <a:ext cx="10134600" cy="1104900"/>
           </a:xfrm>
           <a:prstGeom xmlns:a="http://schemas.openxmlformats.org/drawingml/2006/main" prst="rect">
@@ -6216,18 +6300,18 @@
           <p:cNvPr id="4" name="">
             <a:extLst xmlns:a="http://schemas.openxmlformats.org/drawingml/2006/main">
               <a:ext uri="{FF2B5EF4-FFF2-40B4-BE49-F238E27FC236}">
-                <a16:creationId xmlns:a16="http://schemas.microsoft.com/office/drawing/2014/main" id="{C07FE39D-A6BA-46C9-821B-41624DB31464}"/>
-              </a:ext>
-            </a:extLst>
-          </p:cNvPr>
-          <p:cNvSpPr>
-            <a:spLocks xmlns:a="http://schemas.openxmlformats.org/drawingml/2006/main" noGrp="1"/>
-          </p:cNvSpPr>
-          <p:nvPr/>
-        </p:nvSpPr>
-        <p:spPr>
-          <a:xfrm xmlns:a="http://schemas.openxmlformats.org/drawingml/2006/main">
-            <a:off x="914400" y="2895600"/>
+                <a16:creationId xmlns:a16="http://schemas.microsoft.com/office/drawing/2014/main" id="{63336DFC-F6BD-4A44-9F43-6A9CB2997C15}"/>
+              </a:ext>
+            </a:extLst>
+          </p:cNvPr>
+          <p:cNvSpPr>
+            <a:spLocks xmlns:a="http://schemas.openxmlformats.org/drawingml/2006/main" noGrp="1"/>
+          </p:cNvSpPr>
+          <p:nvPr/>
+        </p:nvSpPr>
+        <p:spPr>
+          <a:xfrm xmlns:a="http://schemas.openxmlformats.org/drawingml/2006/main">
+            <a:off x="914400" y="3671888"/>
             <a:ext cx="10134600" cy="590550"/>
           </a:xfrm>
           <a:prstGeom xmlns:a="http://schemas.openxmlformats.org/drawingml/2006/main" prst="rect">
@@ -6273,18 +6357,18 @@
           <p:cNvPr id="5" name="">
             <a:extLst xmlns:a="http://schemas.openxmlformats.org/drawingml/2006/main">
               <a:ext uri="{FF2B5EF4-FFF2-40B4-BE49-F238E27FC236}">
-                <a16:creationId xmlns:a16="http://schemas.microsoft.com/office/drawing/2014/main" id="{3A11B5F8-39FF-479B-8DCD-4EA9B345AB27}"/>
-              </a:ext>
-            </a:extLst>
-          </p:cNvPr>
-          <p:cNvSpPr>
-            <a:spLocks xmlns:a="http://schemas.openxmlformats.org/drawingml/2006/main" noGrp="1"/>
-          </p:cNvSpPr>
-          <p:nvPr/>
-        </p:nvSpPr>
-        <p:spPr>
-          <a:xfrm xmlns:a="http://schemas.openxmlformats.org/drawingml/2006/main">
-            <a:off x="914400" y="3676650"/>
+                <a16:creationId xmlns:a16="http://schemas.microsoft.com/office/drawing/2014/main" id="{38CE183A-3A97-4970-9D18-74CD507A25E5}"/>
+              </a:ext>
+            </a:extLst>
+          </p:cNvPr>
+          <p:cNvSpPr>
+            <a:spLocks xmlns:a="http://schemas.openxmlformats.org/drawingml/2006/main" noGrp="1"/>
+          </p:cNvSpPr>
+          <p:nvPr/>
+        </p:nvSpPr>
+        <p:spPr>
+          <a:xfrm xmlns:a="http://schemas.openxmlformats.org/drawingml/2006/main">
+            <a:off x="914400" y="4452938"/>
             <a:ext cx="10134600" cy="847725"/>
           </a:xfrm>
           <a:prstGeom xmlns:a="http://schemas.openxmlformats.org/drawingml/2006/main" prst="rect">
@@ -6330,19 +6414,19 @@
           <p:cNvPr id="6" name="">
             <a:extLst xmlns:a="http://schemas.openxmlformats.org/drawingml/2006/main">
               <a:ext uri="{FF2B5EF4-FFF2-40B4-BE49-F238E27FC236}">
-                <a16:creationId xmlns:a16="http://schemas.microsoft.com/office/drawing/2014/main" id="{EC839C3B-488B-44AA-8C80-E75569DFFA4C}"/>
-              </a:ext>
-            </a:extLst>
-          </p:cNvPr>
-          <p:cNvSpPr>
-            <a:spLocks xmlns:a="http://schemas.openxmlformats.org/drawingml/2006/main" noGrp="1"/>
-          </p:cNvSpPr>
-          <p:nvPr/>
-        </p:nvSpPr>
-        <p:spPr>
-          <a:xfrm xmlns:a="http://schemas.openxmlformats.org/drawingml/2006/main">
-            <a:off x="914400" y="4714875"/>
-            <a:ext cx="10134600" cy="1104900"/>
+                <a16:creationId xmlns:a16="http://schemas.microsoft.com/office/drawing/2014/main" id="{3162E998-E5D8-4C47-8002-60BED2D9D222}"/>
+              </a:ext>
+            </a:extLst>
+          </p:cNvPr>
+          <p:cNvSpPr>
+            <a:spLocks xmlns:a="http://schemas.openxmlformats.org/drawingml/2006/main" noGrp="1"/>
+          </p:cNvSpPr>
+          <p:nvPr/>
+        </p:nvSpPr>
+        <p:spPr>
+          <a:xfrm xmlns:a="http://schemas.openxmlformats.org/drawingml/2006/main">
+            <a:off x="10953750" y="6438900"/>
+            <a:ext cx="552450" cy="171450"/>
           </a:xfrm>
           <a:prstGeom xmlns:a="http://schemas.openxmlformats.org/drawingml/2006/main" prst="rect">
             <a:avLst/>
@@ -6358,63 +6442,6 @@
           </a:bodyPr>
           <a:lstStyle xmlns:a="http://schemas.openxmlformats.org/drawingml/2006/main"/>
           <a:p xmlns:a="http://schemas.openxmlformats.org/drawingml/2006/main">
-            <a:pPr>
-              <a:defRPr sz="1575" b="0">
-                <a:solidFill>
-                  <a:srgbClr val="526B61"/>
-                </a:solidFill>
-                <a:latin typeface="Calibri"/>
-                <a:ea typeface="Calibri"/>
-                <a:cs typeface="Calibri"/>
-              </a:defRPr>
-            </a:pPr>
-            <a:r>
-              <a:rPr sz="1575" b="0">
-                <a:solidFill>
-                  <a:srgbClr val="526B61"/>
-                </a:solidFill>
-                <a:latin typeface="Calibri"/>
-                <a:ea typeface="Calibri"/>
-                <a:cs typeface="Calibri"/>
-              </a:rPr>
-              <a:t>•  Diversification is beginning — Workout Hydration reached $3.7M in 2024A and Daily Hydration $0.5M in 2024A [2][3], while the 2025 product-channel plan places Daily Hydration more heavily in Retail at $3.15M than Amazon at $2.1M or DTC (direct-to-consumer) at $1.75M [5]. That 2025 split is projected, not booked [5].</a:t>
-            </a:r>
-          </a:p>
-        </p:txBody>
-      </p:sp>
-      <p:sp>
-        <p:nvSpPr>
-          <p:cNvPr id="7" name="">
-            <a:extLst xmlns:a="http://schemas.openxmlformats.org/drawingml/2006/main">
-              <a:ext uri="{FF2B5EF4-FFF2-40B4-BE49-F238E27FC236}">
-                <a16:creationId xmlns:a16="http://schemas.microsoft.com/office/drawing/2014/main" id="{87A038C5-4DE8-4637-8CE4-663C580EF0B2}"/>
-              </a:ext>
-            </a:extLst>
-          </p:cNvPr>
-          <p:cNvSpPr>
-            <a:spLocks xmlns:a="http://schemas.openxmlformats.org/drawingml/2006/main" noGrp="1"/>
-          </p:cNvSpPr>
-          <p:nvPr/>
-        </p:nvSpPr>
-        <p:spPr>
-          <a:xfrm xmlns:a="http://schemas.openxmlformats.org/drawingml/2006/main">
-            <a:off x="10953750" y="6438900"/>
-            <a:ext cx="552450" cy="171450"/>
-          </a:xfrm>
-          <a:prstGeom xmlns:a="http://schemas.openxmlformats.org/drawingml/2006/main" prst="rect">
-            <a:avLst/>
-          </a:prstGeom>
-          <a:noFill xmlns:a="http://schemas.openxmlformats.org/drawingml/2006/main"/>
-          <a:ln xmlns:a="http://schemas.openxmlformats.org/drawingml/2006/main" w="0">
-            <a:noFill/>
-          </a:ln>
-        </p:spPr>
-        <p:txBody>
-          <a:bodyPr xmlns:a="http://schemas.openxmlformats.org/drawingml/2006/main">
-            <a:noAutofit/>
-          </a:bodyPr>
-          <a:lstStyle xmlns:a="http://schemas.openxmlformats.org/drawingml/2006/main"/>
-          <a:p xmlns:a="http://schemas.openxmlformats.org/drawingml/2006/main">
             <a:pPr algn="r">
               <a:defRPr sz="750">
                 <a:solidFill>
@@ -6442,7 +6469,7 @@
     </p:spTree>
     <p:extLst>
       <p:ext uri="{BB962C8B-B14F-4D97-AF65-F5344CB8AC3E}">
-        <p14:creationId xmlns:p14="http://schemas.microsoft.com/office/powerpoint/2010/main" val="675583061"/>
+        <p14:creationId xmlns:p14="http://schemas.microsoft.com/office/powerpoint/2010/main" val="1259869664"/>
       </p:ext>
     </p:extLst>
   </p:cSld>
@@ -6470,10 +6497,10 @@
       </p:grpSpPr>
       <p:sp>
         <p:nvSpPr>
-          <p:cNvPr id="6" name="">
-            <a:extLst xmlns:a="http://schemas.openxmlformats.org/drawingml/2006/main">
-              <a:ext uri="{FF2B5EF4-FFF2-40B4-BE49-F238E27FC236}">
-                <a16:creationId xmlns:a16="http://schemas.microsoft.com/office/drawing/2014/main" id="{F6176CB6-14B1-47A6-A1EC-1F360F1FF1D4}"/>
+          <p:cNvPr id="7" name="">
+            <a:extLst xmlns:a="http://schemas.openxmlformats.org/drawingml/2006/main">
+              <a:ext uri="{FF2B5EF4-FFF2-40B4-BE49-F238E27FC236}">
+                <a16:creationId xmlns:a16="http://schemas.microsoft.com/office/drawing/2014/main" id="{0197D3AF-F7FF-44F1-A2BF-856098EABEA2}"/>
               </a:ext>
             </a:extLst>
           </p:cNvPr>
@@ -6530,7 +6557,7 @@
           <p:cNvPr id="2" name="">
             <a:extLst xmlns:a="http://schemas.openxmlformats.org/drawingml/2006/main">
               <a:ext uri="{FF2B5EF4-FFF2-40B4-BE49-F238E27FC236}">
-                <a16:creationId xmlns:a16="http://schemas.microsoft.com/office/drawing/2014/main" id="{CFA10283-891E-47DA-87BB-CB3526FA6978}"/>
+                <a16:creationId xmlns:a16="http://schemas.microsoft.com/office/drawing/2014/main" id="{E79D4F85-0DA9-49CE-9FE4-A5CF65776BBE}"/>
               </a:ext>
             </a:extLst>
           </p:cNvPr>
@@ -6587,7 +6614,7 @@
           <p:cNvPr id="3" name="title-rule">
             <a:extLst xmlns:a="http://schemas.openxmlformats.org/drawingml/2006/main">
               <a:ext uri="{FF2B5EF4-FFF2-40B4-BE49-F238E27FC236}">
-                <a16:creationId xmlns:a16="http://schemas.microsoft.com/office/drawing/2014/main" id="{CCA959DA-CAC1-4D46-9A8B-88E147A355AD}"/>
+                <a16:creationId xmlns:a16="http://schemas.microsoft.com/office/drawing/2014/main" id="{CCD0B6C9-6FED-4BEA-843F-12EC41E58725}"/>
               </a:ext>
             </a:extLst>
           </p:cNvPr>
@@ -6612,28 +6639,85 @@
           </a:ln>
         </p:spPr>
       </p:sp>
+      <p:sp>
+        <p:nvSpPr>
+          <p:cNvPr id="4" name="">
+            <a:extLst xmlns:a="http://schemas.openxmlformats.org/drawingml/2006/main">
+              <a:ext uri="{FF2B5EF4-FFF2-40B4-BE49-F238E27FC236}">
+                <a16:creationId xmlns:a16="http://schemas.microsoft.com/office/drawing/2014/main" id="{63A800C5-672E-4F12-9D96-1528566A2854}"/>
+              </a:ext>
+            </a:extLst>
+          </p:cNvPr>
+          <p:cNvSpPr>
+            <a:spLocks xmlns:a="http://schemas.openxmlformats.org/drawingml/2006/main" noGrp="1"/>
+          </p:cNvSpPr>
+          <p:nvPr/>
+        </p:nvSpPr>
+        <p:spPr>
+          <a:xfrm xmlns:a="http://schemas.openxmlformats.org/drawingml/2006/main">
+            <a:off x="723900" y="2757488"/>
+            <a:ext cx="3638550" cy="1933575"/>
+          </a:xfrm>
+          <a:prstGeom xmlns:a="http://schemas.openxmlformats.org/drawingml/2006/main" prst="rect">
+            <a:avLst/>
+          </a:prstGeom>
+          <a:noFill xmlns:a="http://schemas.openxmlformats.org/drawingml/2006/main"/>
+          <a:ln xmlns:a="http://schemas.openxmlformats.org/drawingml/2006/main" w="0">
+            <a:noFill/>
+          </a:ln>
+        </p:spPr>
+        <p:txBody>
+          <a:bodyPr xmlns:a="http://schemas.openxmlformats.org/drawingml/2006/main">
+            <a:noAutofit/>
+          </a:bodyPr>
+          <a:lstStyle xmlns:a="http://schemas.openxmlformats.org/drawingml/2006/main"/>
+          <a:p xmlns:a="http://schemas.openxmlformats.org/drawingml/2006/main">
+            <a:pPr>
+              <a:defRPr sz="1425" b="0">
+                <a:solidFill>
+                  <a:srgbClr val="526B61"/>
+                </a:solidFill>
+                <a:latin typeface="Calibri"/>
+                <a:ea typeface="Calibri"/>
+                <a:cs typeface="Calibri"/>
+              </a:defRPr>
+            </a:pPr>
+            <a:r>
+              <a:rPr sz="1425" b="0">
+                <a:solidFill>
+                  <a:srgbClr val="526B61"/>
+                </a:solidFill>
+                <a:latin typeface="Calibri"/>
+                <a:ea typeface="Calibri"/>
+                <a:cs typeface="Calibri"/>
+              </a:rPr>
+              <a:t>•  Diversification is beginning — Workout Hydration reached $3.7M in 2024A and Daily Hydration $0.5M in 2024A [2][3], while the 2025 product-channel plan places Daily Hydration more heavily in Retail at $3.15M than Amazon at $2.1M or DTC (direct-to-consumer) at $1.75M [5]. That 2025 split is projected, not booked [5].</a:t>
+            </a:r>
+          </a:p>
+        </p:txBody>
+      </p:sp>
       <p:graphicFrame>
         <p:nvGraphicFramePr>
-          <p:cNvPr id="9" name="Chart"/>
+          <p:cNvPr id="11" name="Chart"/>
           <p:cNvGraphicFramePr/>
           <p:nvPr/>
         </p:nvGraphicFramePr>
         <p:xfrm>
-          <a:off xmlns:a="http://schemas.openxmlformats.org/drawingml/2006/main" x="819150" y="1504950"/>
-          <a:ext xmlns:a="http://schemas.openxmlformats.org/drawingml/2006/main" cx="10553700" cy="4533900"/>
+          <a:off xmlns:a="http://schemas.openxmlformats.org/drawingml/2006/main" x="4572000" y="1619250"/>
+          <a:ext xmlns:a="http://schemas.openxmlformats.org/drawingml/2006/main" cx="6800850" cy="4171950"/>
         </p:xfrm>
         <a:graphic xmlns:a="http://schemas.openxmlformats.org/drawingml/2006/main">
           <a:graphicData uri="http://schemas.openxmlformats.org/drawingml/2006/chart">
-            <c:chart xmlns:r="http://schemas.openxmlformats.org/officeDocument/2006/relationships" xmlns:c="http://schemas.openxmlformats.org/drawingml/2006/chart" r:id="R5090c081a4dc4c5b"/>
+            <c:chart xmlns:r="http://schemas.openxmlformats.org/officeDocument/2006/relationships" xmlns:c="http://schemas.openxmlformats.org/drawingml/2006/chart" r:id="Rda6a1027c3344125"/>
           </a:graphicData>
         </a:graphic>
       </p:graphicFrame>
       <p:sp>
         <p:nvSpPr>
-          <p:cNvPr id="5" name="">
-            <a:extLst xmlns:a="http://schemas.openxmlformats.org/drawingml/2006/main">
-              <a:ext uri="{FF2B5EF4-FFF2-40B4-BE49-F238E27FC236}">
-                <a16:creationId xmlns:a16="http://schemas.microsoft.com/office/drawing/2014/main" id="{C395B731-92D0-432A-AD13-8F2F0D523CEA}"/>
+          <p:cNvPr id="6" name="">
+            <a:extLst xmlns:a="http://schemas.openxmlformats.org/drawingml/2006/main">
+              <a:ext uri="{FF2B5EF4-FFF2-40B4-BE49-F238E27FC236}">
+                <a16:creationId xmlns:a16="http://schemas.microsoft.com/office/drawing/2014/main" id="{010FBF9D-4AED-42F1-8E94-68AC4BAFDFBE}"/>
               </a:ext>
             </a:extLst>
           </p:cNvPr>
@@ -6688,7 +6772,7 @@
     </p:spTree>
     <p:extLst>
       <p:ext uri="{BB962C8B-B14F-4D97-AF65-F5344CB8AC3E}">
-        <p14:creationId xmlns:p14="http://schemas.microsoft.com/office/powerpoint/2010/main" val="1096598553"/>
+        <p14:creationId xmlns:p14="http://schemas.microsoft.com/office/powerpoint/2010/main" val="447524368"/>
       </p:ext>
     </p:extLst>
   </p:cSld>
@@ -6716,10 +6800,10 @@
       </p:grpSpPr>
       <p:sp>
         <p:nvSpPr>
-          <p:cNvPr id="8" name="">
-            <a:extLst xmlns:a="http://schemas.openxmlformats.org/drawingml/2006/main">
-              <a:ext uri="{FF2B5EF4-FFF2-40B4-BE49-F238E27FC236}">
-                <a16:creationId xmlns:a16="http://schemas.microsoft.com/office/drawing/2014/main" id="{1CF83900-E1FF-4A76-AAEF-0AC9379F5617}"/>
+          <p:cNvPr id="7" name="">
+            <a:extLst xmlns:a="http://schemas.openxmlformats.org/drawingml/2006/main">
+              <a:ext uri="{FF2B5EF4-FFF2-40B4-BE49-F238E27FC236}">
+                <a16:creationId xmlns:a16="http://schemas.microsoft.com/office/drawing/2014/main" id="{4FC6170B-FB78-4B3E-870A-51B4B6B88011}"/>
               </a:ext>
             </a:extLst>
           </p:cNvPr>
@@ -6776,7 +6860,7 @@
           <p:cNvPr id="2" name="title-rule">
             <a:extLst xmlns:a="http://schemas.openxmlformats.org/drawingml/2006/main">
               <a:ext uri="{FF2B5EF4-FFF2-40B4-BE49-F238E27FC236}">
-                <a16:creationId xmlns:a16="http://schemas.microsoft.com/office/drawing/2014/main" id="{6CE0275F-42DB-4D28-9DB4-CFA83005B49D}"/>
+                <a16:creationId xmlns:a16="http://schemas.microsoft.com/office/drawing/2014/main" id="{5C24F2E6-BFFC-4AA8-A2C8-062D9843A10B}"/>
               </a:ext>
             </a:extLst>
           </p:cNvPr>
@@ -6806,18 +6890,18 @@
           <p:cNvPr id="3" name="">
             <a:extLst xmlns:a="http://schemas.openxmlformats.org/drawingml/2006/main">
               <a:ext uri="{FF2B5EF4-FFF2-40B4-BE49-F238E27FC236}">
-                <a16:creationId xmlns:a16="http://schemas.microsoft.com/office/drawing/2014/main" id="{7B6B4E87-BC40-456F-B2F0-4D5177428D13}"/>
-              </a:ext>
-            </a:extLst>
-          </p:cNvPr>
-          <p:cNvSpPr>
-            <a:spLocks xmlns:a="http://schemas.openxmlformats.org/drawingml/2006/main" noGrp="1"/>
-          </p:cNvSpPr>
-          <p:nvPr/>
-        </p:nvSpPr>
-        <p:spPr>
-          <a:xfrm xmlns:a="http://schemas.openxmlformats.org/drawingml/2006/main">
-            <a:off x="914400" y="1600200"/>
+                <a16:creationId xmlns:a16="http://schemas.microsoft.com/office/drawing/2014/main" id="{AE695900-1E7B-4295-8743-4F2474B4086C}"/>
+              </a:ext>
+            </a:extLst>
+          </p:cNvPr>
+          <p:cNvSpPr>
+            <a:spLocks xmlns:a="http://schemas.openxmlformats.org/drawingml/2006/main" noGrp="1"/>
+          </p:cNvSpPr>
+          <p:nvPr/>
+        </p:nvSpPr>
+        <p:spPr>
+          <a:xfrm xmlns:a="http://schemas.openxmlformats.org/drawingml/2006/main">
+            <a:off x="914400" y="2247900"/>
             <a:ext cx="10134600" cy="1104900"/>
           </a:xfrm>
           <a:prstGeom xmlns:a="http://schemas.openxmlformats.org/drawingml/2006/main" prst="rect">
@@ -6863,18 +6947,18 @@
           <p:cNvPr id="4" name="">
             <a:extLst xmlns:a="http://schemas.openxmlformats.org/drawingml/2006/main">
               <a:ext uri="{FF2B5EF4-FFF2-40B4-BE49-F238E27FC236}">
-                <a16:creationId xmlns:a16="http://schemas.microsoft.com/office/drawing/2014/main" id="{596ECCFB-3AAD-4CA0-BA07-5990C2A0627B}"/>
-              </a:ext>
-            </a:extLst>
-          </p:cNvPr>
-          <p:cNvSpPr>
-            <a:spLocks xmlns:a="http://schemas.openxmlformats.org/drawingml/2006/main" noGrp="1"/>
-          </p:cNvSpPr>
-          <p:nvPr/>
-        </p:nvSpPr>
-        <p:spPr>
-          <a:xfrm xmlns:a="http://schemas.openxmlformats.org/drawingml/2006/main">
-            <a:off x="914400" y="2895600"/>
+                <a16:creationId xmlns:a16="http://schemas.microsoft.com/office/drawing/2014/main" id="{9FEEBA88-34F7-4A98-B0D9-20A8EFCCE285}"/>
+              </a:ext>
+            </a:extLst>
+          </p:cNvPr>
+          <p:cNvSpPr>
+            <a:spLocks xmlns:a="http://schemas.openxmlformats.org/drawingml/2006/main" noGrp="1"/>
+          </p:cNvSpPr>
+          <p:nvPr/>
+        </p:nvSpPr>
+        <p:spPr>
+          <a:xfrm xmlns:a="http://schemas.openxmlformats.org/drawingml/2006/main">
+            <a:off x="914400" y="3543300"/>
             <a:ext cx="10134600" cy="847725"/>
           </a:xfrm>
           <a:prstGeom xmlns:a="http://schemas.openxmlformats.org/drawingml/2006/main" prst="rect">
@@ -6920,18 +7004,18 @@
           <p:cNvPr id="5" name="">
             <a:extLst xmlns:a="http://schemas.openxmlformats.org/drawingml/2006/main">
               <a:ext uri="{FF2B5EF4-FFF2-40B4-BE49-F238E27FC236}">
-                <a16:creationId xmlns:a16="http://schemas.microsoft.com/office/drawing/2014/main" id="{4F89F58A-7AC3-4AF5-B204-9A98FE3012A0}"/>
-              </a:ext>
-            </a:extLst>
-          </p:cNvPr>
-          <p:cNvSpPr>
-            <a:spLocks xmlns:a="http://schemas.openxmlformats.org/drawingml/2006/main" noGrp="1"/>
-          </p:cNvSpPr>
-          <p:nvPr/>
-        </p:nvSpPr>
-        <p:spPr>
-          <a:xfrm xmlns:a="http://schemas.openxmlformats.org/drawingml/2006/main">
-            <a:off x="914400" y="3933825"/>
+                <a16:creationId xmlns:a16="http://schemas.microsoft.com/office/drawing/2014/main" id="{F7EC3656-14EA-4579-B1C2-49A63DB35224}"/>
+              </a:ext>
+            </a:extLst>
+          </p:cNvPr>
+          <p:cNvSpPr>
+            <a:spLocks xmlns:a="http://schemas.openxmlformats.org/drawingml/2006/main" noGrp="1"/>
+          </p:cNvSpPr>
+          <p:nvPr/>
+        </p:nvSpPr>
+        <p:spPr>
+          <a:xfrm xmlns:a="http://schemas.openxmlformats.org/drawingml/2006/main">
+            <a:off x="914400" y="4581525"/>
             <a:ext cx="10134600" cy="847725"/>
           </a:xfrm>
           <a:prstGeom xmlns:a="http://schemas.openxmlformats.org/drawingml/2006/main" prst="rect">
@@ -6977,19 +7061,19 @@
           <p:cNvPr id="6" name="">
             <a:extLst xmlns:a="http://schemas.openxmlformats.org/drawingml/2006/main">
               <a:ext uri="{FF2B5EF4-FFF2-40B4-BE49-F238E27FC236}">
-                <a16:creationId xmlns:a16="http://schemas.microsoft.com/office/drawing/2014/main" id="{6F993FB3-CFE5-408D-9A84-FC43342B4806}"/>
-              </a:ext>
-            </a:extLst>
-          </p:cNvPr>
-          <p:cNvSpPr>
-            <a:spLocks xmlns:a="http://schemas.openxmlformats.org/drawingml/2006/main" noGrp="1"/>
-          </p:cNvSpPr>
-          <p:nvPr/>
-        </p:nvSpPr>
-        <p:spPr>
-          <a:xfrm xmlns:a="http://schemas.openxmlformats.org/drawingml/2006/main">
-            <a:off x="914400" y="4972050"/>
-            <a:ext cx="10134600" cy="847725"/>
+                <a16:creationId xmlns:a16="http://schemas.microsoft.com/office/drawing/2014/main" id="{0F0E2947-8E70-4E66-800D-79A91312AD47}"/>
+              </a:ext>
+            </a:extLst>
+          </p:cNvPr>
+          <p:cNvSpPr>
+            <a:spLocks xmlns:a="http://schemas.openxmlformats.org/drawingml/2006/main" noGrp="1"/>
+          </p:cNvSpPr>
+          <p:nvPr/>
+        </p:nvSpPr>
+        <p:spPr>
+          <a:xfrm xmlns:a="http://schemas.openxmlformats.org/drawingml/2006/main">
+            <a:off x="10953750" y="6438900"/>
+            <a:ext cx="552450" cy="171450"/>
           </a:xfrm>
           <a:prstGeom xmlns:a="http://schemas.openxmlformats.org/drawingml/2006/main" prst="rect">
             <a:avLst/>
@@ -7005,63 +7089,6 @@
           </a:bodyPr>
           <a:lstStyle xmlns:a="http://schemas.openxmlformats.org/drawingml/2006/main"/>
           <a:p xmlns:a="http://schemas.openxmlformats.org/drawingml/2006/main">
-            <a:pPr>
-              <a:defRPr sz="1575" b="0">
-                <a:solidFill>
-                  <a:srgbClr val="526B61"/>
-                </a:solidFill>
-                <a:latin typeface="Calibri"/>
-                <a:ea typeface="Calibri"/>
-                <a:cs typeface="Calibri"/>
-              </a:defRPr>
-            </a:pPr>
-            <a:r>
-              <a:rPr sz="1575" b="0">
-                <a:solidFill>
-                  <a:srgbClr val="526B61"/>
-                </a:solidFill>
-                <a:latin typeface="Calibri"/>
-                <a:ea typeface="Calibri"/>
-                <a:cs typeface="Calibri"/>
-              </a:rPr>
-              <a:t>•  Amazon fueled growth — Amazon supplied $9.3M of the $16.1M increase in net revenue from 2022A to 2024A, or 57.8% [8][12], and the build has been supported by deeper repeat behavior, with average Amazon subscribers rising to 7.6K in 2H24 from 0.1K in 1H23 [8].</a:t>
-            </a:r>
-          </a:p>
-        </p:txBody>
-      </p:sp>
-      <p:sp>
-        <p:nvSpPr>
-          <p:cNvPr id="7" name="">
-            <a:extLst xmlns:a="http://schemas.openxmlformats.org/drawingml/2006/main">
-              <a:ext uri="{FF2B5EF4-FFF2-40B4-BE49-F238E27FC236}">
-                <a16:creationId xmlns:a16="http://schemas.microsoft.com/office/drawing/2014/main" id="{E000A72F-DD33-4490-B3FD-9B466CF6E063}"/>
-              </a:ext>
-            </a:extLst>
-          </p:cNvPr>
-          <p:cNvSpPr>
-            <a:spLocks xmlns:a="http://schemas.openxmlformats.org/drawingml/2006/main" noGrp="1"/>
-          </p:cNvSpPr>
-          <p:nvPr/>
-        </p:nvSpPr>
-        <p:spPr>
-          <a:xfrm xmlns:a="http://schemas.openxmlformats.org/drawingml/2006/main">
-            <a:off x="10953750" y="6438900"/>
-            <a:ext cx="552450" cy="171450"/>
-          </a:xfrm>
-          <a:prstGeom xmlns:a="http://schemas.openxmlformats.org/drawingml/2006/main" prst="rect">
-            <a:avLst/>
-          </a:prstGeom>
-          <a:noFill xmlns:a="http://schemas.openxmlformats.org/drawingml/2006/main"/>
-          <a:ln xmlns:a="http://schemas.openxmlformats.org/drawingml/2006/main" w="0">
-            <a:noFill/>
-          </a:ln>
-        </p:spPr>
-        <p:txBody>
-          <a:bodyPr xmlns:a="http://schemas.openxmlformats.org/drawingml/2006/main">
-            <a:noAutofit/>
-          </a:bodyPr>
-          <a:lstStyle xmlns:a="http://schemas.openxmlformats.org/drawingml/2006/main"/>
-          <a:p xmlns:a="http://schemas.openxmlformats.org/drawingml/2006/main">
             <a:pPr algn="r">
               <a:defRPr sz="750">
                 <a:solidFill>
@@ -7089,7 +7116,7 @@
     </p:spTree>
     <p:extLst>
       <p:ext uri="{BB962C8B-B14F-4D97-AF65-F5344CB8AC3E}">
-        <p14:creationId xmlns:p14="http://schemas.microsoft.com/office/powerpoint/2010/main" val="36093142"/>
+        <p14:creationId xmlns:p14="http://schemas.microsoft.com/office/powerpoint/2010/main" val="773501695"/>
       </p:ext>
     </p:extLst>
   </p:cSld>
@@ -7117,10 +7144,10 @@
       </p:grpSpPr>
       <p:sp>
         <p:nvSpPr>
-          <p:cNvPr id="6" name="">
-            <a:extLst xmlns:a="http://schemas.openxmlformats.org/drawingml/2006/main">
-              <a:ext uri="{FF2B5EF4-FFF2-40B4-BE49-F238E27FC236}">
-                <a16:creationId xmlns:a16="http://schemas.microsoft.com/office/drawing/2014/main" id="{C35324CC-5DC9-4CE5-AAA2-7DE79C5E2876}"/>
+          <p:cNvPr id="7" name="">
+            <a:extLst xmlns:a="http://schemas.openxmlformats.org/drawingml/2006/main">
+              <a:ext uri="{FF2B5EF4-FFF2-40B4-BE49-F238E27FC236}">
+                <a16:creationId xmlns:a16="http://schemas.microsoft.com/office/drawing/2014/main" id="{11361CF2-CFAD-43BB-B808-4E4A1FD1B3EA}"/>
               </a:ext>
             </a:extLst>
           </p:cNvPr>
@@ -7177,7 +7204,7 @@
           <p:cNvPr id="2" name="">
             <a:extLst xmlns:a="http://schemas.openxmlformats.org/drawingml/2006/main">
               <a:ext uri="{FF2B5EF4-FFF2-40B4-BE49-F238E27FC236}">
-                <a16:creationId xmlns:a16="http://schemas.microsoft.com/office/drawing/2014/main" id="{35873D09-B7A5-4C7F-BB54-D79AEA9B3DF5}"/>
+                <a16:creationId xmlns:a16="http://schemas.microsoft.com/office/drawing/2014/main" id="{73E73DF3-5825-476A-A80B-C316778BEF84}"/>
               </a:ext>
             </a:extLst>
           </p:cNvPr>
@@ -7234,7 +7261,7 @@
           <p:cNvPr id="3" name="title-rule">
             <a:extLst xmlns:a="http://schemas.openxmlformats.org/drawingml/2006/main">
               <a:ext uri="{FF2B5EF4-FFF2-40B4-BE49-F238E27FC236}">
-                <a16:creationId xmlns:a16="http://schemas.microsoft.com/office/drawing/2014/main" id="{C5C9C1AB-0073-413E-9304-A7FEA591B260}"/>
+                <a16:creationId xmlns:a16="http://schemas.microsoft.com/office/drawing/2014/main" id="{D5B30BE2-9CE2-46B8-AEDA-74FC95A4D7E8}"/>
               </a:ext>
             </a:extLst>
           </p:cNvPr>
@@ -7259,28 +7286,85 @@
           </a:ln>
         </p:spPr>
       </p:sp>
+      <p:sp>
+        <p:nvSpPr>
+          <p:cNvPr id="4" name="">
+            <a:extLst xmlns:a="http://schemas.openxmlformats.org/drawingml/2006/main">
+              <a:ext uri="{FF2B5EF4-FFF2-40B4-BE49-F238E27FC236}">
+                <a16:creationId xmlns:a16="http://schemas.microsoft.com/office/drawing/2014/main" id="{7156DF12-D2FE-40FF-814E-170C7EF81DAF}"/>
+              </a:ext>
+            </a:extLst>
+          </p:cNvPr>
+          <p:cNvSpPr>
+            <a:spLocks xmlns:a="http://schemas.openxmlformats.org/drawingml/2006/main" noGrp="1"/>
+          </p:cNvSpPr>
+          <p:nvPr/>
+        </p:nvSpPr>
+        <p:spPr>
+          <a:xfrm xmlns:a="http://schemas.openxmlformats.org/drawingml/2006/main">
+            <a:off x="723900" y="2871788"/>
+            <a:ext cx="3638550" cy="1704975"/>
+          </a:xfrm>
+          <a:prstGeom xmlns:a="http://schemas.openxmlformats.org/drawingml/2006/main" prst="rect">
+            <a:avLst/>
+          </a:prstGeom>
+          <a:noFill xmlns:a="http://schemas.openxmlformats.org/drawingml/2006/main"/>
+          <a:ln xmlns:a="http://schemas.openxmlformats.org/drawingml/2006/main" w="0">
+            <a:noFill/>
+          </a:ln>
+        </p:spPr>
+        <p:txBody>
+          <a:bodyPr xmlns:a="http://schemas.openxmlformats.org/drawingml/2006/main">
+            <a:noAutofit/>
+          </a:bodyPr>
+          <a:lstStyle xmlns:a="http://schemas.openxmlformats.org/drawingml/2006/main"/>
+          <a:p xmlns:a="http://schemas.openxmlformats.org/drawingml/2006/main">
+            <a:pPr>
+              <a:defRPr sz="1425" b="0">
+                <a:solidFill>
+                  <a:srgbClr val="526B61"/>
+                </a:solidFill>
+                <a:latin typeface="Calibri"/>
+                <a:ea typeface="Calibri"/>
+                <a:cs typeface="Calibri"/>
+              </a:defRPr>
+            </a:pPr>
+            <a:r>
+              <a:rPr sz="1425" b="0">
+                <a:solidFill>
+                  <a:srgbClr val="526B61"/>
+                </a:solidFill>
+                <a:latin typeface="Calibri"/>
+                <a:ea typeface="Calibri"/>
+                <a:cs typeface="Calibri"/>
+              </a:rPr>
+              <a:t>•  Amazon fueled growth — Amazon supplied $9.3M of the $16.1M increase in net revenue from 2022A to 2024A, or 57.8% [8][12], and the build has been supported by deeper repeat behavior, with average Amazon subscribers rising to 7.6K in 2H24 from 0.1K in 1H23 [8].</a:t>
+            </a:r>
+          </a:p>
+        </p:txBody>
+      </p:sp>
       <p:graphicFrame>
         <p:nvGraphicFramePr>
-          <p:cNvPr id="9" name="Chart"/>
+          <p:cNvPr id="11" name="Chart"/>
           <p:cNvGraphicFramePr/>
           <p:nvPr/>
         </p:nvGraphicFramePr>
         <p:xfrm>
-          <a:off xmlns:a="http://schemas.openxmlformats.org/drawingml/2006/main" x="819150" y="1504950"/>
-          <a:ext xmlns:a="http://schemas.openxmlformats.org/drawingml/2006/main" cx="10553700" cy="4533900"/>
+          <a:off xmlns:a="http://schemas.openxmlformats.org/drawingml/2006/main" x="4572000" y="1619250"/>
+          <a:ext xmlns:a="http://schemas.openxmlformats.org/drawingml/2006/main" cx="6800850" cy="4171950"/>
         </p:xfrm>
         <a:graphic xmlns:a="http://schemas.openxmlformats.org/drawingml/2006/main">
           <a:graphicData uri="http://schemas.openxmlformats.org/drawingml/2006/chart">
-            <c:chart xmlns:r="http://schemas.openxmlformats.org/officeDocument/2006/relationships" xmlns:c="http://schemas.openxmlformats.org/drawingml/2006/chart" r:id="R96a9b2209f9f4a9c"/>
+            <c:chart xmlns:r="http://schemas.openxmlformats.org/officeDocument/2006/relationships" xmlns:c="http://schemas.openxmlformats.org/drawingml/2006/chart" r:id="Ra45c75b3179648b2"/>
           </a:graphicData>
         </a:graphic>
       </p:graphicFrame>
       <p:sp>
         <p:nvSpPr>
-          <p:cNvPr id="5" name="">
-            <a:extLst xmlns:a="http://schemas.openxmlformats.org/drawingml/2006/main">
-              <a:ext uri="{FF2B5EF4-FFF2-40B4-BE49-F238E27FC236}">
-                <a16:creationId xmlns:a16="http://schemas.microsoft.com/office/drawing/2014/main" id="{5DC0E89E-126C-4537-BA8F-8A7D25403310}"/>
+          <p:cNvPr id="6" name="">
+            <a:extLst xmlns:a="http://schemas.openxmlformats.org/drawingml/2006/main">
+              <a:ext uri="{FF2B5EF4-FFF2-40B4-BE49-F238E27FC236}">
+                <a16:creationId xmlns:a16="http://schemas.microsoft.com/office/drawing/2014/main" id="{B73C6D59-8E21-479C-8759-66DBF56FD771}"/>
               </a:ext>
             </a:extLst>
           </p:cNvPr>
@@ -7335,7 +7419,7 @@
     </p:spTree>
     <p:extLst>
       <p:ext uri="{BB962C8B-B14F-4D97-AF65-F5344CB8AC3E}">
-        <p14:creationId xmlns:p14="http://schemas.microsoft.com/office/powerpoint/2010/main" val="1076086022"/>
+        <p14:creationId xmlns:p14="http://schemas.microsoft.com/office/powerpoint/2010/main" val="886194176"/>
       </p:ext>
     </p:extLst>
   </p:cSld>
@@ -7363,10 +7447,10 @@
       </p:grpSpPr>
       <p:sp>
         <p:nvSpPr>
-          <p:cNvPr id="7" name="">
-            <a:extLst xmlns:a="http://schemas.openxmlformats.org/drawingml/2006/main">
-              <a:ext uri="{FF2B5EF4-FFF2-40B4-BE49-F238E27FC236}">
-                <a16:creationId xmlns:a16="http://schemas.microsoft.com/office/drawing/2014/main" id="{8F3E95BA-5836-416B-82C6-4916742058C0}"/>
+          <p:cNvPr id="6" name="">
+            <a:extLst xmlns:a="http://schemas.openxmlformats.org/drawingml/2006/main">
+              <a:ext uri="{FF2B5EF4-FFF2-40B4-BE49-F238E27FC236}">
+                <a16:creationId xmlns:a16="http://schemas.microsoft.com/office/drawing/2014/main" id="{34EE9DBF-6FBA-473A-B246-363FD29FE22A}"/>
               </a:ext>
             </a:extLst>
           </p:cNvPr>
@@ -7423,7 +7507,7 @@
           <p:cNvPr id="2" name="title-rule">
             <a:extLst xmlns:a="http://schemas.openxmlformats.org/drawingml/2006/main">
               <a:ext uri="{FF2B5EF4-FFF2-40B4-BE49-F238E27FC236}">
-                <a16:creationId xmlns:a16="http://schemas.microsoft.com/office/drawing/2014/main" id="{F29693F1-5DAD-458F-84A1-90C595875164}"/>
+                <a16:creationId xmlns:a16="http://schemas.microsoft.com/office/drawing/2014/main" id="{0FE2582D-6A22-4A71-8D6F-C42D8E92B663}"/>
               </a:ext>
             </a:extLst>
           </p:cNvPr>
@@ -7453,18 +7537,18 @@
           <p:cNvPr id="3" name="">
             <a:extLst xmlns:a="http://schemas.openxmlformats.org/drawingml/2006/main">
               <a:ext uri="{FF2B5EF4-FFF2-40B4-BE49-F238E27FC236}">
-                <a16:creationId xmlns:a16="http://schemas.microsoft.com/office/drawing/2014/main" id="{D72AEEA2-101B-4ABF-84E9-46C5BFCDAABC}"/>
-              </a:ext>
-            </a:extLst>
-          </p:cNvPr>
-          <p:cNvSpPr>
-            <a:spLocks xmlns:a="http://schemas.openxmlformats.org/drawingml/2006/main" noGrp="1"/>
-          </p:cNvSpPr>
-          <p:nvPr/>
-        </p:nvSpPr>
-        <p:spPr>
-          <a:xfrm xmlns:a="http://schemas.openxmlformats.org/drawingml/2006/main">
-            <a:off x="914400" y="1600200"/>
+                <a16:creationId xmlns:a16="http://schemas.microsoft.com/office/drawing/2014/main" id="{EE28DE80-3D5A-4D32-A724-AE482538A062}"/>
+              </a:ext>
+            </a:extLst>
+          </p:cNvPr>
+          <p:cNvSpPr>
+            <a:spLocks xmlns:a="http://schemas.openxmlformats.org/drawingml/2006/main" noGrp="1"/>
+          </p:cNvSpPr>
+          <p:nvPr/>
+        </p:nvSpPr>
+        <p:spPr>
+          <a:xfrm xmlns:a="http://schemas.openxmlformats.org/drawingml/2006/main">
+            <a:off x="914400" y="2638425"/>
             <a:ext cx="10134600" cy="1104900"/>
           </a:xfrm>
           <a:prstGeom xmlns:a="http://schemas.openxmlformats.org/drawingml/2006/main" prst="rect">
@@ -7510,18 +7594,18 @@
           <p:cNvPr id="4" name="">
             <a:extLst xmlns:a="http://schemas.openxmlformats.org/drawingml/2006/main">
               <a:ext uri="{FF2B5EF4-FFF2-40B4-BE49-F238E27FC236}">
-                <a16:creationId xmlns:a16="http://schemas.microsoft.com/office/drawing/2014/main" id="{77250A69-CE9A-4EA6-884D-623F570B69B7}"/>
-              </a:ext>
-            </a:extLst>
-          </p:cNvPr>
-          <p:cNvSpPr>
-            <a:spLocks xmlns:a="http://schemas.openxmlformats.org/drawingml/2006/main" noGrp="1"/>
-          </p:cNvSpPr>
-          <p:nvPr/>
-        </p:nvSpPr>
-        <p:spPr>
-          <a:xfrm xmlns:a="http://schemas.openxmlformats.org/drawingml/2006/main">
-            <a:off x="914400" y="2895600"/>
+                <a16:creationId xmlns:a16="http://schemas.microsoft.com/office/drawing/2014/main" id="{186967CC-45D2-4BD3-B3BD-9F45FABBEFDB}"/>
+              </a:ext>
+            </a:extLst>
+          </p:cNvPr>
+          <p:cNvSpPr>
+            <a:spLocks xmlns:a="http://schemas.openxmlformats.org/drawingml/2006/main" noGrp="1"/>
+          </p:cNvSpPr>
+          <p:nvPr/>
+        </p:nvSpPr>
+        <p:spPr>
+          <a:xfrm xmlns:a="http://schemas.openxmlformats.org/drawingml/2006/main">
+            <a:off x="914400" y="3933825"/>
             <a:ext cx="10134600" cy="1104900"/>
           </a:xfrm>
           <a:prstGeom xmlns:a="http://schemas.openxmlformats.org/drawingml/2006/main" prst="rect">
@@ -7567,19 +7651,19 @@
           <p:cNvPr id="5" name="">
             <a:extLst xmlns:a="http://schemas.openxmlformats.org/drawingml/2006/main">
               <a:ext uri="{FF2B5EF4-FFF2-40B4-BE49-F238E27FC236}">
-                <a16:creationId xmlns:a16="http://schemas.microsoft.com/office/drawing/2014/main" id="{CCAF1409-F4BF-47FE-B776-B260E0AABD0B}"/>
-              </a:ext>
-            </a:extLst>
-          </p:cNvPr>
-          <p:cNvSpPr>
-            <a:spLocks xmlns:a="http://schemas.openxmlformats.org/drawingml/2006/main" noGrp="1"/>
-          </p:cNvSpPr>
-          <p:nvPr/>
-        </p:nvSpPr>
-        <p:spPr>
-          <a:xfrm xmlns:a="http://schemas.openxmlformats.org/drawingml/2006/main">
-            <a:off x="914400" y="4191000"/>
-            <a:ext cx="10134600" cy="847725"/>
+                <a16:creationId xmlns:a16="http://schemas.microsoft.com/office/drawing/2014/main" id="{1F9290F7-19B9-41F7-9568-09ACD0C6B2EA}"/>
+              </a:ext>
+            </a:extLst>
+          </p:cNvPr>
+          <p:cNvSpPr>
+            <a:spLocks xmlns:a="http://schemas.openxmlformats.org/drawingml/2006/main" noGrp="1"/>
+          </p:cNvSpPr>
+          <p:nvPr/>
+        </p:nvSpPr>
+        <p:spPr>
+          <a:xfrm xmlns:a="http://schemas.openxmlformats.org/drawingml/2006/main">
+            <a:off x="10953750" y="6438900"/>
+            <a:ext cx="552450" cy="171450"/>
           </a:xfrm>
           <a:prstGeom xmlns:a="http://schemas.openxmlformats.org/drawingml/2006/main" prst="rect">
             <a:avLst/>
@@ -7595,63 +7679,6 @@
           </a:bodyPr>
           <a:lstStyle xmlns:a="http://schemas.openxmlformats.org/drawingml/2006/main"/>
           <a:p xmlns:a="http://schemas.openxmlformats.org/drawingml/2006/main">
-            <a:pPr>
-              <a:defRPr sz="1575" b="0">
-                <a:solidFill>
-                  <a:srgbClr val="526B61"/>
-                </a:solidFill>
-                <a:latin typeface="Calibri"/>
-                <a:ea typeface="Calibri"/>
-                <a:cs typeface="Calibri"/>
-              </a:defRPr>
-            </a:pPr>
-            <a:r>
-              <a:rPr sz="1575" b="0">
-                <a:solidFill>
-                  <a:srgbClr val="526B61"/>
-                </a:solidFill>
-                <a:latin typeface="Calibri"/>
-                <a:ea typeface="Calibri"/>
-                <a:cs typeface="Calibri"/>
-              </a:rPr>
-              <a:t>•  Subscription base remains modest — The subscription base is real but still modest relative to total scale: 14.3K subscriptions annualize to $4.0M as of Dec 2024 [13], which provides a repeat layer but is not yet large enough to offset the model's heavy reliance on one-time revenue [13][4].</a:t>
-            </a:r>
-          </a:p>
-        </p:txBody>
-      </p:sp>
-      <p:sp>
-        <p:nvSpPr>
-          <p:cNvPr id="6" name="">
-            <a:extLst xmlns:a="http://schemas.openxmlformats.org/drawingml/2006/main">
-              <a:ext uri="{FF2B5EF4-FFF2-40B4-BE49-F238E27FC236}">
-                <a16:creationId xmlns:a16="http://schemas.microsoft.com/office/drawing/2014/main" id="{FA4CD4FD-BA36-4A1B-9AFA-4D218494BC82}"/>
-              </a:ext>
-            </a:extLst>
-          </p:cNvPr>
-          <p:cNvSpPr>
-            <a:spLocks xmlns:a="http://schemas.openxmlformats.org/drawingml/2006/main" noGrp="1"/>
-          </p:cNvSpPr>
-          <p:nvPr/>
-        </p:nvSpPr>
-        <p:spPr>
-          <a:xfrm xmlns:a="http://schemas.openxmlformats.org/drawingml/2006/main">
-            <a:off x="10953750" y="6438900"/>
-            <a:ext cx="552450" cy="171450"/>
-          </a:xfrm>
-          <a:prstGeom xmlns:a="http://schemas.openxmlformats.org/drawingml/2006/main" prst="rect">
-            <a:avLst/>
-          </a:prstGeom>
-          <a:noFill xmlns:a="http://schemas.openxmlformats.org/drawingml/2006/main"/>
-          <a:ln xmlns:a="http://schemas.openxmlformats.org/drawingml/2006/main" w="0">
-            <a:noFill/>
-          </a:ln>
-        </p:spPr>
-        <p:txBody>
-          <a:bodyPr xmlns:a="http://schemas.openxmlformats.org/drawingml/2006/main">
-            <a:noAutofit/>
-          </a:bodyPr>
-          <a:lstStyle xmlns:a="http://schemas.openxmlformats.org/drawingml/2006/main"/>
-          <a:p xmlns:a="http://schemas.openxmlformats.org/drawingml/2006/main">
             <a:pPr algn="r">
               <a:defRPr sz="750">
                 <a:solidFill>
@@ -7679,7 +7706,7 @@
     </p:spTree>
     <p:extLst>
       <p:ext uri="{BB962C8B-B14F-4D97-AF65-F5344CB8AC3E}">
-        <p14:creationId xmlns:p14="http://schemas.microsoft.com/office/powerpoint/2010/main" val="122958986"/>
+        <p14:creationId xmlns:p14="http://schemas.microsoft.com/office/powerpoint/2010/main" val="1015305548"/>
       </p:ext>
     </p:extLst>
   </p:cSld>
@@ -7707,10 +7734,10 @@
       </p:grpSpPr>
       <p:sp>
         <p:nvSpPr>
-          <p:cNvPr id="6" name="">
-            <a:extLst xmlns:a="http://schemas.openxmlformats.org/drawingml/2006/main">
-              <a:ext uri="{FF2B5EF4-FFF2-40B4-BE49-F238E27FC236}">
-                <a16:creationId xmlns:a16="http://schemas.microsoft.com/office/drawing/2014/main" id="{FEA43407-F1C1-41E2-8C82-D70DF8171D96}"/>
+          <p:cNvPr id="7" name="">
+            <a:extLst xmlns:a="http://schemas.openxmlformats.org/drawingml/2006/main">
+              <a:ext uri="{FF2B5EF4-FFF2-40B4-BE49-F238E27FC236}">
+                <a16:creationId xmlns:a16="http://schemas.microsoft.com/office/drawing/2014/main" id="{53F3041B-C32D-49B1-9E9B-BE2D40E87F70}"/>
               </a:ext>
             </a:extLst>
           </p:cNvPr>
@@ -7767,7 +7794,7 @@
           <p:cNvPr id="2" name="">
             <a:extLst xmlns:a="http://schemas.openxmlformats.org/drawingml/2006/main">
               <a:ext uri="{FF2B5EF4-FFF2-40B4-BE49-F238E27FC236}">
-                <a16:creationId xmlns:a16="http://schemas.microsoft.com/office/drawing/2014/main" id="{BB8B61EC-7F37-4B1C-9B70-29AE94C1F9F0}"/>
+                <a16:creationId xmlns:a16="http://schemas.microsoft.com/office/drawing/2014/main" id="{A7BC5A7F-7D1C-419D-BD04-C9C4FA7B74B4}"/>
               </a:ext>
             </a:extLst>
           </p:cNvPr>
@@ -7824,7 +7851,7 @@
           <p:cNvPr id="3" name="title-rule">
             <a:extLst xmlns:a="http://schemas.openxmlformats.org/drawingml/2006/main">
               <a:ext uri="{FF2B5EF4-FFF2-40B4-BE49-F238E27FC236}">
-                <a16:creationId xmlns:a16="http://schemas.microsoft.com/office/drawing/2014/main" id="{44E44658-2188-4289-AD50-BFC3ABC65739}"/>
+                <a16:creationId xmlns:a16="http://schemas.microsoft.com/office/drawing/2014/main" id="{18268751-DA07-4D62-AC07-B23DAC43EC20}"/>
               </a:ext>
             </a:extLst>
           </p:cNvPr>
@@ -7849,28 +7876,85 @@
           </a:ln>
         </p:spPr>
       </p:sp>
+      <p:sp>
+        <p:nvSpPr>
+          <p:cNvPr id="4" name="">
+            <a:extLst xmlns:a="http://schemas.openxmlformats.org/drawingml/2006/main">
+              <a:ext uri="{FF2B5EF4-FFF2-40B4-BE49-F238E27FC236}">
+                <a16:creationId xmlns:a16="http://schemas.microsoft.com/office/drawing/2014/main" id="{67321F9A-2AA4-4B14-88DF-9DC4B3368A77}"/>
+              </a:ext>
+            </a:extLst>
+          </p:cNvPr>
+          <p:cNvSpPr>
+            <a:spLocks xmlns:a="http://schemas.openxmlformats.org/drawingml/2006/main" noGrp="1"/>
+          </p:cNvSpPr>
+          <p:nvPr/>
+        </p:nvSpPr>
+        <p:spPr>
+          <a:xfrm xmlns:a="http://schemas.openxmlformats.org/drawingml/2006/main">
+            <a:off x="723900" y="2757488"/>
+            <a:ext cx="3638550" cy="1933575"/>
+          </a:xfrm>
+          <a:prstGeom xmlns:a="http://schemas.openxmlformats.org/drawingml/2006/main" prst="rect">
+            <a:avLst/>
+          </a:prstGeom>
+          <a:noFill xmlns:a="http://schemas.openxmlformats.org/drawingml/2006/main"/>
+          <a:ln xmlns:a="http://schemas.openxmlformats.org/drawingml/2006/main" w="0">
+            <a:noFill/>
+          </a:ln>
+        </p:spPr>
+        <p:txBody>
+          <a:bodyPr xmlns:a="http://schemas.openxmlformats.org/drawingml/2006/main">
+            <a:noAutofit/>
+          </a:bodyPr>
+          <a:lstStyle xmlns:a="http://schemas.openxmlformats.org/drawingml/2006/main"/>
+          <a:p xmlns:a="http://schemas.openxmlformats.org/drawingml/2006/main">
+            <a:pPr>
+              <a:defRPr sz="1425" b="0">
+                <a:solidFill>
+                  <a:srgbClr val="526B61"/>
+                </a:solidFill>
+                <a:latin typeface="Calibri"/>
+                <a:ea typeface="Calibri"/>
+                <a:cs typeface="Calibri"/>
+              </a:defRPr>
+            </a:pPr>
+            <a:r>
+              <a:rPr sz="1425" b="0">
+                <a:solidFill>
+                  <a:srgbClr val="526B61"/>
+                </a:solidFill>
+                <a:latin typeface="Calibri"/>
+                <a:ea typeface="Calibri"/>
+                <a:cs typeface="Calibri"/>
+              </a:rPr>
+              <a:t>•  Subscription base remains modest — The subscription base is real but still modest relative to total scale: 14.3K subscriptions annualize to $4.0M as of Dec 2024 [13], which provides a repeat layer but is not yet large enough to offset the model's heavy reliance on one-time revenue [13][4].</a:t>
+            </a:r>
+          </a:p>
+        </p:txBody>
+      </p:sp>
       <p:graphicFrame>
         <p:nvGraphicFramePr>
-          <p:cNvPr id="9" name="Chart"/>
+          <p:cNvPr id="11" name="Chart"/>
           <p:cNvGraphicFramePr/>
           <p:nvPr/>
         </p:nvGraphicFramePr>
         <p:xfrm>
-          <a:off xmlns:a="http://schemas.openxmlformats.org/drawingml/2006/main" x="819150" y="1504950"/>
-          <a:ext xmlns:a="http://schemas.openxmlformats.org/drawingml/2006/main" cx="10553700" cy="4533900"/>
+          <a:off xmlns:a="http://schemas.openxmlformats.org/drawingml/2006/main" x="4572000" y="1619250"/>
+          <a:ext xmlns:a="http://schemas.openxmlformats.org/drawingml/2006/main" cx="6800850" cy="4171950"/>
         </p:xfrm>
         <a:graphic xmlns:a="http://schemas.openxmlformats.org/drawingml/2006/main">
           <a:graphicData uri="http://schemas.openxmlformats.org/drawingml/2006/chart">
-            <c:chart xmlns:r="http://schemas.openxmlformats.org/officeDocument/2006/relationships" xmlns:c="http://schemas.openxmlformats.org/drawingml/2006/chart" r:id="R01e22bc988b546d6"/>
+            <c:chart xmlns:r="http://schemas.openxmlformats.org/officeDocument/2006/relationships" xmlns:c="http://schemas.openxmlformats.org/drawingml/2006/chart" r:id="R1dc8ef2be80c46e0"/>
           </a:graphicData>
         </a:graphic>
       </p:graphicFrame>
       <p:sp>
         <p:nvSpPr>
-          <p:cNvPr id="5" name="">
-            <a:extLst xmlns:a="http://schemas.openxmlformats.org/drawingml/2006/main">
-              <a:ext uri="{FF2B5EF4-FFF2-40B4-BE49-F238E27FC236}">
-                <a16:creationId xmlns:a16="http://schemas.microsoft.com/office/drawing/2014/main" id="{BD7226FC-0442-4BD3-800A-CDE76EB0A73A}"/>
+          <p:cNvPr id="6" name="">
+            <a:extLst xmlns:a="http://schemas.openxmlformats.org/drawingml/2006/main">
+              <a:ext uri="{FF2B5EF4-FFF2-40B4-BE49-F238E27FC236}">
+                <a16:creationId xmlns:a16="http://schemas.microsoft.com/office/drawing/2014/main" id="{600B356E-63FC-4104-AA8C-8F312A415BE5}"/>
               </a:ext>
             </a:extLst>
           </p:cNvPr>
@@ -7925,7 +8009,7 @@
     </p:spTree>
     <p:extLst>
       <p:ext uri="{BB962C8B-B14F-4D97-AF65-F5344CB8AC3E}">
-        <p14:creationId xmlns:p14="http://schemas.microsoft.com/office/powerpoint/2010/main" val="1333012751"/>
+        <p14:creationId xmlns:p14="http://schemas.microsoft.com/office/powerpoint/2010/main" val="1432989113"/>
       </p:ext>
     </p:extLst>
   </p:cSld>
@@ -7956,7 +8040,7 @@
           <p:cNvPr id="6" name="">
             <a:extLst xmlns:a="http://schemas.openxmlformats.org/drawingml/2006/main">
               <a:ext uri="{FF2B5EF4-FFF2-40B4-BE49-F238E27FC236}">
-                <a16:creationId xmlns:a16="http://schemas.microsoft.com/office/drawing/2014/main" id="{182314E4-BEBE-4A8F-AC8E-53B0298DAEBA}"/>
+                <a16:creationId xmlns:a16="http://schemas.microsoft.com/office/drawing/2014/main" id="{E5337FF8-6B7C-458A-AF8E-ADABEDB08A8C}"/>
               </a:ext>
             </a:extLst>
           </p:cNvPr>
@@ -8013,7 +8097,7 @@
           <p:cNvPr id="2" name="title-rule">
             <a:extLst xmlns:a="http://schemas.openxmlformats.org/drawingml/2006/main">
               <a:ext uri="{FF2B5EF4-FFF2-40B4-BE49-F238E27FC236}">
-                <a16:creationId xmlns:a16="http://schemas.microsoft.com/office/drawing/2014/main" id="{86937985-750F-4C67-BAFA-EC6F231FFC64}"/>
+                <a16:creationId xmlns:a16="http://schemas.microsoft.com/office/drawing/2014/main" id="{10CA7501-E703-4E23-AECC-1C0B5AD0F1E2}"/>
               </a:ext>
             </a:extLst>
           </p:cNvPr>
@@ -8043,18 +8127,18 @@
           <p:cNvPr id="3" name="">
             <a:extLst xmlns:a="http://schemas.openxmlformats.org/drawingml/2006/main">
               <a:ext uri="{FF2B5EF4-FFF2-40B4-BE49-F238E27FC236}">
-                <a16:creationId xmlns:a16="http://schemas.microsoft.com/office/drawing/2014/main" id="{D72CFDAC-F87E-46D5-A6EC-4B4C51A29987}"/>
-              </a:ext>
-            </a:extLst>
-          </p:cNvPr>
-          <p:cNvSpPr>
-            <a:spLocks xmlns:a="http://schemas.openxmlformats.org/drawingml/2006/main" noGrp="1"/>
-          </p:cNvSpPr>
-          <p:nvPr/>
-        </p:nvSpPr>
-        <p:spPr>
-          <a:xfrm xmlns:a="http://schemas.openxmlformats.org/drawingml/2006/main">
-            <a:off x="914400" y="1600200"/>
+                <a16:creationId xmlns:a16="http://schemas.microsoft.com/office/drawing/2014/main" id="{F2A71F56-FB18-4609-9B9A-6CBFB73BCABD}"/>
+              </a:ext>
+            </a:extLst>
+          </p:cNvPr>
+          <p:cNvSpPr>
+            <a:spLocks xmlns:a="http://schemas.openxmlformats.org/drawingml/2006/main" noGrp="1"/>
+          </p:cNvSpPr>
+          <p:nvPr/>
+        </p:nvSpPr>
+        <p:spPr>
+          <a:xfrm xmlns:a="http://schemas.openxmlformats.org/drawingml/2006/main">
+            <a:off x="914400" y="3043238"/>
             <a:ext cx="10134600" cy="685800"/>
           </a:xfrm>
           <a:prstGeom xmlns:a="http://schemas.openxmlformats.org/drawingml/2006/main" prst="rect">
@@ -8100,18 +8184,18 @@
           <p:cNvPr id="4" name="">
             <a:extLst xmlns:a="http://schemas.openxmlformats.org/drawingml/2006/main">
               <a:ext uri="{FF2B5EF4-FFF2-40B4-BE49-F238E27FC236}">
-                <a16:creationId xmlns:a16="http://schemas.microsoft.com/office/drawing/2014/main" id="{C67D1C02-D3F8-4D79-869B-AB6117FC9D61}"/>
-              </a:ext>
-            </a:extLst>
-          </p:cNvPr>
-          <p:cNvSpPr>
-            <a:spLocks xmlns:a="http://schemas.openxmlformats.org/drawingml/2006/main" noGrp="1"/>
-          </p:cNvSpPr>
-          <p:nvPr/>
-        </p:nvSpPr>
-        <p:spPr>
-          <a:xfrm xmlns:a="http://schemas.openxmlformats.org/drawingml/2006/main">
-            <a:off x="914400" y="2552700"/>
+                <a16:creationId xmlns:a16="http://schemas.microsoft.com/office/drawing/2014/main" id="{7CC5BBBA-5B8C-4CBF-9B7C-A0F940C9A639}"/>
+              </a:ext>
+            </a:extLst>
+          </p:cNvPr>
+          <p:cNvSpPr>
+            <a:spLocks xmlns:a="http://schemas.openxmlformats.org/drawingml/2006/main" noGrp="1"/>
+          </p:cNvSpPr>
+          <p:nvPr/>
+        </p:nvSpPr>
+        <p:spPr>
+          <a:xfrm xmlns:a="http://schemas.openxmlformats.org/drawingml/2006/main">
+            <a:off x="914400" y="3995738"/>
             <a:ext cx="10134600" cy="638175"/>
           </a:xfrm>
           <a:prstGeom xmlns:a="http://schemas.openxmlformats.org/drawingml/2006/main" prst="rect">
@@ -8157,7 +8241,7 @@
           <p:cNvPr id="5" name="">
             <a:extLst xmlns:a="http://schemas.openxmlformats.org/drawingml/2006/main">
               <a:ext uri="{FF2B5EF4-FFF2-40B4-BE49-F238E27FC236}">
-                <a16:creationId xmlns:a16="http://schemas.microsoft.com/office/drawing/2014/main" id="{A7955E13-2F1A-4800-B2B5-6C0A5E0A59C3}"/>
+                <a16:creationId xmlns:a16="http://schemas.microsoft.com/office/drawing/2014/main" id="{696206F0-404A-40AB-9C7B-8F952A04D941}"/>
               </a:ext>
             </a:extLst>
           </p:cNvPr>
@@ -8212,7 +8296,7 @@
     </p:spTree>
     <p:extLst>
       <p:ext uri="{BB962C8B-B14F-4D97-AF65-F5344CB8AC3E}">
-        <p14:creationId xmlns:p14="http://schemas.microsoft.com/office/powerpoint/2010/main" val="709586968"/>
+        <p14:creationId xmlns:p14="http://schemas.microsoft.com/office/powerpoint/2010/main" val="799877706"/>
       </p:ext>
     </p:extLst>
   </p:cSld>
@@ -8243,7 +8327,7 @@
           <p:cNvPr id="12" name="">
             <a:extLst xmlns:a="http://schemas.openxmlformats.org/drawingml/2006/main">
               <a:ext uri="{FF2B5EF4-FFF2-40B4-BE49-F238E27FC236}">
-                <a16:creationId xmlns:a16="http://schemas.microsoft.com/office/drawing/2014/main" id="{A317CC96-77B7-4FCD-9226-D04389695DED}"/>
+                <a16:creationId xmlns:a16="http://schemas.microsoft.com/office/drawing/2014/main" id="{9E13724F-2078-4CDA-B9FE-3031194E2395}"/>
               </a:ext>
             </a:extLst>
           </p:cNvPr>
@@ -8300,7 +8384,7 @@
           <p:cNvPr id="2" name="">
             <a:extLst xmlns:a="http://schemas.openxmlformats.org/drawingml/2006/main">
               <a:ext uri="{FF2B5EF4-FFF2-40B4-BE49-F238E27FC236}">
-                <a16:creationId xmlns:a16="http://schemas.microsoft.com/office/drawing/2014/main" id="{7763F30D-027B-41F3-BF55-3D1C821E3E81}"/>
+                <a16:creationId xmlns:a16="http://schemas.microsoft.com/office/drawing/2014/main" id="{5186A813-6CBB-4441-A9CC-2F67D0ECA393}"/>
               </a:ext>
             </a:extLst>
           </p:cNvPr>
@@ -8357,7 +8441,7 @@
           <p:cNvPr id="3" name="title-rule">
             <a:extLst xmlns:a="http://schemas.openxmlformats.org/drawingml/2006/main">
               <a:ext uri="{FF2B5EF4-FFF2-40B4-BE49-F238E27FC236}">
-                <a16:creationId xmlns:a16="http://schemas.microsoft.com/office/drawing/2014/main" id="{1E220C89-C195-49FD-85FC-BD8E6D847CE1}"/>
+                <a16:creationId xmlns:a16="http://schemas.microsoft.com/office/drawing/2014/main" id="{036CDD44-085F-41D9-A8E3-CEBFF5009024}"/>
               </a:ext>
             </a:extLst>
           </p:cNvPr>
@@ -8394,7 +8478,7 @@
         </p:xfrm>
         <a:graphic xmlns:a="http://schemas.openxmlformats.org/drawingml/2006/main">
           <a:graphicData uri="http://schemas.openxmlformats.org/drawingml/2006/chart">
-            <c:chart xmlns:r="http://schemas.openxmlformats.org/officeDocument/2006/relationships" xmlns:c="http://schemas.openxmlformats.org/drawingml/2006/chart" r:id="R1f0d0a5c30c446e8"/>
+            <c:chart xmlns:r="http://schemas.openxmlformats.org/officeDocument/2006/relationships" xmlns:c="http://schemas.openxmlformats.org/drawingml/2006/chart" r:id="Rd737cc09d67147f3"/>
           </a:graphicData>
         </a:graphic>
       </p:graphicFrame>
@@ -8403,7 +8487,7 @@
           <p:cNvPr id="5" name="">
             <a:extLst xmlns:a="http://schemas.openxmlformats.org/drawingml/2006/main">
               <a:ext uri="{FF2B5EF4-FFF2-40B4-BE49-F238E27FC236}">
-                <a16:creationId xmlns:a16="http://schemas.microsoft.com/office/drawing/2014/main" id="{8B67E514-0CF2-4AE5-BD07-991431B7C15D}"/>
+                <a16:creationId xmlns:a16="http://schemas.microsoft.com/office/drawing/2014/main" id="{6940F4E8-1241-4709-A0E4-1BB67FCE4BE0}"/>
               </a:ext>
             </a:extLst>
           </p:cNvPr>
@@ -8434,24 +8518,26 @@
           <p:cNvPr id="6" name="">
             <a:extLst xmlns:a="http://schemas.openxmlformats.org/drawingml/2006/main">
               <a:ext uri="{FF2B5EF4-FFF2-40B4-BE49-F238E27FC236}">
-                <a16:creationId xmlns:a16="http://schemas.microsoft.com/office/drawing/2014/main" id="{01C6129E-1388-4878-8B3C-854E18C82E5D}"/>
-              </a:ext>
-            </a:extLst>
-          </p:cNvPr>
-          <p:cNvSpPr>
-            <a:spLocks xmlns:a="http://schemas.openxmlformats.org/drawingml/2006/main" noGrp="1"/>
-          </p:cNvSpPr>
-          <p:nvPr/>
-        </p:nvSpPr>
-        <p:spPr>
-          <a:xfrm xmlns:a="http://schemas.openxmlformats.org/drawingml/2006/main">
-            <a:off x="2625725" y="1630399"/>
-            <a:ext cx="819150" cy="190500"/>
+                <a16:creationId xmlns:a16="http://schemas.microsoft.com/office/drawing/2014/main" id="{41E18BAE-40DA-4BB7-B6DA-DF204DA86D05}"/>
+              </a:ext>
+            </a:extLst>
+          </p:cNvPr>
+          <p:cNvSpPr>
+            <a:spLocks xmlns:a="http://schemas.openxmlformats.org/drawingml/2006/main" noGrp="1"/>
+          </p:cNvSpPr>
+          <p:nvPr/>
+        </p:nvSpPr>
+        <p:spPr>
+          <a:xfrm xmlns:a="http://schemas.openxmlformats.org/drawingml/2006/main">
+            <a:off x="2597150" y="1630399"/>
+            <a:ext cx="876300" cy="190500"/>
           </a:xfrm>
           <a:prstGeom xmlns:a="http://schemas.openxmlformats.org/drawingml/2006/main" prst="rect">
             <a:avLst/>
           </a:prstGeom>
-          <a:noFill xmlns:a="http://schemas.openxmlformats.org/drawingml/2006/main"/>
+          <a:solidFill xmlns:a="http://schemas.openxmlformats.org/drawingml/2006/main">
+            <a:srgbClr val="F5FAF7"/>
+          </a:solidFill>
           <a:ln xmlns:a="http://schemas.openxmlformats.org/drawingml/2006/main" w="0">
             <a:noFill/>
           </a:ln>
@@ -8491,7 +8577,7 @@
           <p:cNvPr id="7" name="">
             <a:extLst xmlns:a="http://schemas.openxmlformats.org/drawingml/2006/main">
               <a:ext uri="{FF2B5EF4-FFF2-40B4-BE49-F238E27FC236}">
-                <a16:creationId xmlns:a16="http://schemas.microsoft.com/office/drawing/2014/main" id="{8D45309E-07ED-4B55-BFE6-34A5DE4F3B8C}"/>
+                <a16:creationId xmlns:a16="http://schemas.microsoft.com/office/drawing/2014/main" id="{8E667BAB-8691-4A68-BD0F-CDC55CEE02F0}"/>
               </a:ext>
             </a:extLst>
           </p:cNvPr>
@@ -8522,24 +8608,26 @@
           <p:cNvPr id="8" name="">
             <a:extLst xmlns:a="http://schemas.openxmlformats.org/drawingml/2006/main">
               <a:ext uri="{FF2B5EF4-FFF2-40B4-BE49-F238E27FC236}">
-                <a16:creationId xmlns:a16="http://schemas.microsoft.com/office/drawing/2014/main" id="{AE5A3749-DD19-4811-83B7-155B3642B9EB}"/>
-              </a:ext>
-            </a:extLst>
-          </p:cNvPr>
-          <p:cNvSpPr>
-            <a:spLocks xmlns:a="http://schemas.openxmlformats.org/drawingml/2006/main" noGrp="1"/>
-          </p:cNvSpPr>
-          <p:nvPr/>
-        </p:nvSpPr>
-        <p:spPr>
-          <a:xfrm xmlns:a="http://schemas.openxmlformats.org/drawingml/2006/main">
-            <a:off x="5876925" y="5056151"/>
-            <a:ext cx="819150" cy="190500"/>
+                <a16:creationId xmlns:a16="http://schemas.microsoft.com/office/drawing/2014/main" id="{461079B4-1868-4107-8538-F59DEF669A9C}"/>
+              </a:ext>
+            </a:extLst>
+          </p:cNvPr>
+          <p:cNvSpPr>
+            <a:spLocks xmlns:a="http://schemas.openxmlformats.org/drawingml/2006/main" noGrp="1"/>
+          </p:cNvSpPr>
+          <p:nvPr/>
+        </p:nvSpPr>
+        <p:spPr>
+          <a:xfrm xmlns:a="http://schemas.openxmlformats.org/drawingml/2006/main">
+            <a:off x="5848350" y="5056151"/>
+            <a:ext cx="876300" cy="190500"/>
           </a:xfrm>
           <a:prstGeom xmlns:a="http://schemas.openxmlformats.org/drawingml/2006/main" prst="rect">
             <a:avLst/>
           </a:prstGeom>
-          <a:noFill xmlns:a="http://schemas.openxmlformats.org/drawingml/2006/main"/>
+          <a:solidFill xmlns:a="http://schemas.openxmlformats.org/drawingml/2006/main">
+            <a:srgbClr val="F5FAF7"/>
+          </a:solidFill>
           <a:ln xmlns:a="http://schemas.openxmlformats.org/drawingml/2006/main" w="0">
             <a:noFill/>
           </a:ln>
@@ -8579,7 +8667,7 @@
           <p:cNvPr id="9" name="">
             <a:extLst xmlns:a="http://schemas.openxmlformats.org/drawingml/2006/main">
               <a:ext uri="{FF2B5EF4-FFF2-40B4-BE49-F238E27FC236}">
-                <a16:creationId xmlns:a16="http://schemas.microsoft.com/office/drawing/2014/main" id="{9227BA3F-5557-4B8A-BBE3-04B7AC81C027}"/>
+                <a16:creationId xmlns:a16="http://schemas.microsoft.com/office/drawing/2014/main" id="{4AFCA522-726A-450C-B361-D4B3EC9C19C6}"/>
               </a:ext>
             </a:extLst>
           </p:cNvPr>
@@ -8610,19 +8698,78 @@
           <p:cNvPr id="10" name="">
             <a:extLst xmlns:a="http://schemas.openxmlformats.org/drawingml/2006/main">
               <a:ext uri="{FF2B5EF4-FFF2-40B4-BE49-F238E27FC236}">
-                <a16:creationId xmlns:a16="http://schemas.microsoft.com/office/drawing/2014/main" id="{C6791B06-8B51-4F69-BE8E-E244DEBEDBE7}"/>
-              </a:ext>
-            </a:extLst>
-          </p:cNvPr>
-          <p:cNvSpPr>
-            <a:spLocks xmlns:a="http://schemas.openxmlformats.org/drawingml/2006/main" noGrp="1"/>
-          </p:cNvSpPr>
-          <p:nvPr/>
-        </p:nvSpPr>
-        <p:spPr>
-          <a:xfrm xmlns:a="http://schemas.openxmlformats.org/drawingml/2006/main">
-            <a:off x="9128125" y="1333500"/>
-            <a:ext cx="819150" cy="190500"/>
+                <a16:creationId xmlns:a16="http://schemas.microsoft.com/office/drawing/2014/main" id="{E9753A2D-9905-40C2-ABCD-7A0C17D427B6}"/>
+              </a:ext>
+            </a:extLst>
+          </p:cNvPr>
+          <p:cNvSpPr>
+            <a:spLocks xmlns:a="http://schemas.openxmlformats.org/drawingml/2006/main" noGrp="1"/>
+          </p:cNvSpPr>
+          <p:nvPr/>
+        </p:nvSpPr>
+        <p:spPr>
+          <a:xfrm xmlns:a="http://schemas.openxmlformats.org/drawingml/2006/main">
+            <a:off x="9099550" y="1333500"/>
+            <a:ext cx="876300" cy="190500"/>
+          </a:xfrm>
+          <a:prstGeom xmlns:a="http://schemas.openxmlformats.org/drawingml/2006/main" prst="rect">
+            <a:avLst/>
+          </a:prstGeom>
+          <a:solidFill xmlns:a="http://schemas.openxmlformats.org/drawingml/2006/main">
+            <a:srgbClr val="F5FAF7"/>
+          </a:solidFill>
+          <a:ln xmlns:a="http://schemas.openxmlformats.org/drawingml/2006/main" w="0">
+            <a:noFill/>
+          </a:ln>
+        </p:spPr>
+        <p:txBody>
+          <a:bodyPr xmlns:a="http://schemas.openxmlformats.org/drawingml/2006/main">
+            <a:noAutofit/>
+          </a:bodyPr>
+          <a:lstStyle xmlns:a="http://schemas.openxmlformats.org/drawingml/2006/main"/>
+          <a:p xmlns:a="http://schemas.openxmlformats.org/drawingml/2006/main">
+            <a:pPr algn="ctr">
+              <a:defRPr sz="900" b="1">
+                <a:solidFill>
+                  <a:srgbClr val="12372A"/>
+                </a:solidFill>
+                <a:latin typeface="Calibri"/>
+                <a:ea typeface="Calibri"/>
+                <a:cs typeface="Calibri"/>
+              </a:defRPr>
+            </a:pPr>
+            <a:r>
+              <a:rPr sz="900" b="1">
+                <a:solidFill>
+                  <a:srgbClr val="12372A"/>
+                </a:solidFill>
+                <a:latin typeface="Calibri"/>
+                <a:ea typeface="Calibri"/>
+                <a:cs typeface="Calibri"/>
+              </a:rPr>
+              <a:t>88.00pp</a:t>
+            </a:r>
+          </a:p>
+        </p:txBody>
+      </p:sp>
+      <p:sp>
+        <p:nvSpPr>
+          <p:cNvPr id="11" name="">
+            <a:extLst xmlns:a="http://schemas.openxmlformats.org/drawingml/2006/main">
+              <a:ext uri="{FF2B5EF4-FFF2-40B4-BE49-F238E27FC236}">
+                <a16:creationId xmlns:a16="http://schemas.microsoft.com/office/drawing/2014/main" id="{1EAFE5C3-B2EC-4F17-A375-F90121FA8D54}"/>
+              </a:ext>
+            </a:extLst>
+          </p:cNvPr>
+          <p:cNvSpPr>
+            <a:spLocks xmlns:a="http://schemas.openxmlformats.org/drawingml/2006/main" noGrp="1"/>
+          </p:cNvSpPr>
+          <p:nvPr/>
+        </p:nvSpPr>
+        <p:spPr>
+          <a:xfrm xmlns:a="http://schemas.openxmlformats.org/drawingml/2006/main">
+            <a:off x="10953750" y="6438900"/>
+            <a:ext cx="552450" cy="171450"/>
           </a:xfrm>
           <a:prstGeom xmlns:a="http://schemas.openxmlformats.org/drawingml/2006/main" prst="rect">
             <a:avLst/>
@@ -8638,63 +8785,6 @@
           </a:bodyPr>
           <a:lstStyle xmlns:a="http://schemas.openxmlformats.org/drawingml/2006/main"/>
           <a:p xmlns:a="http://schemas.openxmlformats.org/drawingml/2006/main">
-            <a:pPr algn="ctr">
-              <a:defRPr sz="900" b="1">
-                <a:solidFill>
-                  <a:srgbClr val="12372A"/>
-                </a:solidFill>
-                <a:latin typeface="Calibri"/>
-                <a:ea typeface="Calibri"/>
-                <a:cs typeface="Calibri"/>
-              </a:defRPr>
-            </a:pPr>
-            <a:r>
-              <a:rPr sz="900" b="1">
-                <a:solidFill>
-                  <a:srgbClr val="12372A"/>
-                </a:solidFill>
-                <a:latin typeface="Calibri"/>
-                <a:ea typeface="Calibri"/>
-                <a:cs typeface="Calibri"/>
-              </a:rPr>
-              <a:t>88.00pp</a:t>
-            </a:r>
-          </a:p>
-        </p:txBody>
-      </p:sp>
-      <p:sp>
-        <p:nvSpPr>
-          <p:cNvPr id="11" name="">
-            <a:extLst xmlns:a="http://schemas.openxmlformats.org/drawingml/2006/main">
-              <a:ext uri="{FF2B5EF4-FFF2-40B4-BE49-F238E27FC236}">
-                <a16:creationId xmlns:a16="http://schemas.microsoft.com/office/drawing/2014/main" id="{D1394253-DBB1-4BD8-B0D5-72DA96742856}"/>
-              </a:ext>
-            </a:extLst>
-          </p:cNvPr>
-          <p:cNvSpPr>
-            <a:spLocks xmlns:a="http://schemas.openxmlformats.org/drawingml/2006/main" noGrp="1"/>
-          </p:cNvSpPr>
-          <p:nvPr/>
-        </p:nvSpPr>
-        <p:spPr>
-          <a:xfrm xmlns:a="http://schemas.openxmlformats.org/drawingml/2006/main">
-            <a:off x="10953750" y="6438900"/>
-            <a:ext cx="552450" cy="171450"/>
-          </a:xfrm>
-          <a:prstGeom xmlns:a="http://schemas.openxmlformats.org/drawingml/2006/main" prst="rect">
-            <a:avLst/>
-          </a:prstGeom>
-          <a:noFill xmlns:a="http://schemas.openxmlformats.org/drawingml/2006/main"/>
-          <a:ln xmlns:a="http://schemas.openxmlformats.org/drawingml/2006/main" w="0">
-            <a:noFill/>
-          </a:ln>
-        </p:spPr>
-        <p:txBody>
-          <a:bodyPr xmlns:a="http://schemas.openxmlformats.org/drawingml/2006/main">
-            <a:noAutofit/>
-          </a:bodyPr>
-          <a:lstStyle xmlns:a="http://schemas.openxmlformats.org/drawingml/2006/main"/>
-          <a:p xmlns:a="http://schemas.openxmlformats.org/drawingml/2006/main">
             <a:pPr algn="r">
               <a:defRPr sz="750">
                 <a:solidFill>
@@ -8722,7 +8812,7 @@
     </p:spTree>
     <p:extLst>
       <p:ext uri="{BB962C8B-B14F-4D97-AF65-F5344CB8AC3E}">
-        <p14:creationId xmlns:p14="http://schemas.microsoft.com/office/powerpoint/2010/main" val="645085835"/>
+        <p14:creationId xmlns:p14="http://schemas.microsoft.com/office/powerpoint/2010/main" val="947423372"/>
       </p:ext>
     </p:extLst>
   </p:cSld>
@@ -8753,7 +8843,7 @@
           <p:cNvPr id="7" name="">
             <a:extLst xmlns:a="http://schemas.openxmlformats.org/drawingml/2006/main">
               <a:ext uri="{FF2B5EF4-FFF2-40B4-BE49-F238E27FC236}">
-                <a16:creationId xmlns:a16="http://schemas.microsoft.com/office/drawing/2014/main" id="{CEAB1F37-7216-4912-BC7A-89FAB50E4427}"/>
+                <a16:creationId xmlns:a16="http://schemas.microsoft.com/office/drawing/2014/main" id="{84A0625E-4529-42C2-9A53-7035120BFEEE}"/>
               </a:ext>
             </a:extLst>
           </p:cNvPr>
@@ -8810,7 +8900,7 @@
           <p:cNvPr id="2" name="title-rule">
             <a:extLst xmlns:a="http://schemas.openxmlformats.org/drawingml/2006/main">
               <a:ext uri="{FF2B5EF4-FFF2-40B4-BE49-F238E27FC236}">
-                <a16:creationId xmlns:a16="http://schemas.microsoft.com/office/drawing/2014/main" id="{72367F35-E8C7-4E68-A452-926505956410}"/>
+                <a16:creationId xmlns:a16="http://schemas.microsoft.com/office/drawing/2014/main" id="{D8080AF5-8005-4BEA-AB8F-C20F89422C24}"/>
               </a:ext>
             </a:extLst>
           </p:cNvPr>
@@ -8840,18 +8930,18 @@
           <p:cNvPr id="3" name="">
             <a:extLst xmlns:a="http://schemas.openxmlformats.org/drawingml/2006/main">
               <a:ext uri="{FF2B5EF4-FFF2-40B4-BE49-F238E27FC236}">
-                <a16:creationId xmlns:a16="http://schemas.microsoft.com/office/drawing/2014/main" id="{9549B532-AC6E-4EF4-BA37-A134C4B4968E}"/>
-              </a:ext>
-            </a:extLst>
-          </p:cNvPr>
-          <p:cNvSpPr>
-            <a:spLocks xmlns:a="http://schemas.openxmlformats.org/drawingml/2006/main" noGrp="1"/>
-          </p:cNvSpPr>
-          <p:nvPr/>
-        </p:nvSpPr>
-        <p:spPr>
-          <a:xfrm xmlns:a="http://schemas.openxmlformats.org/drawingml/2006/main">
-            <a:off x="914400" y="1600200"/>
+                <a16:creationId xmlns:a16="http://schemas.microsoft.com/office/drawing/2014/main" id="{16BD0796-43AD-41C2-93C0-0BA1AB8D2356}"/>
+              </a:ext>
+            </a:extLst>
+          </p:cNvPr>
+          <p:cNvSpPr>
+            <a:spLocks xmlns:a="http://schemas.openxmlformats.org/drawingml/2006/main" noGrp="1"/>
+          </p:cNvSpPr>
+          <p:nvPr/>
+        </p:nvSpPr>
+        <p:spPr>
+          <a:xfrm xmlns:a="http://schemas.openxmlformats.org/drawingml/2006/main">
+            <a:off x="914400" y="2247900"/>
             <a:ext cx="10134600" cy="847725"/>
           </a:xfrm>
           <a:prstGeom xmlns:a="http://schemas.openxmlformats.org/drawingml/2006/main" prst="rect">
@@ -8897,18 +8987,18 @@
           <p:cNvPr id="4" name="">
             <a:extLst xmlns:a="http://schemas.openxmlformats.org/drawingml/2006/main">
               <a:ext uri="{FF2B5EF4-FFF2-40B4-BE49-F238E27FC236}">
-                <a16:creationId xmlns:a16="http://schemas.microsoft.com/office/drawing/2014/main" id="{27B3B5E1-E79D-4123-B3D5-98DEFD589737}"/>
-              </a:ext>
-            </a:extLst>
-          </p:cNvPr>
-          <p:cNvSpPr>
-            <a:spLocks xmlns:a="http://schemas.openxmlformats.org/drawingml/2006/main" noGrp="1"/>
-          </p:cNvSpPr>
-          <p:nvPr/>
-        </p:nvSpPr>
-        <p:spPr>
-          <a:xfrm xmlns:a="http://schemas.openxmlformats.org/drawingml/2006/main">
-            <a:off x="914400" y="2638425"/>
+                <a16:creationId xmlns:a16="http://schemas.microsoft.com/office/drawing/2014/main" id="{98EFD66B-0A1E-487C-A7A8-7E994E9FF3E1}"/>
+              </a:ext>
+            </a:extLst>
+          </p:cNvPr>
+          <p:cNvSpPr>
+            <a:spLocks xmlns:a="http://schemas.openxmlformats.org/drawingml/2006/main" noGrp="1"/>
+          </p:cNvSpPr>
+          <p:nvPr/>
+        </p:nvSpPr>
+        <p:spPr>
+          <a:xfrm xmlns:a="http://schemas.openxmlformats.org/drawingml/2006/main">
+            <a:off x="914400" y="3286125"/>
             <a:ext cx="10134600" cy="847725"/>
           </a:xfrm>
           <a:prstGeom xmlns:a="http://schemas.openxmlformats.org/drawingml/2006/main" prst="rect">
@@ -8954,18 +9044,18 @@
           <p:cNvPr id="5" name="">
             <a:extLst xmlns:a="http://schemas.openxmlformats.org/drawingml/2006/main">
               <a:ext uri="{FF2B5EF4-FFF2-40B4-BE49-F238E27FC236}">
-                <a16:creationId xmlns:a16="http://schemas.microsoft.com/office/drawing/2014/main" id="{836B1B33-8B1D-4CDD-9DF7-1DDA9A030CE2}"/>
-              </a:ext>
-            </a:extLst>
-          </p:cNvPr>
-          <p:cNvSpPr>
-            <a:spLocks xmlns:a="http://schemas.openxmlformats.org/drawingml/2006/main" noGrp="1"/>
-          </p:cNvSpPr>
-          <p:nvPr/>
-        </p:nvSpPr>
-        <p:spPr>
-          <a:xfrm xmlns:a="http://schemas.openxmlformats.org/drawingml/2006/main">
-            <a:off x="914400" y="3676650"/>
+                <a16:creationId xmlns:a16="http://schemas.microsoft.com/office/drawing/2014/main" id="{83BFC7CA-D0CE-441E-BC26-CA7A69AC4AEF}"/>
+              </a:ext>
+            </a:extLst>
+          </p:cNvPr>
+          <p:cNvSpPr>
+            <a:spLocks xmlns:a="http://schemas.openxmlformats.org/drawingml/2006/main" noGrp="1"/>
+          </p:cNvSpPr>
+          <p:nvPr/>
+        </p:nvSpPr>
+        <p:spPr>
+          <a:xfrm xmlns:a="http://schemas.openxmlformats.org/drawingml/2006/main">
+            <a:off x="914400" y="4324350"/>
             <a:ext cx="10134600" cy="1104900"/>
           </a:xfrm>
           <a:prstGeom xmlns:a="http://schemas.openxmlformats.org/drawingml/2006/main" prst="rect">
@@ -9011,7 +9101,7 @@
           <p:cNvPr id="6" name="">
             <a:extLst xmlns:a="http://schemas.openxmlformats.org/drawingml/2006/main">
               <a:ext uri="{FF2B5EF4-FFF2-40B4-BE49-F238E27FC236}">
-                <a16:creationId xmlns:a16="http://schemas.microsoft.com/office/drawing/2014/main" id="{8B3F111A-75C6-407D-9316-859E9E4EBEA5}"/>
+                <a16:creationId xmlns:a16="http://schemas.microsoft.com/office/drawing/2014/main" id="{4D587558-EBD6-4C70-8AD5-FA2BFE6BE7E3}"/>
               </a:ext>
             </a:extLst>
           </p:cNvPr>
@@ -9066,7 +9156,7 @@
     </p:spTree>
     <p:extLst>
       <p:ext uri="{BB962C8B-B14F-4D97-AF65-F5344CB8AC3E}">
-        <p14:creationId xmlns:p14="http://schemas.microsoft.com/office/powerpoint/2010/main" val="885137009"/>
+        <p14:creationId xmlns:p14="http://schemas.microsoft.com/office/powerpoint/2010/main" val="941538911"/>
       </p:ext>
     </p:extLst>
   </p:cSld>
@@ -9097,7 +9187,7 @@
           <p:cNvPr id="7" name="">
             <a:extLst xmlns:a="http://schemas.openxmlformats.org/drawingml/2006/main">
               <a:ext uri="{FF2B5EF4-FFF2-40B4-BE49-F238E27FC236}">
-                <a16:creationId xmlns:a16="http://schemas.microsoft.com/office/drawing/2014/main" id="{F8C134A1-13F9-4C5B-A29B-39C7AAC90ED6}"/>
+                <a16:creationId xmlns:a16="http://schemas.microsoft.com/office/drawing/2014/main" id="{E88487E4-509A-48A7-9CF4-8A4F618FAE37}"/>
               </a:ext>
             </a:extLst>
           </p:cNvPr>
@@ -9154,7 +9244,7 @@
           <p:cNvPr id="2" name="title-rule">
             <a:extLst xmlns:a="http://schemas.openxmlformats.org/drawingml/2006/main">
               <a:ext uri="{FF2B5EF4-FFF2-40B4-BE49-F238E27FC236}">
-                <a16:creationId xmlns:a16="http://schemas.microsoft.com/office/drawing/2014/main" id="{00911A20-1694-41C4-8F91-466BC4C40680}"/>
+                <a16:creationId xmlns:a16="http://schemas.microsoft.com/office/drawing/2014/main" id="{672045BF-E24A-4CBB-8481-2E3C4E808F1D}"/>
               </a:ext>
             </a:extLst>
           </p:cNvPr>
@@ -9184,18 +9274,18 @@
           <p:cNvPr id="3" name="">
             <a:extLst xmlns:a="http://schemas.openxmlformats.org/drawingml/2006/main">
               <a:ext uri="{FF2B5EF4-FFF2-40B4-BE49-F238E27FC236}">
-                <a16:creationId xmlns:a16="http://schemas.microsoft.com/office/drawing/2014/main" id="{A58B84BA-E8A1-4DE1-A8EB-1D0B0BA565DB}"/>
-              </a:ext>
-            </a:extLst>
-          </p:cNvPr>
-          <p:cNvSpPr>
-            <a:spLocks xmlns:a="http://schemas.openxmlformats.org/drawingml/2006/main" noGrp="1"/>
-          </p:cNvSpPr>
-          <p:nvPr/>
-        </p:nvSpPr>
-        <p:spPr>
-          <a:xfrm xmlns:a="http://schemas.openxmlformats.org/drawingml/2006/main">
-            <a:off x="914400" y="1600200"/>
+                <a16:creationId xmlns:a16="http://schemas.microsoft.com/office/drawing/2014/main" id="{ECD88B6E-5420-42DF-ADE8-09D5179FC9BB}"/>
+              </a:ext>
+            </a:extLst>
+          </p:cNvPr>
+          <p:cNvSpPr>
+            <a:spLocks xmlns:a="http://schemas.openxmlformats.org/drawingml/2006/main" noGrp="1"/>
+          </p:cNvSpPr>
+          <p:nvPr/>
+        </p:nvSpPr>
+        <p:spPr>
+          <a:xfrm xmlns:a="http://schemas.openxmlformats.org/drawingml/2006/main">
+            <a:off x="914400" y="1990725"/>
             <a:ext cx="10134600" cy="1104900"/>
           </a:xfrm>
           <a:prstGeom xmlns:a="http://schemas.openxmlformats.org/drawingml/2006/main" prst="rect">
@@ -9241,18 +9331,18 @@
           <p:cNvPr id="4" name="">
             <a:extLst xmlns:a="http://schemas.openxmlformats.org/drawingml/2006/main">
               <a:ext uri="{FF2B5EF4-FFF2-40B4-BE49-F238E27FC236}">
-                <a16:creationId xmlns:a16="http://schemas.microsoft.com/office/drawing/2014/main" id="{D01C7C6A-8AF7-42A1-964C-D59A56FAD84E}"/>
-              </a:ext>
-            </a:extLst>
-          </p:cNvPr>
-          <p:cNvSpPr>
-            <a:spLocks xmlns:a="http://schemas.openxmlformats.org/drawingml/2006/main" noGrp="1"/>
-          </p:cNvSpPr>
-          <p:nvPr/>
-        </p:nvSpPr>
-        <p:spPr>
-          <a:xfrm xmlns:a="http://schemas.openxmlformats.org/drawingml/2006/main">
-            <a:off x="914400" y="2895600"/>
+                <a16:creationId xmlns:a16="http://schemas.microsoft.com/office/drawing/2014/main" id="{25B79915-59B1-4DFD-8736-76CC3262E1C2}"/>
+              </a:ext>
+            </a:extLst>
+          </p:cNvPr>
+          <p:cNvSpPr>
+            <a:spLocks xmlns:a="http://schemas.openxmlformats.org/drawingml/2006/main" noGrp="1"/>
+          </p:cNvSpPr>
+          <p:nvPr/>
+        </p:nvSpPr>
+        <p:spPr>
+          <a:xfrm xmlns:a="http://schemas.openxmlformats.org/drawingml/2006/main">
+            <a:off x="914400" y="3286125"/>
             <a:ext cx="10134600" cy="1104900"/>
           </a:xfrm>
           <a:prstGeom xmlns:a="http://schemas.openxmlformats.org/drawingml/2006/main" prst="rect">
@@ -9298,18 +9388,18 @@
           <p:cNvPr id="5" name="">
             <a:extLst xmlns:a="http://schemas.openxmlformats.org/drawingml/2006/main">
               <a:ext uri="{FF2B5EF4-FFF2-40B4-BE49-F238E27FC236}">
-                <a16:creationId xmlns:a16="http://schemas.microsoft.com/office/drawing/2014/main" id="{0A7C1C84-1877-4F89-A74F-A10E79F922D9}"/>
-              </a:ext>
-            </a:extLst>
-          </p:cNvPr>
-          <p:cNvSpPr>
-            <a:spLocks xmlns:a="http://schemas.openxmlformats.org/drawingml/2006/main" noGrp="1"/>
-          </p:cNvSpPr>
-          <p:nvPr/>
-        </p:nvSpPr>
-        <p:spPr>
-          <a:xfrm xmlns:a="http://schemas.openxmlformats.org/drawingml/2006/main">
-            <a:off x="914400" y="4191000"/>
+                <a16:creationId xmlns:a16="http://schemas.microsoft.com/office/drawing/2014/main" id="{664B9EA9-265B-4C37-8D8F-53DBFB85E8AF}"/>
+              </a:ext>
+            </a:extLst>
+          </p:cNvPr>
+          <p:cNvSpPr>
+            <a:spLocks xmlns:a="http://schemas.openxmlformats.org/drawingml/2006/main" noGrp="1"/>
+          </p:cNvSpPr>
+          <p:nvPr/>
+        </p:nvSpPr>
+        <p:spPr>
+          <a:xfrm xmlns:a="http://schemas.openxmlformats.org/drawingml/2006/main">
+            <a:off x="914400" y="4581525"/>
             <a:ext cx="10134600" cy="1104900"/>
           </a:xfrm>
           <a:prstGeom xmlns:a="http://schemas.openxmlformats.org/drawingml/2006/main" prst="rect">
@@ -9355,7 +9445,7 @@
           <p:cNvPr id="6" name="">
             <a:extLst xmlns:a="http://schemas.openxmlformats.org/drawingml/2006/main">
               <a:ext uri="{FF2B5EF4-FFF2-40B4-BE49-F238E27FC236}">
-                <a16:creationId xmlns:a16="http://schemas.microsoft.com/office/drawing/2014/main" id="{97B7225D-ACDD-41DD-B705-42F6E566A50D}"/>
+                <a16:creationId xmlns:a16="http://schemas.microsoft.com/office/drawing/2014/main" id="{327AD838-0007-4972-BA38-E2D389A0669A}"/>
               </a:ext>
             </a:extLst>
           </p:cNvPr>
@@ -9410,7 +9500,7 @@
     </p:spTree>
     <p:extLst>
       <p:ext uri="{BB962C8B-B14F-4D97-AF65-F5344CB8AC3E}">
-        <p14:creationId xmlns:p14="http://schemas.microsoft.com/office/powerpoint/2010/main" val="1073343322"/>
+        <p14:creationId xmlns:p14="http://schemas.microsoft.com/office/powerpoint/2010/main" val="910050412"/>
       </p:ext>
     </p:extLst>
   </p:cSld>
@@ -9441,7 +9531,7 @@
           <p:cNvPr id="7" name="">
             <a:extLst xmlns:a="http://schemas.openxmlformats.org/drawingml/2006/main">
               <a:ext uri="{FF2B5EF4-FFF2-40B4-BE49-F238E27FC236}">
-                <a16:creationId xmlns:a16="http://schemas.microsoft.com/office/drawing/2014/main" id="{424956B8-661D-4BC9-925F-0EEF4ADCD8BA}"/>
+                <a16:creationId xmlns:a16="http://schemas.microsoft.com/office/drawing/2014/main" id="{1FA73335-2FD4-4331-9CFC-529486728865}"/>
               </a:ext>
             </a:extLst>
           </p:cNvPr>
@@ -9498,7 +9588,7 @@
           <p:cNvPr id="2" name="title-rule">
             <a:extLst xmlns:a="http://schemas.openxmlformats.org/drawingml/2006/main">
               <a:ext uri="{FF2B5EF4-FFF2-40B4-BE49-F238E27FC236}">
-                <a16:creationId xmlns:a16="http://schemas.microsoft.com/office/drawing/2014/main" id="{11344525-BAFC-49CA-9B9C-8F30B19DB4CB}"/>
+                <a16:creationId xmlns:a16="http://schemas.microsoft.com/office/drawing/2014/main" id="{258E15A4-A1F2-48BC-8E0A-68FBF3244C4D}"/>
               </a:ext>
             </a:extLst>
           </p:cNvPr>
@@ -9528,18 +9618,18 @@
           <p:cNvPr id="3" name="">
             <a:extLst xmlns:a="http://schemas.openxmlformats.org/drawingml/2006/main">
               <a:ext uri="{FF2B5EF4-FFF2-40B4-BE49-F238E27FC236}">
-                <a16:creationId xmlns:a16="http://schemas.microsoft.com/office/drawing/2014/main" id="{04202B7B-23AE-4BD9-A5D5-76E73AF88770}"/>
-              </a:ext>
-            </a:extLst>
-          </p:cNvPr>
-          <p:cNvSpPr>
-            <a:spLocks xmlns:a="http://schemas.openxmlformats.org/drawingml/2006/main" noGrp="1"/>
-          </p:cNvSpPr>
-          <p:nvPr/>
-        </p:nvSpPr>
-        <p:spPr>
-          <a:xfrm xmlns:a="http://schemas.openxmlformats.org/drawingml/2006/main">
-            <a:off x="914400" y="1600200"/>
+                <a16:creationId xmlns:a16="http://schemas.microsoft.com/office/drawing/2014/main" id="{D37B66DE-0255-4498-8BF2-BA93E479770A}"/>
+              </a:ext>
+            </a:extLst>
+          </p:cNvPr>
+          <p:cNvSpPr>
+            <a:spLocks xmlns:a="http://schemas.openxmlformats.org/drawingml/2006/main" noGrp="1"/>
+          </p:cNvSpPr>
+          <p:nvPr/>
+        </p:nvSpPr>
+        <p:spPr>
+          <a:xfrm xmlns:a="http://schemas.openxmlformats.org/drawingml/2006/main">
+            <a:off x="914400" y="1814513"/>
             <a:ext cx="10134600" cy="1200150"/>
           </a:xfrm>
           <a:prstGeom xmlns:a="http://schemas.openxmlformats.org/drawingml/2006/main" prst="rect">
@@ -9585,18 +9675,18 @@
           <p:cNvPr id="4" name="">
             <a:extLst xmlns:a="http://schemas.openxmlformats.org/drawingml/2006/main">
               <a:ext uri="{FF2B5EF4-FFF2-40B4-BE49-F238E27FC236}">
-                <a16:creationId xmlns:a16="http://schemas.microsoft.com/office/drawing/2014/main" id="{BD02B9C0-2122-493D-B733-C43336F54BAD}"/>
-              </a:ext>
-            </a:extLst>
-          </p:cNvPr>
-          <p:cNvSpPr>
-            <a:spLocks xmlns:a="http://schemas.openxmlformats.org/drawingml/2006/main" noGrp="1"/>
-          </p:cNvSpPr>
-          <p:nvPr/>
-        </p:nvSpPr>
-        <p:spPr>
-          <a:xfrm xmlns:a="http://schemas.openxmlformats.org/drawingml/2006/main">
-            <a:off x="914400" y="2990850"/>
+                <a16:creationId xmlns:a16="http://schemas.microsoft.com/office/drawing/2014/main" id="{15907550-0D96-4F13-9736-750C1B54A62C}"/>
+              </a:ext>
+            </a:extLst>
+          </p:cNvPr>
+          <p:cNvSpPr>
+            <a:spLocks xmlns:a="http://schemas.openxmlformats.org/drawingml/2006/main" noGrp="1"/>
+          </p:cNvSpPr>
+          <p:nvPr/>
+        </p:nvSpPr>
+        <p:spPr>
+          <a:xfrm xmlns:a="http://schemas.openxmlformats.org/drawingml/2006/main">
+            <a:off x="914400" y="3205163"/>
             <a:ext cx="10134600" cy="1362075"/>
           </a:xfrm>
           <a:prstGeom xmlns:a="http://schemas.openxmlformats.org/drawingml/2006/main" prst="rect">
@@ -9642,18 +9732,18 @@
           <p:cNvPr id="5" name="">
             <a:extLst xmlns:a="http://schemas.openxmlformats.org/drawingml/2006/main">
               <a:ext uri="{FF2B5EF4-FFF2-40B4-BE49-F238E27FC236}">
-                <a16:creationId xmlns:a16="http://schemas.microsoft.com/office/drawing/2014/main" id="{31991587-3283-4136-A0AF-32BAD3C90D3E}"/>
-              </a:ext>
-            </a:extLst>
-          </p:cNvPr>
-          <p:cNvSpPr>
-            <a:spLocks xmlns:a="http://schemas.openxmlformats.org/drawingml/2006/main" noGrp="1"/>
-          </p:cNvSpPr>
-          <p:nvPr/>
-        </p:nvSpPr>
-        <p:spPr>
-          <a:xfrm xmlns:a="http://schemas.openxmlformats.org/drawingml/2006/main">
-            <a:off x="914400" y="4543425"/>
+                <a16:creationId xmlns:a16="http://schemas.microsoft.com/office/drawing/2014/main" id="{9E35AF66-E934-4A75-93B2-383AFDC6F39E}"/>
+              </a:ext>
+            </a:extLst>
+          </p:cNvPr>
+          <p:cNvSpPr>
+            <a:spLocks xmlns:a="http://schemas.openxmlformats.org/drawingml/2006/main" noGrp="1"/>
+          </p:cNvSpPr>
+          <p:nvPr/>
+        </p:nvSpPr>
+        <p:spPr>
+          <a:xfrm xmlns:a="http://schemas.openxmlformats.org/drawingml/2006/main">
+            <a:off x="914400" y="4757738"/>
             <a:ext cx="10134600" cy="1104900"/>
           </a:xfrm>
           <a:prstGeom xmlns:a="http://schemas.openxmlformats.org/drawingml/2006/main" prst="rect">
@@ -9699,7 +9789,7 @@
           <p:cNvPr id="6" name="">
             <a:extLst xmlns:a="http://schemas.openxmlformats.org/drawingml/2006/main">
               <a:ext uri="{FF2B5EF4-FFF2-40B4-BE49-F238E27FC236}">
-                <a16:creationId xmlns:a16="http://schemas.microsoft.com/office/drawing/2014/main" id="{85581EC5-E482-4FC5-B199-C073E5CA2865}"/>
+                <a16:creationId xmlns:a16="http://schemas.microsoft.com/office/drawing/2014/main" id="{32F61C9F-747F-48B9-90A2-DFAE8C934696}"/>
               </a:ext>
             </a:extLst>
           </p:cNvPr>
@@ -9754,7 +9844,7 @@
     </p:spTree>
     <p:extLst>
       <p:ext uri="{BB962C8B-B14F-4D97-AF65-F5344CB8AC3E}">
-        <p14:creationId xmlns:p14="http://schemas.microsoft.com/office/powerpoint/2010/main" val="666539712"/>
+        <p14:creationId xmlns:p14="http://schemas.microsoft.com/office/powerpoint/2010/main" val="2058323627"/>
       </p:ext>
     </p:extLst>
   </p:cSld>
@@ -9785,7 +9875,7 @@
           <p:cNvPr id="6" name="">
             <a:extLst xmlns:a="http://schemas.openxmlformats.org/drawingml/2006/main">
               <a:ext uri="{FF2B5EF4-FFF2-40B4-BE49-F238E27FC236}">
-                <a16:creationId xmlns:a16="http://schemas.microsoft.com/office/drawing/2014/main" id="{599358EB-D930-4D04-BD69-E7F4DD3279FA}"/>
+                <a16:creationId xmlns:a16="http://schemas.microsoft.com/office/drawing/2014/main" id="{36646E99-F180-4AC0-85F8-8A24A1F29311}"/>
               </a:ext>
             </a:extLst>
           </p:cNvPr>
@@ -9842,7 +9932,7 @@
           <p:cNvPr id="2" name="title-rule">
             <a:extLst xmlns:a="http://schemas.openxmlformats.org/drawingml/2006/main">
               <a:ext uri="{FF2B5EF4-FFF2-40B4-BE49-F238E27FC236}">
-                <a16:creationId xmlns:a16="http://schemas.microsoft.com/office/drawing/2014/main" id="{5BF14C68-BD6A-4157-8B8E-5421F22D71C2}"/>
+                <a16:creationId xmlns:a16="http://schemas.microsoft.com/office/drawing/2014/main" id="{EA9C2FB1-A208-436C-A55E-7176847CC300}"/>
               </a:ext>
             </a:extLst>
           </p:cNvPr>
@@ -9872,18 +9962,18 @@
           <p:cNvPr id="3" name="">
             <a:extLst xmlns:a="http://schemas.openxmlformats.org/drawingml/2006/main">
               <a:ext uri="{FF2B5EF4-FFF2-40B4-BE49-F238E27FC236}">
-                <a16:creationId xmlns:a16="http://schemas.microsoft.com/office/drawing/2014/main" id="{567F307F-71D9-424B-AA93-1FE89A5E0AEB}"/>
-              </a:ext>
-            </a:extLst>
-          </p:cNvPr>
-          <p:cNvSpPr>
-            <a:spLocks xmlns:a="http://schemas.openxmlformats.org/drawingml/2006/main" noGrp="1"/>
-          </p:cNvSpPr>
-          <p:nvPr/>
-        </p:nvSpPr>
-        <p:spPr>
-          <a:xfrm xmlns:a="http://schemas.openxmlformats.org/drawingml/2006/main">
-            <a:off x="914400" y="1600200"/>
+                <a16:creationId xmlns:a16="http://schemas.microsoft.com/office/drawing/2014/main" id="{8FBC82A2-4C44-4E4D-9B9C-C87A3074BDED}"/>
+              </a:ext>
+            </a:extLst>
+          </p:cNvPr>
+          <p:cNvSpPr>
+            <a:spLocks xmlns:a="http://schemas.openxmlformats.org/drawingml/2006/main" noGrp="1"/>
+          </p:cNvSpPr>
+          <p:nvPr/>
+        </p:nvSpPr>
+        <p:spPr>
+          <a:xfrm xmlns:a="http://schemas.openxmlformats.org/drawingml/2006/main">
+            <a:off x="914400" y="2900363"/>
             <a:ext cx="10134600" cy="685800"/>
           </a:xfrm>
           <a:prstGeom xmlns:a="http://schemas.openxmlformats.org/drawingml/2006/main" prst="rect">
@@ -9929,18 +10019,18 @@
           <p:cNvPr id="4" name="">
             <a:extLst xmlns:a="http://schemas.openxmlformats.org/drawingml/2006/main">
               <a:ext uri="{FF2B5EF4-FFF2-40B4-BE49-F238E27FC236}">
-                <a16:creationId xmlns:a16="http://schemas.microsoft.com/office/drawing/2014/main" id="{B4833435-08DF-46DD-86A0-776CD506963C}"/>
-              </a:ext>
-            </a:extLst>
-          </p:cNvPr>
-          <p:cNvSpPr>
-            <a:spLocks xmlns:a="http://schemas.openxmlformats.org/drawingml/2006/main" noGrp="1"/>
-          </p:cNvSpPr>
-          <p:nvPr/>
-        </p:nvSpPr>
-        <p:spPr>
-          <a:xfrm xmlns:a="http://schemas.openxmlformats.org/drawingml/2006/main">
-            <a:off x="914400" y="2552700"/>
+                <a16:creationId xmlns:a16="http://schemas.microsoft.com/office/drawing/2014/main" id="{818AC60B-F532-41A7-B62A-B90A00D23C38}"/>
+              </a:ext>
+            </a:extLst>
+          </p:cNvPr>
+          <p:cNvSpPr>
+            <a:spLocks xmlns:a="http://schemas.openxmlformats.org/drawingml/2006/main" noGrp="1"/>
+          </p:cNvSpPr>
+          <p:nvPr/>
+        </p:nvSpPr>
+        <p:spPr>
+          <a:xfrm xmlns:a="http://schemas.openxmlformats.org/drawingml/2006/main">
+            <a:off x="914400" y="3852863"/>
             <a:ext cx="10134600" cy="923925"/>
           </a:xfrm>
           <a:prstGeom xmlns:a="http://schemas.openxmlformats.org/drawingml/2006/main" prst="rect">
@@ -9986,7 +10076,7 @@
           <p:cNvPr id="5" name="">
             <a:extLst xmlns:a="http://schemas.openxmlformats.org/drawingml/2006/main">
               <a:ext uri="{FF2B5EF4-FFF2-40B4-BE49-F238E27FC236}">
-                <a16:creationId xmlns:a16="http://schemas.microsoft.com/office/drawing/2014/main" id="{7FE608D1-D418-42AD-8CC7-4C92034B9CB7}"/>
+                <a16:creationId xmlns:a16="http://schemas.microsoft.com/office/drawing/2014/main" id="{70271FDE-5552-4343-89D8-32B4F322C5D4}"/>
               </a:ext>
             </a:extLst>
           </p:cNvPr>
@@ -10041,7 +10131,7 @@
     </p:spTree>
     <p:extLst>
       <p:ext uri="{BB962C8B-B14F-4D97-AF65-F5344CB8AC3E}">
-        <p14:creationId xmlns:p14="http://schemas.microsoft.com/office/powerpoint/2010/main" val="1331451784"/>
+        <p14:creationId xmlns:p14="http://schemas.microsoft.com/office/powerpoint/2010/main" val="2052422631"/>
       </p:ext>
     </p:extLst>
   </p:cSld>
@@ -10069,10 +10159,10 @@
       </p:grpSpPr>
       <p:sp>
         <p:nvSpPr>
-          <p:cNvPr id="22" name="">
-            <a:extLst xmlns:a="http://schemas.openxmlformats.org/drawingml/2006/main">
-              <a:ext uri="{FF2B5EF4-FFF2-40B4-BE49-F238E27FC236}">
-                <a16:creationId xmlns:a16="http://schemas.microsoft.com/office/drawing/2014/main" id="{88B1BE20-442C-43E5-89ED-B43DBC72BE89}"/>
+          <p:cNvPr id="21" name="">
+            <a:extLst xmlns:a="http://schemas.openxmlformats.org/drawingml/2006/main">
+              <a:ext uri="{FF2B5EF4-FFF2-40B4-BE49-F238E27FC236}">
+                <a16:creationId xmlns:a16="http://schemas.microsoft.com/office/drawing/2014/main" id="{905711F0-3944-4EA7-A0CF-8AA39D68EFEA}"/>
               </a:ext>
             </a:extLst>
           </p:cNvPr>
@@ -10129,7 +10219,7 @@
           <p:cNvPr id="2" name="">
             <a:extLst xmlns:a="http://schemas.openxmlformats.org/drawingml/2006/main">
               <a:ext uri="{FF2B5EF4-FFF2-40B4-BE49-F238E27FC236}">
-                <a16:creationId xmlns:a16="http://schemas.microsoft.com/office/drawing/2014/main" id="{BBD7989A-CA4A-48B4-B2D9-FC3DF341715E}"/>
+                <a16:creationId xmlns:a16="http://schemas.microsoft.com/office/drawing/2014/main" id="{62476482-AEBD-4D53-8C83-4A784FCC5B81}"/>
               </a:ext>
             </a:extLst>
           </p:cNvPr>
@@ -10186,7 +10276,7 @@
           <p:cNvPr id="3" name="title-rule">
             <a:extLst xmlns:a="http://schemas.openxmlformats.org/drawingml/2006/main">
               <a:ext uri="{FF2B5EF4-FFF2-40B4-BE49-F238E27FC236}">
-                <a16:creationId xmlns:a16="http://schemas.microsoft.com/office/drawing/2014/main" id="{5C874E70-C3BD-49EA-8150-A23C8145AB5B}"/>
+                <a16:creationId xmlns:a16="http://schemas.microsoft.com/office/drawing/2014/main" id="{AD3D1B5E-4B76-4422-B14D-A49D9B9B5E2A}"/>
               </a:ext>
             </a:extLst>
           </p:cNvPr>
@@ -10213,7 +10303,7 @@
       </p:sp>
       <p:graphicFrame>
         <p:nvGraphicFramePr>
-          <p:cNvPr id="25" name="Chart"/>
+          <p:cNvPr id="24" name="Chart"/>
           <p:cNvGraphicFramePr/>
           <p:nvPr/>
         </p:nvGraphicFramePr>
@@ -10223,7 +10313,7 @@
         </p:xfrm>
         <a:graphic xmlns:a="http://schemas.openxmlformats.org/drawingml/2006/main">
           <a:graphicData uri="http://schemas.openxmlformats.org/drawingml/2006/chart">
-            <c:chart xmlns:r="http://schemas.openxmlformats.org/officeDocument/2006/relationships" xmlns:c="http://schemas.openxmlformats.org/drawingml/2006/chart" r:id="R0bd7598d94e54e9a"/>
+            <c:chart xmlns:r="http://schemas.openxmlformats.org/officeDocument/2006/relationships" xmlns:c="http://schemas.openxmlformats.org/drawingml/2006/chart" r:id="R20f905e1f2214339"/>
           </a:graphicData>
         </a:graphic>
       </p:graphicFrame>
@@ -10232,7 +10322,7 @@
           <p:cNvPr id="5" name="">
             <a:extLst xmlns:a="http://schemas.openxmlformats.org/drawingml/2006/main">
               <a:ext uri="{FF2B5EF4-FFF2-40B4-BE49-F238E27FC236}">
-                <a16:creationId xmlns:a16="http://schemas.microsoft.com/office/drawing/2014/main" id="{8DC00BB1-A6A3-4993-B7FF-821FCEECCE2A}"/>
+                <a16:creationId xmlns:a16="http://schemas.microsoft.com/office/drawing/2014/main" id="{B183BF7E-186E-4286-A520-F59971697F98}"/>
               </a:ext>
             </a:extLst>
           </p:cNvPr>
@@ -10263,24 +10353,26 @@
           <p:cNvPr id="6" name="">
             <a:extLst xmlns:a="http://schemas.openxmlformats.org/drawingml/2006/main">
               <a:ext uri="{FF2B5EF4-FFF2-40B4-BE49-F238E27FC236}">
-                <a16:creationId xmlns:a16="http://schemas.microsoft.com/office/drawing/2014/main" id="{06465EA9-971E-4D6F-884A-2E91760B6E69}"/>
-              </a:ext>
-            </a:extLst>
-          </p:cNvPr>
-          <p:cNvSpPr>
-            <a:spLocks xmlns:a="http://schemas.openxmlformats.org/drawingml/2006/main" noGrp="1"/>
-          </p:cNvSpPr>
-          <p:nvPr/>
-        </p:nvSpPr>
-        <p:spPr>
-          <a:xfrm xmlns:a="http://schemas.openxmlformats.org/drawingml/2006/main">
-            <a:off x="1609725" y="1735455"/>
-            <a:ext cx="819150" cy="190500"/>
+                <a16:creationId xmlns:a16="http://schemas.microsoft.com/office/drawing/2014/main" id="{4E153FB5-AE4C-484A-BFAC-0C6766FEB0AC}"/>
+              </a:ext>
+            </a:extLst>
+          </p:cNvPr>
+          <p:cNvSpPr>
+            <a:spLocks xmlns:a="http://schemas.openxmlformats.org/drawingml/2006/main" noGrp="1"/>
+          </p:cNvSpPr>
+          <p:nvPr/>
+        </p:nvSpPr>
+        <p:spPr>
+          <a:xfrm xmlns:a="http://schemas.openxmlformats.org/drawingml/2006/main">
+            <a:off x="1581150" y="1735455"/>
+            <a:ext cx="876300" cy="190500"/>
           </a:xfrm>
           <a:prstGeom xmlns:a="http://schemas.openxmlformats.org/drawingml/2006/main" prst="rect">
             <a:avLst/>
           </a:prstGeom>
-          <a:noFill xmlns:a="http://schemas.openxmlformats.org/drawingml/2006/main"/>
+          <a:solidFill xmlns:a="http://schemas.openxmlformats.org/drawingml/2006/main">
+            <a:srgbClr val="F5FAF7"/>
+          </a:solidFill>
           <a:ln xmlns:a="http://schemas.openxmlformats.org/drawingml/2006/main" w="0">
             <a:noFill/>
           </a:ln>
@@ -10320,55 +10412,26 @@
           <p:cNvPr id="7" name="">
             <a:extLst xmlns:a="http://schemas.openxmlformats.org/drawingml/2006/main">
               <a:ext uri="{FF2B5EF4-FFF2-40B4-BE49-F238E27FC236}">
-                <a16:creationId xmlns:a16="http://schemas.microsoft.com/office/drawing/2014/main" id="{61FBC1DB-4430-4871-83F6-DDF91DA745C5}"/>
-              </a:ext>
-            </a:extLst>
-          </p:cNvPr>
-          <p:cNvSpPr>
-            <a:spLocks xmlns:a="http://schemas.openxmlformats.org/drawingml/2006/main" noGrp="1"/>
-          </p:cNvSpPr>
-          <p:nvPr/>
-        </p:nvSpPr>
-        <p:spPr>
-          <a:xfrm xmlns:a="http://schemas.openxmlformats.org/drawingml/2006/main">
-            <a:off x="3238500" y="5136588"/>
-            <a:ext cx="9525" cy="76200"/>
-          </a:xfrm>
-          <a:prstGeom xmlns:a="http://schemas.openxmlformats.org/drawingml/2006/main" prst="line">
-            <a:avLst/>
-          </a:prstGeom>
-          <a:noFill xmlns:a="http://schemas.openxmlformats.org/drawingml/2006/main"/>
-          <a:ln xmlns:a="http://schemas.openxmlformats.org/drawingml/2006/main" w="9525">
-            <a:solidFill>
-              <a:srgbClr val="DC2626"/>
-            </a:solidFill>
-            <a:prstDash val="solid"/>
-          </a:ln>
-        </p:spPr>
-      </p:sp>
-      <p:sp>
-        <p:nvSpPr>
-          <p:cNvPr id="8" name="">
-            <a:extLst xmlns:a="http://schemas.openxmlformats.org/drawingml/2006/main">
-              <a:ext uri="{FF2B5EF4-FFF2-40B4-BE49-F238E27FC236}">
-                <a16:creationId xmlns:a16="http://schemas.microsoft.com/office/drawing/2014/main" id="{9F09B4E5-0C14-47A5-80C8-295B941162CD}"/>
-              </a:ext>
-            </a:extLst>
-          </p:cNvPr>
-          <p:cNvSpPr>
-            <a:spLocks xmlns:a="http://schemas.openxmlformats.org/drawingml/2006/main" noGrp="1"/>
-          </p:cNvSpPr>
-          <p:nvPr/>
-        </p:nvSpPr>
-        <p:spPr>
-          <a:xfrm xmlns:a="http://schemas.openxmlformats.org/drawingml/2006/main">
-            <a:off x="2828925" y="5212788"/>
-            <a:ext cx="819150" cy="190500"/>
+                <a16:creationId xmlns:a16="http://schemas.microsoft.com/office/drawing/2014/main" id="{53EC8357-07AB-491B-B60C-E2BB0A1CC359}"/>
+              </a:ext>
+            </a:extLst>
+          </p:cNvPr>
+          <p:cNvSpPr>
+            <a:spLocks xmlns:a="http://schemas.openxmlformats.org/drawingml/2006/main" noGrp="1"/>
+          </p:cNvSpPr>
+          <p:nvPr/>
+        </p:nvSpPr>
+        <p:spPr>
+          <a:xfrm xmlns:a="http://schemas.openxmlformats.org/drawingml/2006/main">
+            <a:off x="2800350" y="4654550"/>
+            <a:ext cx="876300" cy="190500"/>
           </a:xfrm>
           <a:prstGeom xmlns:a="http://schemas.openxmlformats.org/drawingml/2006/main" prst="rect">
             <a:avLst/>
           </a:prstGeom>
-          <a:noFill xmlns:a="http://schemas.openxmlformats.org/drawingml/2006/main"/>
+          <a:solidFill xmlns:a="http://schemas.openxmlformats.org/drawingml/2006/main">
+            <a:srgbClr val="F5FAF7"/>
+          </a:solidFill>
           <a:ln xmlns:a="http://schemas.openxmlformats.org/drawingml/2006/main" w="0">
             <a:noFill/>
           </a:ln>
@@ -10405,10 +10468,10 @@
       </p:sp>
       <p:sp>
         <p:nvSpPr>
-          <p:cNvPr id="9" name="">
-            <a:extLst xmlns:a="http://schemas.openxmlformats.org/drawingml/2006/main">
-              <a:ext uri="{FF2B5EF4-FFF2-40B4-BE49-F238E27FC236}">
-                <a16:creationId xmlns:a16="http://schemas.microsoft.com/office/drawing/2014/main" id="{7EC59496-902D-4836-BA22-8B42C99B5D4B}"/>
+          <p:cNvPr id="8" name="">
+            <a:extLst xmlns:a="http://schemas.openxmlformats.org/drawingml/2006/main">
+              <a:ext uri="{FF2B5EF4-FFF2-40B4-BE49-F238E27FC236}">
+                <a16:creationId xmlns:a16="http://schemas.microsoft.com/office/drawing/2014/main" id="{7E9308CA-2C67-401A-9BC2-507AE8F8A64C}"/>
               </a:ext>
             </a:extLst>
           </p:cNvPr>
@@ -10436,27 +10499,29 @@
       </p:sp>
       <p:sp>
         <p:nvSpPr>
-          <p:cNvPr id="10" name="">
-            <a:extLst xmlns:a="http://schemas.openxmlformats.org/drawingml/2006/main">
-              <a:ext uri="{FF2B5EF4-FFF2-40B4-BE49-F238E27FC236}">
-                <a16:creationId xmlns:a16="http://schemas.microsoft.com/office/drawing/2014/main" id="{E4F563E9-A7E8-4F29-8D3D-B910B0D44713}"/>
-              </a:ext>
-            </a:extLst>
-          </p:cNvPr>
-          <p:cNvSpPr>
-            <a:spLocks xmlns:a="http://schemas.openxmlformats.org/drawingml/2006/main" noGrp="1"/>
-          </p:cNvSpPr>
-          <p:nvPr/>
-        </p:nvSpPr>
-        <p:spPr>
-          <a:xfrm xmlns:a="http://schemas.openxmlformats.org/drawingml/2006/main">
-            <a:off x="4048125" y="4641590"/>
-            <a:ext cx="819150" cy="190500"/>
+          <p:cNvPr id="9" name="">
+            <a:extLst xmlns:a="http://schemas.openxmlformats.org/drawingml/2006/main">
+              <a:ext uri="{FF2B5EF4-FFF2-40B4-BE49-F238E27FC236}">
+                <a16:creationId xmlns:a16="http://schemas.microsoft.com/office/drawing/2014/main" id="{254B0514-3694-4435-8CF8-CDD0722213C7}"/>
+              </a:ext>
+            </a:extLst>
+          </p:cNvPr>
+          <p:cNvSpPr>
+            <a:spLocks xmlns:a="http://schemas.openxmlformats.org/drawingml/2006/main" noGrp="1"/>
+          </p:cNvSpPr>
+          <p:nvPr/>
+        </p:nvSpPr>
+        <p:spPr>
+          <a:xfrm xmlns:a="http://schemas.openxmlformats.org/drawingml/2006/main">
+            <a:off x="4019550" y="4641590"/>
+            <a:ext cx="876300" cy="190500"/>
           </a:xfrm>
           <a:prstGeom xmlns:a="http://schemas.openxmlformats.org/drawingml/2006/main" prst="rect">
             <a:avLst/>
           </a:prstGeom>
-          <a:noFill xmlns:a="http://schemas.openxmlformats.org/drawingml/2006/main"/>
+          <a:solidFill xmlns:a="http://schemas.openxmlformats.org/drawingml/2006/main">
+            <a:srgbClr val="F5FAF7"/>
+          </a:solidFill>
           <a:ln xmlns:a="http://schemas.openxmlformats.org/drawingml/2006/main" w="0">
             <a:noFill/>
           </a:ln>
@@ -10493,10 +10558,10 @@
       </p:sp>
       <p:sp>
         <p:nvSpPr>
-          <p:cNvPr id="11" name="">
-            <a:extLst xmlns:a="http://schemas.openxmlformats.org/drawingml/2006/main">
-              <a:ext uri="{FF2B5EF4-FFF2-40B4-BE49-F238E27FC236}">
-                <a16:creationId xmlns:a16="http://schemas.microsoft.com/office/drawing/2014/main" id="{DB371E17-9298-435B-8017-67150EA615A7}"/>
+          <p:cNvPr id="10" name="">
+            <a:extLst xmlns:a="http://schemas.openxmlformats.org/drawingml/2006/main">
+              <a:ext uri="{FF2B5EF4-FFF2-40B4-BE49-F238E27FC236}">
+                <a16:creationId xmlns:a16="http://schemas.microsoft.com/office/drawing/2014/main" id="{15C3B374-2ACD-401C-8E54-46BCE20FDE45}"/>
               </a:ext>
             </a:extLst>
           </p:cNvPr>
@@ -10524,27 +10589,29 @@
       </p:sp>
       <p:sp>
         <p:nvSpPr>
-          <p:cNvPr id="12" name="">
-            <a:extLst xmlns:a="http://schemas.openxmlformats.org/drawingml/2006/main">
-              <a:ext uri="{FF2B5EF4-FFF2-40B4-BE49-F238E27FC236}">
-                <a16:creationId xmlns:a16="http://schemas.microsoft.com/office/drawing/2014/main" id="{013BF389-C1D5-48AF-9BF2-BCF93C7CA9CB}"/>
-              </a:ext>
-            </a:extLst>
-          </p:cNvPr>
-          <p:cNvSpPr>
-            <a:spLocks xmlns:a="http://schemas.openxmlformats.org/drawingml/2006/main" noGrp="1"/>
-          </p:cNvSpPr>
-          <p:nvPr/>
-        </p:nvSpPr>
-        <p:spPr>
-          <a:xfrm xmlns:a="http://schemas.openxmlformats.org/drawingml/2006/main">
-            <a:off x="5267325" y="4646949"/>
-            <a:ext cx="819150" cy="190500"/>
+          <p:cNvPr id="11" name="">
+            <a:extLst xmlns:a="http://schemas.openxmlformats.org/drawingml/2006/main">
+              <a:ext uri="{FF2B5EF4-FFF2-40B4-BE49-F238E27FC236}">
+                <a16:creationId xmlns:a16="http://schemas.microsoft.com/office/drawing/2014/main" id="{5E47DF20-DB24-454D-A374-8D8C422D7EB9}"/>
+              </a:ext>
+            </a:extLst>
+          </p:cNvPr>
+          <p:cNvSpPr>
+            <a:spLocks xmlns:a="http://schemas.openxmlformats.org/drawingml/2006/main" noGrp="1"/>
+          </p:cNvSpPr>
+          <p:nvPr/>
+        </p:nvSpPr>
+        <p:spPr>
+          <a:xfrm xmlns:a="http://schemas.openxmlformats.org/drawingml/2006/main">
+            <a:off x="5238750" y="4646949"/>
+            <a:ext cx="876300" cy="190500"/>
           </a:xfrm>
           <a:prstGeom xmlns:a="http://schemas.openxmlformats.org/drawingml/2006/main" prst="rect">
             <a:avLst/>
           </a:prstGeom>
-          <a:noFill xmlns:a="http://schemas.openxmlformats.org/drawingml/2006/main"/>
+          <a:solidFill xmlns:a="http://schemas.openxmlformats.org/drawingml/2006/main">
+            <a:srgbClr val="F5FAF7"/>
+          </a:solidFill>
           <a:ln xmlns:a="http://schemas.openxmlformats.org/drawingml/2006/main" w="0">
             <a:noFill/>
           </a:ln>
@@ -10581,10 +10648,10 @@
       </p:sp>
       <p:sp>
         <p:nvSpPr>
-          <p:cNvPr id="13" name="">
-            <a:extLst xmlns:a="http://schemas.openxmlformats.org/drawingml/2006/main">
-              <a:ext uri="{FF2B5EF4-FFF2-40B4-BE49-F238E27FC236}">
-                <a16:creationId xmlns:a16="http://schemas.microsoft.com/office/drawing/2014/main" id="{4B2708E0-398D-43D5-9CBD-833B6AA956F1}"/>
+          <p:cNvPr id="12" name="">
+            <a:extLst xmlns:a="http://schemas.openxmlformats.org/drawingml/2006/main">
+              <a:ext uri="{FF2B5EF4-FFF2-40B4-BE49-F238E27FC236}">
+                <a16:creationId xmlns:a16="http://schemas.microsoft.com/office/drawing/2014/main" id="{36774410-FF61-447F-81A2-EF63696A0272}"/>
               </a:ext>
             </a:extLst>
           </p:cNvPr>
@@ -10612,27 +10679,29 @@
       </p:sp>
       <p:sp>
         <p:nvSpPr>
-          <p:cNvPr id="14" name="">
-            <a:extLst xmlns:a="http://schemas.openxmlformats.org/drawingml/2006/main">
-              <a:ext uri="{FF2B5EF4-FFF2-40B4-BE49-F238E27FC236}">
-                <a16:creationId xmlns:a16="http://schemas.microsoft.com/office/drawing/2014/main" id="{B378A10D-F695-4FB9-BE57-F78315D33624}"/>
-              </a:ext>
-            </a:extLst>
-          </p:cNvPr>
-          <p:cNvSpPr>
-            <a:spLocks xmlns:a="http://schemas.openxmlformats.org/drawingml/2006/main" noGrp="1"/>
-          </p:cNvSpPr>
-          <p:nvPr/>
-        </p:nvSpPr>
-        <p:spPr>
-          <a:xfrm xmlns:a="http://schemas.openxmlformats.org/drawingml/2006/main">
-            <a:off x="6486525" y="4648959"/>
-            <a:ext cx="819150" cy="190500"/>
+          <p:cNvPr id="13" name="">
+            <a:extLst xmlns:a="http://schemas.openxmlformats.org/drawingml/2006/main">
+              <a:ext uri="{FF2B5EF4-FFF2-40B4-BE49-F238E27FC236}">
+                <a16:creationId xmlns:a16="http://schemas.microsoft.com/office/drawing/2014/main" id="{AD25C0CE-6326-4ADE-AC26-9A30B379D60C}"/>
+              </a:ext>
+            </a:extLst>
+          </p:cNvPr>
+          <p:cNvSpPr>
+            <a:spLocks xmlns:a="http://schemas.openxmlformats.org/drawingml/2006/main" noGrp="1"/>
+          </p:cNvSpPr>
+          <p:nvPr/>
+        </p:nvSpPr>
+        <p:spPr>
+          <a:xfrm xmlns:a="http://schemas.openxmlformats.org/drawingml/2006/main">
+            <a:off x="6457950" y="4648959"/>
+            <a:ext cx="876300" cy="190500"/>
           </a:xfrm>
           <a:prstGeom xmlns:a="http://schemas.openxmlformats.org/drawingml/2006/main" prst="rect">
             <a:avLst/>
           </a:prstGeom>
-          <a:noFill xmlns:a="http://schemas.openxmlformats.org/drawingml/2006/main"/>
+          <a:solidFill xmlns:a="http://schemas.openxmlformats.org/drawingml/2006/main">
+            <a:srgbClr val="F5FAF7"/>
+          </a:solidFill>
           <a:ln xmlns:a="http://schemas.openxmlformats.org/drawingml/2006/main" w="0">
             <a:noFill/>
           </a:ln>
@@ -10669,10 +10738,10 @@
       </p:sp>
       <p:sp>
         <p:nvSpPr>
-          <p:cNvPr id="15" name="">
-            <a:extLst xmlns:a="http://schemas.openxmlformats.org/drawingml/2006/main">
-              <a:ext uri="{FF2B5EF4-FFF2-40B4-BE49-F238E27FC236}">
-                <a16:creationId xmlns:a16="http://schemas.microsoft.com/office/drawing/2014/main" id="{1B13B07E-77F4-4885-9CF8-A6C5C6092110}"/>
+          <p:cNvPr id="14" name="">
+            <a:extLst xmlns:a="http://schemas.openxmlformats.org/drawingml/2006/main">
+              <a:ext uri="{FF2B5EF4-FFF2-40B4-BE49-F238E27FC236}">
+                <a16:creationId xmlns:a16="http://schemas.microsoft.com/office/drawing/2014/main" id="{0345E5A1-C1C2-4FFA-BDC9-56D75D229C9D}"/>
               </a:ext>
             </a:extLst>
           </p:cNvPr>
@@ -10700,27 +10769,29 @@
       </p:sp>
       <p:sp>
         <p:nvSpPr>
-          <p:cNvPr id="16" name="">
-            <a:extLst xmlns:a="http://schemas.openxmlformats.org/drawingml/2006/main">
-              <a:ext uri="{FF2B5EF4-FFF2-40B4-BE49-F238E27FC236}">
-                <a16:creationId xmlns:a16="http://schemas.microsoft.com/office/drawing/2014/main" id="{15326B32-2648-4380-93E2-D437B6F33EA8}"/>
-              </a:ext>
-            </a:extLst>
-          </p:cNvPr>
-          <p:cNvSpPr>
-            <a:spLocks xmlns:a="http://schemas.openxmlformats.org/drawingml/2006/main" noGrp="1"/>
-          </p:cNvSpPr>
-          <p:nvPr/>
-        </p:nvSpPr>
-        <p:spPr>
-          <a:xfrm xmlns:a="http://schemas.openxmlformats.org/drawingml/2006/main">
-            <a:off x="7705725" y="4679775"/>
-            <a:ext cx="819150" cy="190500"/>
+          <p:cNvPr id="15" name="">
+            <a:extLst xmlns:a="http://schemas.openxmlformats.org/drawingml/2006/main">
+              <a:ext uri="{FF2B5EF4-FFF2-40B4-BE49-F238E27FC236}">
+                <a16:creationId xmlns:a16="http://schemas.microsoft.com/office/drawing/2014/main" id="{7DCBC557-7D6A-4F50-8140-B33AF6C1669A}"/>
+              </a:ext>
+            </a:extLst>
+          </p:cNvPr>
+          <p:cNvSpPr>
+            <a:spLocks xmlns:a="http://schemas.openxmlformats.org/drawingml/2006/main" noGrp="1"/>
+          </p:cNvSpPr>
+          <p:nvPr/>
+        </p:nvSpPr>
+        <p:spPr>
+          <a:xfrm xmlns:a="http://schemas.openxmlformats.org/drawingml/2006/main">
+            <a:off x="7677150" y="4679775"/>
+            <a:ext cx="876300" cy="190500"/>
           </a:xfrm>
           <a:prstGeom xmlns:a="http://schemas.openxmlformats.org/drawingml/2006/main" prst="rect">
             <a:avLst/>
           </a:prstGeom>
-          <a:noFill xmlns:a="http://schemas.openxmlformats.org/drawingml/2006/main"/>
+          <a:solidFill xmlns:a="http://schemas.openxmlformats.org/drawingml/2006/main">
+            <a:srgbClr val="F5FAF7"/>
+          </a:solidFill>
           <a:ln xmlns:a="http://schemas.openxmlformats.org/drawingml/2006/main" w="0">
             <a:noFill/>
           </a:ln>
@@ -10757,10 +10828,10 @@
       </p:sp>
       <p:sp>
         <p:nvSpPr>
-          <p:cNvPr id="17" name="">
-            <a:extLst xmlns:a="http://schemas.openxmlformats.org/drawingml/2006/main">
-              <a:ext uri="{FF2B5EF4-FFF2-40B4-BE49-F238E27FC236}">
-                <a16:creationId xmlns:a16="http://schemas.microsoft.com/office/drawing/2014/main" id="{87CE999F-8A6D-45B9-AB81-1DC6390BA455}"/>
+          <p:cNvPr id="16" name="">
+            <a:extLst xmlns:a="http://schemas.openxmlformats.org/drawingml/2006/main">
+              <a:ext uri="{FF2B5EF4-FFF2-40B4-BE49-F238E27FC236}">
+                <a16:creationId xmlns:a16="http://schemas.microsoft.com/office/drawing/2014/main" id="{88CFE01B-2881-4613-959E-CF575294D92E}"/>
               </a:ext>
             </a:extLst>
           </p:cNvPr>
@@ -10788,27 +10859,29 @@
       </p:sp>
       <p:sp>
         <p:nvSpPr>
-          <p:cNvPr id="18" name="">
-            <a:extLst xmlns:a="http://schemas.openxmlformats.org/drawingml/2006/main">
-              <a:ext uri="{FF2B5EF4-FFF2-40B4-BE49-F238E27FC236}">
-                <a16:creationId xmlns:a16="http://schemas.microsoft.com/office/drawing/2014/main" id="{9300C6E0-1377-46C6-97DC-A5F1382547A6}"/>
-              </a:ext>
-            </a:extLst>
-          </p:cNvPr>
-          <p:cNvSpPr>
-            <a:spLocks xmlns:a="http://schemas.openxmlformats.org/drawingml/2006/main" noGrp="1"/>
-          </p:cNvSpPr>
-          <p:nvPr/>
-        </p:nvSpPr>
-        <p:spPr>
-          <a:xfrm xmlns:a="http://schemas.openxmlformats.org/drawingml/2006/main">
-            <a:off x="8924925" y="1816516"/>
-            <a:ext cx="819150" cy="190500"/>
+          <p:cNvPr id="17" name="">
+            <a:extLst xmlns:a="http://schemas.openxmlformats.org/drawingml/2006/main">
+              <a:ext uri="{FF2B5EF4-FFF2-40B4-BE49-F238E27FC236}">
+                <a16:creationId xmlns:a16="http://schemas.microsoft.com/office/drawing/2014/main" id="{61F7B1FB-8CD2-4537-B31B-56AEFC37AA0C}"/>
+              </a:ext>
+            </a:extLst>
+          </p:cNvPr>
+          <p:cNvSpPr>
+            <a:spLocks xmlns:a="http://schemas.openxmlformats.org/drawingml/2006/main" noGrp="1"/>
+          </p:cNvSpPr>
+          <p:nvPr/>
+        </p:nvSpPr>
+        <p:spPr>
+          <a:xfrm xmlns:a="http://schemas.openxmlformats.org/drawingml/2006/main">
+            <a:off x="8896350" y="1816516"/>
+            <a:ext cx="876300" cy="190500"/>
           </a:xfrm>
           <a:prstGeom xmlns:a="http://schemas.openxmlformats.org/drawingml/2006/main" prst="rect">
             <a:avLst/>
           </a:prstGeom>
-          <a:noFill xmlns:a="http://schemas.openxmlformats.org/drawingml/2006/main"/>
+          <a:solidFill xmlns:a="http://schemas.openxmlformats.org/drawingml/2006/main">
+            <a:srgbClr val="F5FAF7"/>
+          </a:solidFill>
           <a:ln xmlns:a="http://schemas.openxmlformats.org/drawingml/2006/main" w="0">
             <a:noFill/>
           </a:ln>
@@ -10845,10 +10918,10 @@
       </p:sp>
       <p:sp>
         <p:nvSpPr>
-          <p:cNvPr id="19" name="">
-            <a:extLst xmlns:a="http://schemas.openxmlformats.org/drawingml/2006/main">
-              <a:ext uri="{FF2B5EF4-FFF2-40B4-BE49-F238E27FC236}">
-                <a16:creationId xmlns:a16="http://schemas.microsoft.com/office/drawing/2014/main" id="{EB5A3683-0240-4E0F-B1ED-5B92E7ACE67B}"/>
+          <p:cNvPr id="18" name="">
+            <a:extLst xmlns:a="http://schemas.openxmlformats.org/drawingml/2006/main">
+              <a:ext uri="{FF2B5EF4-FFF2-40B4-BE49-F238E27FC236}">
+                <a16:creationId xmlns:a16="http://schemas.microsoft.com/office/drawing/2014/main" id="{7B4BDF1C-F3C1-4F31-982A-3BC9D7CBA77C}"/>
               </a:ext>
             </a:extLst>
           </p:cNvPr>
@@ -10876,22 +10949,81 @@
       </p:sp>
       <p:sp>
         <p:nvSpPr>
+          <p:cNvPr id="19" name="">
+            <a:extLst xmlns:a="http://schemas.openxmlformats.org/drawingml/2006/main">
+              <a:ext uri="{FF2B5EF4-FFF2-40B4-BE49-F238E27FC236}">
+                <a16:creationId xmlns:a16="http://schemas.microsoft.com/office/drawing/2014/main" id="{E1C525FF-24B5-4DA9-9C40-B294A099ABFE}"/>
+              </a:ext>
+            </a:extLst>
+          </p:cNvPr>
+          <p:cNvSpPr>
+            <a:spLocks xmlns:a="http://schemas.openxmlformats.org/drawingml/2006/main" noGrp="1"/>
+          </p:cNvSpPr>
+          <p:nvPr/>
+        </p:nvSpPr>
+        <p:spPr>
+          <a:xfrm xmlns:a="http://schemas.openxmlformats.org/drawingml/2006/main">
+            <a:off x="10115550" y="1816516"/>
+            <a:ext cx="876300" cy="190500"/>
+          </a:xfrm>
+          <a:prstGeom xmlns:a="http://schemas.openxmlformats.org/drawingml/2006/main" prst="rect">
+            <a:avLst/>
+          </a:prstGeom>
+          <a:solidFill xmlns:a="http://schemas.openxmlformats.org/drawingml/2006/main">
+            <a:srgbClr val="F5FAF7"/>
+          </a:solidFill>
+          <a:ln xmlns:a="http://schemas.openxmlformats.org/drawingml/2006/main" w="0">
+            <a:noFill/>
+          </a:ln>
+        </p:spPr>
+        <p:txBody>
+          <a:bodyPr xmlns:a="http://schemas.openxmlformats.org/drawingml/2006/main">
+            <a:noAutofit/>
+          </a:bodyPr>
+          <a:lstStyle xmlns:a="http://schemas.openxmlformats.org/drawingml/2006/main"/>
+          <a:p xmlns:a="http://schemas.openxmlformats.org/drawingml/2006/main">
+            <a:pPr algn="ctr">
+              <a:defRPr sz="900" b="1">
+                <a:solidFill>
+                  <a:srgbClr val="12372A"/>
+                </a:solidFill>
+                <a:latin typeface="Calibri"/>
+                <a:ea typeface="Calibri"/>
+                <a:cs typeface="Calibri"/>
+              </a:defRPr>
+            </a:pPr>
+            <a:r>
+              <a:rPr sz="900" b="1">
+                <a:solidFill>
+                  <a:srgbClr val="12372A"/>
+                </a:solidFill>
+                <a:latin typeface="Calibri"/>
+                <a:ea typeface="Calibri"/>
+                <a:cs typeface="Calibri"/>
+              </a:rPr>
+              <a:t>$4.3M</a:t>
+            </a:r>
+          </a:p>
+        </p:txBody>
+      </p:sp>
+      <p:sp>
+        <p:nvSpPr>
           <p:cNvPr id="20" name="">
             <a:extLst xmlns:a="http://schemas.openxmlformats.org/drawingml/2006/main">
               <a:ext uri="{FF2B5EF4-FFF2-40B4-BE49-F238E27FC236}">
-                <a16:creationId xmlns:a16="http://schemas.microsoft.com/office/drawing/2014/main" id="{001CE608-6F29-4ED4-AF07-4DFABEDD6C54}"/>
-              </a:ext>
-            </a:extLst>
-          </p:cNvPr>
-          <p:cNvSpPr>
-            <a:spLocks xmlns:a="http://schemas.openxmlformats.org/drawingml/2006/main" noGrp="1"/>
-          </p:cNvSpPr>
-          <p:nvPr/>
-        </p:nvSpPr>
-        <p:spPr>
-          <a:xfrm xmlns:a="http://schemas.openxmlformats.org/drawingml/2006/main">
-            <a:off x="10144125" y="1816516"/>
-            <a:ext cx="819150" cy="190500"/>
+                <a16:creationId xmlns:a16="http://schemas.microsoft.com/office/drawing/2014/main" id="{1A5ACA85-0002-4E07-898A-FDB8BFF7C31B}"/>
+              </a:ext>
+            </a:extLst>
+          </p:cNvPr>
+          <p:cNvSpPr>
+            <a:spLocks xmlns:a="http://schemas.openxmlformats.org/drawingml/2006/main" noGrp="1"/>
+          </p:cNvSpPr>
+          <p:nvPr/>
+        </p:nvSpPr>
+        <p:spPr>
+          <a:xfrm xmlns:a="http://schemas.openxmlformats.org/drawingml/2006/main">
+            <a:off x="10953750" y="6438900"/>
+            <a:ext cx="552450" cy="171450"/>
           </a:xfrm>
           <a:prstGeom xmlns:a="http://schemas.openxmlformats.org/drawingml/2006/main" prst="rect">
             <a:avLst/>
@@ -10907,63 +11039,6 @@
           </a:bodyPr>
           <a:lstStyle xmlns:a="http://schemas.openxmlformats.org/drawingml/2006/main"/>
           <a:p xmlns:a="http://schemas.openxmlformats.org/drawingml/2006/main">
-            <a:pPr algn="ctr">
-              <a:defRPr sz="900" b="1">
-                <a:solidFill>
-                  <a:srgbClr val="12372A"/>
-                </a:solidFill>
-                <a:latin typeface="Calibri"/>
-                <a:ea typeface="Calibri"/>
-                <a:cs typeface="Calibri"/>
-              </a:defRPr>
-            </a:pPr>
-            <a:r>
-              <a:rPr sz="900" b="1">
-                <a:solidFill>
-                  <a:srgbClr val="12372A"/>
-                </a:solidFill>
-                <a:latin typeface="Calibri"/>
-                <a:ea typeface="Calibri"/>
-                <a:cs typeface="Calibri"/>
-              </a:rPr>
-              <a:t>$4.3M</a:t>
-            </a:r>
-          </a:p>
-        </p:txBody>
-      </p:sp>
-      <p:sp>
-        <p:nvSpPr>
-          <p:cNvPr id="21" name="">
-            <a:extLst xmlns:a="http://schemas.openxmlformats.org/drawingml/2006/main">
-              <a:ext uri="{FF2B5EF4-FFF2-40B4-BE49-F238E27FC236}">
-                <a16:creationId xmlns:a16="http://schemas.microsoft.com/office/drawing/2014/main" id="{8EFF9E3F-99EE-4C88-91D1-66324352FB8B}"/>
-              </a:ext>
-            </a:extLst>
-          </p:cNvPr>
-          <p:cNvSpPr>
-            <a:spLocks xmlns:a="http://schemas.openxmlformats.org/drawingml/2006/main" noGrp="1"/>
-          </p:cNvSpPr>
-          <p:nvPr/>
-        </p:nvSpPr>
-        <p:spPr>
-          <a:xfrm xmlns:a="http://schemas.openxmlformats.org/drawingml/2006/main">
-            <a:off x="10953750" y="6438900"/>
-            <a:ext cx="552450" cy="171450"/>
-          </a:xfrm>
-          <a:prstGeom xmlns:a="http://schemas.openxmlformats.org/drawingml/2006/main" prst="rect">
-            <a:avLst/>
-          </a:prstGeom>
-          <a:noFill xmlns:a="http://schemas.openxmlformats.org/drawingml/2006/main"/>
-          <a:ln xmlns:a="http://schemas.openxmlformats.org/drawingml/2006/main" w="0">
-            <a:noFill/>
-          </a:ln>
-        </p:spPr>
-        <p:txBody>
-          <a:bodyPr xmlns:a="http://schemas.openxmlformats.org/drawingml/2006/main">
-            <a:noAutofit/>
-          </a:bodyPr>
-          <a:lstStyle xmlns:a="http://schemas.openxmlformats.org/drawingml/2006/main"/>
-          <a:p xmlns:a="http://schemas.openxmlformats.org/drawingml/2006/main">
             <a:pPr algn="r">
               <a:defRPr sz="750">
                 <a:solidFill>
@@ -10991,7 +11066,7 @@
     </p:spTree>
     <p:extLst>
       <p:ext uri="{BB962C8B-B14F-4D97-AF65-F5344CB8AC3E}">
-        <p14:creationId xmlns:p14="http://schemas.microsoft.com/office/powerpoint/2010/main" val="1254009715"/>
+        <p14:creationId xmlns:p14="http://schemas.microsoft.com/office/powerpoint/2010/main" val="1873103174"/>
       </p:ext>
     </p:extLst>
   </p:cSld>
@@ -11022,7 +11097,7 @@
           <p:cNvPr id="6" name="">
             <a:extLst xmlns:a="http://schemas.openxmlformats.org/drawingml/2006/main">
               <a:ext uri="{FF2B5EF4-FFF2-40B4-BE49-F238E27FC236}">
-                <a16:creationId xmlns:a16="http://schemas.microsoft.com/office/drawing/2014/main" id="{B6ABE439-9B0D-41E7-BC42-87297E745A72}"/>
+                <a16:creationId xmlns:a16="http://schemas.microsoft.com/office/drawing/2014/main" id="{0BB89535-03F0-4957-A375-5772FD1DFFB8}"/>
               </a:ext>
             </a:extLst>
           </p:cNvPr>
@@ -11079,7 +11154,7 @@
           <p:cNvPr id="2" name="title-rule">
             <a:extLst xmlns:a="http://schemas.openxmlformats.org/drawingml/2006/main">
               <a:ext uri="{FF2B5EF4-FFF2-40B4-BE49-F238E27FC236}">
-                <a16:creationId xmlns:a16="http://schemas.microsoft.com/office/drawing/2014/main" id="{F0757439-0B3B-4BB5-985E-862736E35340}"/>
+                <a16:creationId xmlns:a16="http://schemas.microsoft.com/office/drawing/2014/main" id="{94D3B2A4-2A7E-4E4C-B030-B062F70D5EAB}"/>
               </a:ext>
             </a:extLst>
           </p:cNvPr>
@@ -11109,18 +11184,18 @@
           <p:cNvPr id="3" name="">
             <a:extLst xmlns:a="http://schemas.openxmlformats.org/drawingml/2006/main">
               <a:ext uri="{FF2B5EF4-FFF2-40B4-BE49-F238E27FC236}">
-                <a16:creationId xmlns:a16="http://schemas.microsoft.com/office/drawing/2014/main" id="{E7835AE0-03E1-490E-B97B-299BAA496433}"/>
-              </a:ext>
-            </a:extLst>
-          </p:cNvPr>
-          <p:cNvSpPr>
-            <a:spLocks xmlns:a="http://schemas.openxmlformats.org/drawingml/2006/main" noGrp="1"/>
-          </p:cNvSpPr>
-          <p:nvPr/>
-        </p:nvSpPr>
-        <p:spPr>
-          <a:xfrm xmlns:a="http://schemas.openxmlformats.org/drawingml/2006/main">
-            <a:off x="914400" y="1600200"/>
+                <a16:creationId xmlns:a16="http://schemas.microsoft.com/office/drawing/2014/main" id="{A6DB5319-81EA-41CA-8AD0-AB0C2E636CAE}"/>
+              </a:ext>
+            </a:extLst>
+          </p:cNvPr>
+          <p:cNvSpPr>
+            <a:spLocks xmlns:a="http://schemas.openxmlformats.org/drawingml/2006/main" noGrp="1"/>
+          </p:cNvSpPr>
+          <p:nvPr/>
+        </p:nvSpPr>
+        <p:spPr>
+          <a:xfrm xmlns:a="http://schemas.openxmlformats.org/drawingml/2006/main">
+            <a:off x="914400" y="3028950"/>
             <a:ext cx="10134600" cy="990600"/>
           </a:xfrm>
           <a:prstGeom xmlns:a="http://schemas.openxmlformats.org/drawingml/2006/main" prst="rect">
@@ -11166,18 +11241,18 @@
           <p:cNvPr id="4" name="">
             <a:extLst xmlns:a="http://schemas.openxmlformats.org/drawingml/2006/main">
               <a:ext uri="{FF2B5EF4-FFF2-40B4-BE49-F238E27FC236}">
-                <a16:creationId xmlns:a16="http://schemas.microsoft.com/office/drawing/2014/main" id="{7ED6FE8A-1360-4F37-B181-A7273334B573}"/>
-              </a:ext>
-            </a:extLst>
-          </p:cNvPr>
-          <p:cNvSpPr>
-            <a:spLocks xmlns:a="http://schemas.openxmlformats.org/drawingml/2006/main" noGrp="1"/>
-          </p:cNvSpPr>
-          <p:nvPr/>
-        </p:nvSpPr>
-        <p:spPr>
-          <a:xfrm xmlns:a="http://schemas.openxmlformats.org/drawingml/2006/main">
-            <a:off x="914400" y="2857500"/>
+                <a16:creationId xmlns:a16="http://schemas.microsoft.com/office/drawing/2014/main" id="{DE8F0AA2-7333-4342-92DB-38B4E04FF6F2}"/>
+              </a:ext>
+            </a:extLst>
+          </p:cNvPr>
+          <p:cNvSpPr>
+            <a:spLocks xmlns:a="http://schemas.openxmlformats.org/drawingml/2006/main" noGrp="1"/>
+          </p:cNvSpPr>
+          <p:nvPr/>
+        </p:nvSpPr>
+        <p:spPr>
+          <a:xfrm xmlns:a="http://schemas.openxmlformats.org/drawingml/2006/main">
+            <a:off x="914400" y="4286250"/>
             <a:ext cx="10134600" cy="361950"/>
           </a:xfrm>
           <a:prstGeom xmlns:a="http://schemas.openxmlformats.org/drawingml/2006/main" prst="rect">
@@ -11223,7 +11298,7 @@
           <p:cNvPr id="5" name="">
             <a:extLst xmlns:a="http://schemas.openxmlformats.org/drawingml/2006/main">
               <a:ext uri="{FF2B5EF4-FFF2-40B4-BE49-F238E27FC236}">
-                <a16:creationId xmlns:a16="http://schemas.microsoft.com/office/drawing/2014/main" id="{22949AB9-4F97-4C07-AD2C-6EB6CF7BBC01}"/>
+                <a16:creationId xmlns:a16="http://schemas.microsoft.com/office/drawing/2014/main" id="{450CD46C-7943-46F1-A89B-BD61F702FFE5}"/>
               </a:ext>
             </a:extLst>
           </p:cNvPr>
@@ -11278,7 +11353,7 @@
     </p:spTree>
     <p:extLst>
       <p:ext uri="{BB962C8B-B14F-4D97-AF65-F5344CB8AC3E}">
-        <p14:creationId xmlns:p14="http://schemas.microsoft.com/office/powerpoint/2010/main" val="862651500"/>
+        <p14:creationId xmlns:p14="http://schemas.microsoft.com/office/powerpoint/2010/main" val="551720041"/>
       </p:ext>
     </p:extLst>
   </p:cSld>
@@ -11309,7 +11384,7 @@
           <p:cNvPr id="10" name="">
             <a:extLst xmlns:a="http://schemas.openxmlformats.org/drawingml/2006/main">
               <a:ext uri="{FF2B5EF4-FFF2-40B4-BE49-F238E27FC236}">
-                <a16:creationId xmlns:a16="http://schemas.microsoft.com/office/drawing/2014/main" id="{60A17FF2-C94A-4AD2-B200-8DB8EE9D8F6C}"/>
+                <a16:creationId xmlns:a16="http://schemas.microsoft.com/office/drawing/2014/main" id="{B109956C-9FBC-4964-897A-FBF3FBC1D916}"/>
               </a:ext>
             </a:extLst>
           </p:cNvPr>
@@ -11366,7 +11441,7 @@
           <p:cNvPr id="2" name="title-rule">
             <a:extLst xmlns:a="http://schemas.openxmlformats.org/drawingml/2006/main">
               <a:ext uri="{FF2B5EF4-FFF2-40B4-BE49-F238E27FC236}">
-                <a16:creationId xmlns:a16="http://schemas.microsoft.com/office/drawing/2014/main" id="{B7D8B04F-2677-45CF-AD08-577C6F769EF8}"/>
+                <a16:creationId xmlns:a16="http://schemas.microsoft.com/office/drawing/2014/main" id="{CAC8F1DA-BE54-46B7-886A-3A70F0C451A4}"/>
               </a:ext>
             </a:extLst>
           </p:cNvPr>
@@ -11396,7 +11471,7 @@
           <p:cNvPr id="3" name="">
             <a:extLst xmlns:a="http://schemas.openxmlformats.org/drawingml/2006/main">
               <a:ext uri="{FF2B5EF4-FFF2-40B4-BE49-F238E27FC236}">
-                <a16:creationId xmlns:a16="http://schemas.microsoft.com/office/drawing/2014/main" id="{AEFAC517-E496-4ECC-9D28-FC61BD13EFA6}"/>
+                <a16:creationId xmlns:a16="http://schemas.microsoft.com/office/drawing/2014/main" id="{D8BA2C77-D853-45B5-992D-D0AF4525A0C3}"/>
               </a:ext>
             </a:extLst>
           </p:cNvPr>
@@ -11453,7 +11528,7 @@
           <p:cNvPr id="4" name="">
             <a:extLst xmlns:a="http://schemas.openxmlformats.org/drawingml/2006/main">
               <a:ext uri="{FF2B5EF4-FFF2-40B4-BE49-F238E27FC236}">
-                <a16:creationId xmlns:a16="http://schemas.microsoft.com/office/drawing/2014/main" id="{DD06D04D-9375-4261-8304-4830A439A756}"/>
+                <a16:creationId xmlns:a16="http://schemas.microsoft.com/office/drawing/2014/main" id="{C84AD8C0-57A3-4341-A9F4-550150D33A9F}"/>
               </a:ext>
             </a:extLst>
           </p:cNvPr>
@@ -11510,7 +11585,7 @@
           <p:cNvPr id="5" name="">
             <a:extLst xmlns:a="http://schemas.openxmlformats.org/drawingml/2006/main">
               <a:ext uri="{FF2B5EF4-FFF2-40B4-BE49-F238E27FC236}">
-                <a16:creationId xmlns:a16="http://schemas.microsoft.com/office/drawing/2014/main" id="{79331262-BB3E-4BC5-BC6F-FB9F0DBEE9F3}"/>
+                <a16:creationId xmlns:a16="http://schemas.microsoft.com/office/drawing/2014/main" id="{A63CFBD1-0002-4D22-A9EC-047674FFA8C5}"/>
               </a:ext>
             </a:extLst>
           </p:cNvPr>
@@ -11567,7 +11642,7 @@
           <p:cNvPr id="6" name="">
             <a:extLst xmlns:a="http://schemas.openxmlformats.org/drawingml/2006/main">
               <a:ext uri="{FF2B5EF4-FFF2-40B4-BE49-F238E27FC236}">
-                <a16:creationId xmlns:a16="http://schemas.microsoft.com/office/drawing/2014/main" id="{AFB0CFF2-FD74-449E-AFE5-71D58A0A0670}"/>
+                <a16:creationId xmlns:a16="http://schemas.microsoft.com/office/drawing/2014/main" id="{69ADA05A-F0A1-41C4-BC7F-4038BD6919BC}"/>
               </a:ext>
             </a:extLst>
           </p:cNvPr>
@@ -11624,7 +11699,7 @@
           <p:cNvPr id="7" name="">
             <a:extLst xmlns:a="http://schemas.openxmlformats.org/drawingml/2006/main">
               <a:ext uri="{FF2B5EF4-FFF2-40B4-BE49-F238E27FC236}">
-                <a16:creationId xmlns:a16="http://schemas.microsoft.com/office/drawing/2014/main" id="{D3E8517F-FB9E-4DBD-9B7E-FC4CCD48280A}"/>
+                <a16:creationId xmlns:a16="http://schemas.microsoft.com/office/drawing/2014/main" id="{3F897E0F-E36D-4861-BDD2-C9DF8F3B256E}"/>
               </a:ext>
             </a:extLst>
           </p:cNvPr>
@@ -11681,7 +11756,7 @@
           <p:cNvPr id="8" name="">
             <a:extLst xmlns:a="http://schemas.openxmlformats.org/drawingml/2006/main">
               <a:ext uri="{FF2B5EF4-FFF2-40B4-BE49-F238E27FC236}">
-                <a16:creationId xmlns:a16="http://schemas.microsoft.com/office/drawing/2014/main" id="{263A5AA5-D976-4C15-A8FB-3E64AFA9E930}"/>
+                <a16:creationId xmlns:a16="http://schemas.microsoft.com/office/drawing/2014/main" id="{52405758-A035-4DBE-A70D-67BED2E69C0D}"/>
               </a:ext>
             </a:extLst>
           </p:cNvPr>
@@ -11738,7 +11813,7 @@
           <p:cNvPr id="9" name="">
             <a:extLst xmlns:a="http://schemas.openxmlformats.org/drawingml/2006/main">
               <a:ext uri="{FF2B5EF4-FFF2-40B4-BE49-F238E27FC236}">
-                <a16:creationId xmlns:a16="http://schemas.microsoft.com/office/drawing/2014/main" id="{54295A75-5C5E-4A46-9759-F9FEE3592197}"/>
+                <a16:creationId xmlns:a16="http://schemas.microsoft.com/office/drawing/2014/main" id="{82E00A09-3318-41E3-9BD4-8799C620FA66}"/>
               </a:ext>
             </a:extLst>
           </p:cNvPr>
@@ -11793,7 +11868,7 @@
     </p:spTree>
     <p:extLst>
       <p:ext uri="{BB962C8B-B14F-4D97-AF65-F5344CB8AC3E}">
-        <p14:creationId xmlns:p14="http://schemas.microsoft.com/office/powerpoint/2010/main" val="1827576105"/>
+        <p14:creationId xmlns:p14="http://schemas.microsoft.com/office/powerpoint/2010/main" val="1650783577"/>
       </p:ext>
     </p:extLst>
   </p:cSld>
@@ -11824,7 +11899,7 @@
           <p:cNvPr id="10" name="">
             <a:extLst xmlns:a="http://schemas.openxmlformats.org/drawingml/2006/main">
               <a:ext uri="{FF2B5EF4-FFF2-40B4-BE49-F238E27FC236}">
-                <a16:creationId xmlns:a16="http://schemas.microsoft.com/office/drawing/2014/main" id="{E002AEEA-C9B4-4EF2-88AA-36EFEDDF9F51}"/>
+                <a16:creationId xmlns:a16="http://schemas.microsoft.com/office/drawing/2014/main" id="{D1F737BE-C5CA-491E-8A76-30AF05D9609E}"/>
               </a:ext>
             </a:extLst>
           </p:cNvPr>
@@ -11881,7 +11956,7 @@
           <p:cNvPr id="2" name="title-rule">
             <a:extLst xmlns:a="http://schemas.openxmlformats.org/drawingml/2006/main">
               <a:ext uri="{FF2B5EF4-FFF2-40B4-BE49-F238E27FC236}">
-                <a16:creationId xmlns:a16="http://schemas.microsoft.com/office/drawing/2014/main" id="{C6D3F1D0-3E8F-4A3B-845D-107F42445DEA}"/>
+                <a16:creationId xmlns:a16="http://schemas.microsoft.com/office/drawing/2014/main" id="{305C8C67-AAB6-4A2A-BA09-5C24DB0EBD1B}"/>
               </a:ext>
             </a:extLst>
           </p:cNvPr>
@@ -11911,7 +11986,7 @@
           <p:cNvPr id="3" name="">
             <a:extLst xmlns:a="http://schemas.openxmlformats.org/drawingml/2006/main">
               <a:ext uri="{FF2B5EF4-FFF2-40B4-BE49-F238E27FC236}">
-                <a16:creationId xmlns:a16="http://schemas.microsoft.com/office/drawing/2014/main" id="{58EB2819-C886-4D85-B9F5-9554A709BDC0}"/>
+                <a16:creationId xmlns:a16="http://schemas.microsoft.com/office/drawing/2014/main" id="{6E9AF537-FAD0-4431-820E-F14D0027E3BC}"/>
               </a:ext>
             </a:extLst>
           </p:cNvPr>
@@ -11968,7 +12043,7 @@
           <p:cNvPr id="4" name="">
             <a:extLst xmlns:a="http://schemas.openxmlformats.org/drawingml/2006/main">
               <a:ext uri="{FF2B5EF4-FFF2-40B4-BE49-F238E27FC236}">
-                <a16:creationId xmlns:a16="http://schemas.microsoft.com/office/drawing/2014/main" id="{85960FD1-0FCF-4CB6-9C6F-874502320DF4}"/>
+                <a16:creationId xmlns:a16="http://schemas.microsoft.com/office/drawing/2014/main" id="{B4B8E68D-717F-413F-94BB-EC398F760996}"/>
               </a:ext>
             </a:extLst>
           </p:cNvPr>
@@ -12025,7 +12100,7 @@
           <p:cNvPr id="5" name="">
             <a:extLst xmlns:a="http://schemas.openxmlformats.org/drawingml/2006/main">
               <a:ext uri="{FF2B5EF4-FFF2-40B4-BE49-F238E27FC236}">
-                <a16:creationId xmlns:a16="http://schemas.microsoft.com/office/drawing/2014/main" id="{A14B7288-8532-479A-8C6E-DB058461596B}"/>
+                <a16:creationId xmlns:a16="http://schemas.microsoft.com/office/drawing/2014/main" id="{F83F2E6A-B465-4B96-929D-D4D7E10193A1}"/>
               </a:ext>
             </a:extLst>
           </p:cNvPr>
@@ -12082,7 +12157,7 @@
           <p:cNvPr id="6" name="">
             <a:extLst xmlns:a="http://schemas.openxmlformats.org/drawingml/2006/main">
               <a:ext uri="{FF2B5EF4-FFF2-40B4-BE49-F238E27FC236}">
-                <a16:creationId xmlns:a16="http://schemas.microsoft.com/office/drawing/2014/main" id="{726AE314-73AD-4631-BDEB-0D129AB4E23E}"/>
+                <a16:creationId xmlns:a16="http://schemas.microsoft.com/office/drawing/2014/main" id="{24DEEEA7-9D53-48D5-8C0C-68C2FCA029D3}"/>
               </a:ext>
             </a:extLst>
           </p:cNvPr>
@@ -12139,7 +12214,7 @@
           <p:cNvPr id="7" name="">
             <a:extLst xmlns:a="http://schemas.openxmlformats.org/drawingml/2006/main">
               <a:ext uri="{FF2B5EF4-FFF2-40B4-BE49-F238E27FC236}">
-                <a16:creationId xmlns:a16="http://schemas.microsoft.com/office/drawing/2014/main" id="{6636BF2E-3D38-4E69-BD6D-BA9AEECA6A8F}"/>
+                <a16:creationId xmlns:a16="http://schemas.microsoft.com/office/drawing/2014/main" id="{A461E8E0-B215-4EA5-8B70-7C3260A5A148}"/>
               </a:ext>
             </a:extLst>
           </p:cNvPr>
@@ -12196,7 +12271,7 @@
           <p:cNvPr id="8" name="">
             <a:extLst xmlns:a="http://schemas.openxmlformats.org/drawingml/2006/main">
               <a:ext uri="{FF2B5EF4-FFF2-40B4-BE49-F238E27FC236}">
-                <a16:creationId xmlns:a16="http://schemas.microsoft.com/office/drawing/2014/main" id="{3691F755-FF38-4109-AC1F-A6CD4A83547E}"/>
+                <a16:creationId xmlns:a16="http://schemas.microsoft.com/office/drawing/2014/main" id="{DB766FAC-1087-4F7E-B60F-715B3CE9DEC7}"/>
               </a:ext>
             </a:extLst>
           </p:cNvPr>
@@ -12253,7 +12328,7 @@
           <p:cNvPr id="9" name="">
             <a:extLst xmlns:a="http://schemas.openxmlformats.org/drawingml/2006/main">
               <a:ext uri="{FF2B5EF4-FFF2-40B4-BE49-F238E27FC236}">
-                <a16:creationId xmlns:a16="http://schemas.microsoft.com/office/drawing/2014/main" id="{29215CC7-8FDE-4504-9D07-76B47CFBF888}"/>
+                <a16:creationId xmlns:a16="http://schemas.microsoft.com/office/drawing/2014/main" id="{EDCA4C5F-0A51-4BDE-BA2B-0842EB19A13E}"/>
               </a:ext>
             </a:extLst>
           </p:cNvPr>
@@ -12308,7 +12383,7 @@
     </p:spTree>
     <p:extLst>
       <p:ext uri="{BB962C8B-B14F-4D97-AF65-F5344CB8AC3E}">
-        <p14:creationId xmlns:p14="http://schemas.microsoft.com/office/powerpoint/2010/main" val="20788925"/>
+        <p14:creationId xmlns:p14="http://schemas.microsoft.com/office/powerpoint/2010/main" val="617097164"/>
       </p:ext>
     </p:extLst>
   </p:cSld>
@@ -12339,7 +12414,7 @@
           <p:cNvPr id="10" name="">
             <a:extLst xmlns:a="http://schemas.openxmlformats.org/drawingml/2006/main">
               <a:ext uri="{FF2B5EF4-FFF2-40B4-BE49-F238E27FC236}">
-                <a16:creationId xmlns:a16="http://schemas.microsoft.com/office/drawing/2014/main" id="{48D65321-F688-4BF3-9E66-8EF86AF5BF6E}"/>
+                <a16:creationId xmlns:a16="http://schemas.microsoft.com/office/drawing/2014/main" id="{C041D12E-93BD-4AB4-A276-88454A718BC1}"/>
               </a:ext>
             </a:extLst>
           </p:cNvPr>
@@ -12396,7 +12471,7 @@
           <p:cNvPr id="2" name="title-rule">
             <a:extLst xmlns:a="http://schemas.openxmlformats.org/drawingml/2006/main">
               <a:ext uri="{FF2B5EF4-FFF2-40B4-BE49-F238E27FC236}">
-                <a16:creationId xmlns:a16="http://schemas.microsoft.com/office/drawing/2014/main" id="{A9A6C3B5-C2D7-42F3-A230-608A6962FD59}"/>
+                <a16:creationId xmlns:a16="http://schemas.microsoft.com/office/drawing/2014/main" id="{AD69D28D-16F5-4DBA-970E-0727A5074BED}"/>
               </a:ext>
             </a:extLst>
           </p:cNvPr>
@@ -12426,7 +12501,7 @@
           <p:cNvPr id="3" name="">
             <a:extLst xmlns:a="http://schemas.openxmlformats.org/drawingml/2006/main">
               <a:ext uri="{FF2B5EF4-FFF2-40B4-BE49-F238E27FC236}">
-                <a16:creationId xmlns:a16="http://schemas.microsoft.com/office/drawing/2014/main" id="{328D4A9B-923A-49FA-AC4B-90805377A12F}"/>
+                <a16:creationId xmlns:a16="http://schemas.microsoft.com/office/drawing/2014/main" id="{ACD5DAF1-BA3B-4A09-8BDD-5E571435BE75}"/>
               </a:ext>
             </a:extLst>
           </p:cNvPr>
@@ -12483,7 +12558,7 @@
           <p:cNvPr id="4" name="">
             <a:extLst xmlns:a="http://schemas.openxmlformats.org/drawingml/2006/main">
               <a:ext uri="{FF2B5EF4-FFF2-40B4-BE49-F238E27FC236}">
-                <a16:creationId xmlns:a16="http://schemas.microsoft.com/office/drawing/2014/main" id="{18A53C7A-D0FE-4B0A-A6B4-91282FCB569A}"/>
+                <a16:creationId xmlns:a16="http://schemas.microsoft.com/office/drawing/2014/main" id="{34C6F322-879D-45AF-9EAD-33F08969571F}"/>
               </a:ext>
             </a:extLst>
           </p:cNvPr>
@@ -12540,7 +12615,7 @@
           <p:cNvPr id="5" name="">
             <a:extLst xmlns:a="http://schemas.openxmlformats.org/drawingml/2006/main">
               <a:ext uri="{FF2B5EF4-FFF2-40B4-BE49-F238E27FC236}">
-                <a16:creationId xmlns:a16="http://schemas.microsoft.com/office/drawing/2014/main" id="{09FC1073-9451-4475-9E04-49D3CA755B6E}"/>
+                <a16:creationId xmlns:a16="http://schemas.microsoft.com/office/drawing/2014/main" id="{016B14D5-D592-4A58-9550-7A1602D68E26}"/>
               </a:ext>
             </a:extLst>
           </p:cNvPr>
@@ -12597,7 +12672,7 @@
           <p:cNvPr id="6" name="">
             <a:extLst xmlns:a="http://schemas.openxmlformats.org/drawingml/2006/main">
               <a:ext uri="{FF2B5EF4-FFF2-40B4-BE49-F238E27FC236}">
-                <a16:creationId xmlns:a16="http://schemas.microsoft.com/office/drawing/2014/main" id="{F04DA769-6A0C-40A5-950D-E11AF09AE324}"/>
+                <a16:creationId xmlns:a16="http://schemas.microsoft.com/office/drawing/2014/main" id="{835F7DD0-92E1-4069-A170-BB5A80EBC157}"/>
               </a:ext>
             </a:extLst>
           </p:cNvPr>
@@ -12654,7 +12729,7 @@
           <p:cNvPr id="7" name="">
             <a:extLst xmlns:a="http://schemas.openxmlformats.org/drawingml/2006/main">
               <a:ext uri="{FF2B5EF4-FFF2-40B4-BE49-F238E27FC236}">
-                <a16:creationId xmlns:a16="http://schemas.microsoft.com/office/drawing/2014/main" id="{9D9B1026-391E-48CE-8F5F-2564C29A1BA2}"/>
+                <a16:creationId xmlns:a16="http://schemas.microsoft.com/office/drawing/2014/main" id="{2E0582AA-89EF-4D46-A387-6829FCC551B3}"/>
               </a:ext>
             </a:extLst>
           </p:cNvPr>
@@ -12711,7 +12786,7 @@
           <p:cNvPr id="8" name="">
             <a:extLst xmlns:a="http://schemas.openxmlformats.org/drawingml/2006/main">
               <a:ext uri="{FF2B5EF4-FFF2-40B4-BE49-F238E27FC236}">
-                <a16:creationId xmlns:a16="http://schemas.microsoft.com/office/drawing/2014/main" id="{1CBD9F21-95FA-4AC0-B64E-897F8CFBC4F8}"/>
+                <a16:creationId xmlns:a16="http://schemas.microsoft.com/office/drawing/2014/main" id="{39676366-0D50-45A5-AC1C-A4CF2AB836A6}"/>
               </a:ext>
             </a:extLst>
           </p:cNvPr>
@@ -12768,7 +12843,7 @@
           <p:cNvPr id="9" name="">
             <a:extLst xmlns:a="http://schemas.openxmlformats.org/drawingml/2006/main">
               <a:ext uri="{FF2B5EF4-FFF2-40B4-BE49-F238E27FC236}">
-                <a16:creationId xmlns:a16="http://schemas.microsoft.com/office/drawing/2014/main" id="{29ECFDF0-7244-4444-A527-A6B6F07A9505}"/>
+                <a16:creationId xmlns:a16="http://schemas.microsoft.com/office/drawing/2014/main" id="{B8D8F2A9-DE43-43D6-B8C7-E2741E7A8BBD}"/>
               </a:ext>
             </a:extLst>
           </p:cNvPr>
@@ -12823,7 +12898,7 @@
     </p:spTree>
     <p:extLst>
       <p:ext uri="{BB962C8B-B14F-4D97-AF65-F5344CB8AC3E}">
-        <p14:creationId xmlns:p14="http://schemas.microsoft.com/office/powerpoint/2010/main" val="310398718"/>
+        <p14:creationId xmlns:p14="http://schemas.microsoft.com/office/powerpoint/2010/main" val="1360318254"/>
       </p:ext>
     </p:extLst>
   </p:cSld>
@@ -12854,7 +12929,7 @@
           <p:cNvPr id="6" name="">
             <a:extLst xmlns:a="http://schemas.openxmlformats.org/drawingml/2006/main">
               <a:ext uri="{FF2B5EF4-FFF2-40B4-BE49-F238E27FC236}">
-                <a16:creationId xmlns:a16="http://schemas.microsoft.com/office/drawing/2014/main" id="{E364AF66-6FDF-48A1-9311-379CB253F4DE}"/>
+                <a16:creationId xmlns:a16="http://schemas.microsoft.com/office/drawing/2014/main" id="{D1BACFFA-2927-4FED-B478-CC063FD69625}"/>
               </a:ext>
             </a:extLst>
           </p:cNvPr>
@@ -12911,7 +12986,7 @@
           <p:cNvPr id="2" name="title-rule">
             <a:extLst xmlns:a="http://schemas.openxmlformats.org/drawingml/2006/main">
               <a:ext uri="{FF2B5EF4-FFF2-40B4-BE49-F238E27FC236}">
-                <a16:creationId xmlns:a16="http://schemas.microsoft.com/office/drawing/2014/main" id="{DE03C820-045C-493C-AFFA-2FA54A85F7AB}"/>
+                <a16:creationId xmlns:a16="http://schemas.microsoft.com/office/drawing/2014/main" id="{1A14079E-C52C-4C86-9954-747C0AA2FE6D}"/>
               </a:ext>
             </a:extLst>
           </p:cNvPr>
@@ -12941,18 +13016,18 @@
           <p:cNvPr id="3" name="">
             <a:extLst xmlns:a="http://schemas.openxmlformats.org/drawingml/2006/main">
               <a:ext uri="{FF2B5EF4-FFF2-40B4-BE49-F238E27FC236}">
-                <a16:creationId xmlns:a16="http://schemas.microsoft.com/office/drawing/2014/main" id="{A7611C2E-C5CA-4F12-859C-DE3A43FC4336}"/>
-              </a:ext>
-            </a:extLst>
-          </p:cNvPr>
-          <p:cNvSpPr>
-            <a:spLocks xmlns:a="http://schemas.openxmlformats.org/drawingml/2006/main" noGrp="1"/>
-          </p:cNvSpPr>
-          <p:nvPr/>
-        </p:nvSpPr>
-        <p:spPr>
-          <a:xfrm xmlns:a="http://schemas.openxmlformats.org/drawingml/2006/main">
-            <a:off x="914400" y="1600200"/>
+                <a16:creationId xmlns:a16="http://schemas.microsoft.com/office/drawing/2014/main" id="{35C9FDCF-7900-46A4-86A3-32836443912A}"/>
+              </a:ext>
+            </a:extLst>
+          </p:cNvPr>
+          <p:cNvSpPr>
+            <a:spLocks xmlns:a="http://schemas.openxmlformats.org/drawingml/2006/main" noGrp="1"/>
+          </p:cNvSpPr>
+          <p:nvPr/>
+        </p:nvSpPr>
+        <p:spPr>
+          <a:xfrm xmlns:a="http://schemas.openxmlformats.org/drawingml/2006/main">
+            <a:off x="914400" y="3052763"/>
             <a:ext cx="10134600" cy="381000"/>
           </a:xfrm>
           <a:prstGeom xmlns:a="http://schemas.openxmlformats.org/drawingml/2006/main" prst="rect">
@@ -12998,18 +13073,18 @@
           <p:cNvPr id="4" name="">
             <a:extLst xmlns:a="http://schemas.openxmlformats.org/drawingml/2006/main">
               <a:ext uri="{FF2B5EF4-FFF2-40B4-BE49-F238E27FC236}">
-                <a16:creationId xmlns:a16="http://schemas.microsoft.com/office/drawing/2014/main" id="{E39097F6-4676-4847-879E-01A4F01E17FB}"/>
-              </a:ext>
-            </a:extLst>
-          </p:cNvPr>
-          <p:cNvSpPr>
-            <a:spLocks xmlns:a="http://schemas.openxmlformats.org/drawingml/2006/main" noGrp="1"/>
-          </p:cNvSpPr>
-          <p:nvPr/>
-        </p:nvSpPr>
-        <p:spPr>
-          <a:xfrm xmlns:a="http://schemas.openxmlformats.org/drawingml/2006/main">
-            <a:off x="914400" y="2247900"/>
+                <a16:creationId xmlns:a16="http://schemas.microsoft.com/office/drawing/2014/main" id="{4002EA3F-716D-4E3F-8124-41A0DCD26400}"/>
+              </a:ext>
+            </a:extLst>
+          </p:cNvPr>
+          <p:cNvSpPr>
+            <a:spLocks xmlns:a="http://schemas.openxmlformats.org/drawingml/2006/main" noGrp="1"/>
+          </p:cNvSpPr>
+          <p:nvPr/>
+        </p:nvSpPr>
+        <p:spPr>
+          <a:xfrm xmlns:a="http://schemas.openxmlformats.org/drawingml/2006/main">
+            <a:off x="914400" y="3700463"/>
             <a:ext cx="10134600" cy="923925"/>
           </a:xfrm>
           <a:prstGeom xmlns:a="http://schemas.openxmlformats.org/drawingml/2006/main" prst="rect">
@@ -13055,7 +13130,7 @@
           <p:cNvPr id="5" name="">
             <a:extLst xmlns:a="http://schemas.openxmlformats.org/drawingml/2006/main">
               <a:ext uri="{FF2B5EF4-FFF2-40B4-BE49-F238E27FC236}">
-                <a16:creationId xmlns:a16="http://schemas.microsoft.com/office/drawing/2014/main" id="{2BA258E3-C56E-42EA-A342-B2C2C220B1BB}"/>
+                <a16:creationId xmlns:a16="http://schemas.microsoft.com/office/drawing/2014/main" id="{41E7801F-7378-467F-93A9-2DFDF7A20FA5}"/>
               </a:ext>
             </a:extLst>
           </p:cNvPr>
@@ -13110,7 +13185,7 @@
     </p:spTree>
     <p:extLst>
       <p:ext uri="{BB962C8B-B14F-4D97-AF65-F5344CB8AC3E}">
-        <p14:creationId xmlns:p14="http://schemas.microsoft.com/office/powerpoint/2010/main" val="1486196117"/>
+        <p14:creationId xmlns:p14="http://schemas.microsoft.com/office/powerpoint/2010/main" val="319378637"/>
       </p:ext>
     </p:extLst>
   </p:cSld>
@@ -13141,7 +13216,7 @@
           <p:cNvPr id="36" name="">
             <a:extLst xmlns:a="http://schemas.openxmlformats.org/drawingml/2006/main">
               <a:ext uri="{FF2B5EF4-FFF2-40B4-BE49-F238E27FC236}">
-                <a16:creationId xmlns:a16="http://schemas.microsoft.com/office/drawing/2014/main" id="{1225525F-D153-46E3-BA38-FDB35C2E90E6}"/>
+                <a16:creationId xmlns:a16="http://schemas.microsoft.com/office/drawing/2014/main" id="{A491171C-23B8-4F27-BD46-954EDD7565FE}"/>
               </a:ext>
             </a:extLst>
           </p:cNvPr>
@@ -13198,7 +13273,7 @@
           <p:cNvPr id="2" name="">
             <a:extLst xmlns:a="http://schemas.openxmlformats.org/drawingml/2006/main">
               <a:ext uri="{FF2B5EF4-FFF2-40B4-BE49-F238E27FC236}">
-                <a16:creationId xmlns:a16="http://schemas.microsoft.com/office/drawing/2014/main" id="{993CFBB4-E714-497A-B13B-656D49FFF6DF}"/>
+                <a16:creationId xmlns:a16="http://schemas.microsoft.com/office/drawing/2014/main" id="{EA1944BA-C88C-401F-8CC5-22FFC40CA611}"/>
               </a:ext>
             </a:extLst>
           </p:cNvPr>
@@ -13255,7 +13330,7 @@
           <p:cNvPr id="3" name="title-rule">
             <a:extLst xmlns:a="http://schemas.openxmlformats.org/drawingml/2006/main">
               <a:ext uri="{FF2B5EF4-FFF2-40B4-BE49-F238E27FC236}">
-                <a16:creationId xmlns:a16="http://schemas.microsoft.com/office/drawing/2014/main" id="{0FC44612-F6E0-49A0-B629-A907332CD57F}"/>
+                <a16:creationId xmlns:a16="http://schemas.microsoft.com/office/drawing/2014/main" id="{E82CB284-6C42-4063-87A4-C4B7618549F8}"/>
               </a:ext>
             </a:extLst>
           </p:cNvPr>
@@ -13292,7 +13367,7 @@
         </p:xfrm>
         <a:graphic xmlns:a="http://schemas.openxmlformats.org/drawingml/2006/main">
           <a:graphicData uri="http://schemas.openxmlformats.org/drawingml/2006/chart">
-            <c:chart xmlns:r="http://schemas.openxmlformats.org/officeDocument/2006/relationships" xmlns:c="http://schemas.openxmlformats.org/drawingml/2006/chart" r:id="R13b779d65b2f4ceb"/>
+            <c:chart xmlns:r="http://schemas.openxmlformats.org/officeDocument/2006/relationships" xmlns:c="http://schemas.openxmlformats.org/drawingml/2006/chart" r:id="R5b91f2e4fd12408a"/>
           </a:graphicData>
         </a:graphic>
       </p:graphicFrame>
@@ -13301,7 +13376,7 @@
           <p:cNvPr id="5" name="">
             <a:extLst xmlns:a="http://schemas.openxmlformats.org/drawingml/2006/main">
               <a:ext uri="{FF2B5EF4-FFF2-40B4-BE49-F238E27FC236}">
-                <a16:creationId xmlns:a16="http://schemas.microsoft.com/office/drawing/2014/main" id="{CBD5F3B5-E181-4D25-AA26-3446C8150EC4}"/>
+                <a16:creationId xmlns:a16="http://schemas.microsoft.com/office/drawing/2014/main" id="{077110F9-0724-4C06-8C2B-D02163A0C97B}"/>
               </a:ext>
             </a:extLst>
           </p:cNvPr>
@@ -13332,7 +13407,7 @@
           <p:cNvPr id="6" name="">
             <a:extLst xmlns:a="http://schemas.openxmlformats.org/drawingml/2006/main">
               <a:ext uri="{FF2B5EF4-FFF2-40B4-BE49-F238E27FC236}">
-                <a16:creationId xmlns:a16="http://schemas.microsoft.com/office/drawing/2014/main" id="{BBD1EF11-9383-4690-B386-C8CC407B4F8A}"/>
+                <a16:creationId xmlns:a16="http://schemas.microsoft.com/office/drawing/2014/main" id="{46D7C486-125D-4F53-A033-035543A91C98}"/>
               </a:ext>
             </a:extLst>
           </p:cNvPr>
@@ -13391,7 +13466,7 @@
           <p:cNvPr id="7" name="">
             <a:extLst xmlns:a="http://schemas.openxmlformats.org/drawingml/2006/main">
               <a:ext uri="{FF2B5EF4-FFF2-40B4-BE49-F238E27FC236}">
-                <a16:creationId xmlns:a16="http://schemas.microsoft.com/office/drawing/2014/main" id="{1F5A98A0-6B1C-47A1-BA1F-BB54B47A71F7}"/>
+                <a16:creationId xmlns:a16="http://schemas.microsoft.com/office/drawing/2014/main" id="{FA19DD86-567E-4823-BE8A-DBAFB3A6D140}"/>
               </a:ext>
             </a:extLst>
           </p:cNvPr>
@@ -13422,7 +13497,7 @@
           <p:cNvPr id="8" name="">
             <a:extLst xmlns:a="http://schemas.openxmlformats.org/drawingml/2006/main">
               <a:ext uri="{FF2B5EF4-FFF2-40B4-BE49-F238E27FC236}">
-                <a16:creationId xmlns:a16="http://schemas.microsoft.com/office/drawing/2014/main" id="{C0886ED7-E744-4B9B-8879-7D953611CF37}"/>
+                <a16:creationId xmlns:a16="http://schemas.microsoft.com/office/drawing/2014/main" id="{34955EF9-3149-4AD4-A837-E9A55FF25782}"/>
               </a:ext>
             </a:extLst>
           </p:cNvPr>
@@ -13481,7 +13556,7 @@
           <p:cNvPr id="9" name="">
             <a:extLst xmlns:a="http://schemas.openxmlformats.org/drawingml/2006/main">
               <a:ext uri="{FF2B5EF4-FFF2-40B4-BE49-F238E27FC236}">
-                <a16:creationId xmlns:a16="http://schemas.microsoft.com/office/drawing/2014/main" id="{484446E2-75EB-4CB5-9AE9-9A63844771AB}"/>
+                <a16:creationId xmlns:a16="http://schemas.microsoft.com/office/drawing/2014/main" id="{178E84A0-B3C5-4D5A-833A-60992956949F}"/>
               </a:ext>
             </a:extLst>
           </p:cNvPr>
@@ -13512,7 +13587,7 @@
           <p:cNvPr id="10" name="">
             <a:extLst xmlns:a="http://schemas.openxmlformats.org/drawingml/2006/main">
               <a:ext uri="{FF2B5EF4-FFF2-40B4-BE49-F238E27FC236}">
-                <a16:creationId xmlns:a16="http://schemas.microsoft.com/office/drawing/2014/main" id="{F6F8D78E-9A39-42A1-8491-605109DFFB57}"/>
+                <a16:creationId xmlns:a16="http://schemas.microsoft.com/office/drawing/2014/main" id="{CBE2DF7E-5048-4CBF-B2CE-65DDA8CCE0FC}"/>
               </a:ext>
             </a:extLst>
           </p:cNvPr>
@@ -13571,7 +13646,7 @@
           <p:cNvPr id="11" name="">
             <a:extLst xmlns:a="http://schemas.openxmlformats.org/drawingml/2006/main">
               <a:ext uri="{FF2B5EF4-FFF2-40B4-BE49-F238E27FC236}">
-                <a16:creationId xmlns:a16="http://schemas.microsoft.com/office/drawing/2014/main" id="{E5B8D641-31DA-43A6-8D9B-E9B6DAACE160}"/>
+                <a16:creationId xmlns:a16="http://schemas.microsoft.com/office/drawing/2014/main" id="{DF499702-60C3-4878-A697-3E86848E1654}"/>
               </a:ext>
             </a:extLst>
           </p:cNvPr>
@@ -13602,7 +13677,7 @@
           <p:cNvPr id="12" name="">
             <a:extLst xmlns:a="http://schemas.openxmlformats.org/drawingml/2006/main">
               <a:ext uri="{FF2B5EF4-FFF2-40B4-BE49-F238E27FC236}">
-                <a16:creationId xmlns:a16="http://schemas.microsoft.com/office/drawing/2014/main" id="{76E409B0-0940-4BAD-BD26-A247C48C299A}"/>
+                <a16:creationId xmlns:a16="http://schemas.microsoft.com/office/drawing/2014/main" id="{A7BFA84D-D3EC-46A5-96B6-2848693AC2B5}"/>
               </a:ext>
             </a:extLst>
           </p:cNvPr>
@@ -13661,7 +13736,7 @@
           <p:cNvPr id="13" name="">
             <a:extLst xmlns:a="http://schemas.openxmlformats.org/drawingml/2006/main">
               <a:ext uri="{FF2B5EF4-FFF2-40B4-BE49-F238E27FC236}">
-                <a16:creationId xmlns:a16="http://schemas.microsoft.com/office/drawing/2014/main" id="{9F398E80-A7A1-4DCA-B9D0-F68CED6A00BD}"/>
+                <a16:creationId xmlns:a16="http://schemas.microsoft.com/office/drawing/2014/main" id="{3273C98B-2F89-400B-B384-52FE272FDCD6}"/>
               </a:ext>
             </a:extLst>
           </p:cNvPr>
@@ -13692,7 +13767,7 @@
           <p:cNvPr id="14" name="">
             <a:extLst xmlns:a="http://schemas.openxmlformats.org/drawingml/2006/main">
               <a:ext uri="{FF2B5EF4-FFF2-40B4-BE49-F238E27FC236}">
-                <a16:creationId xmlns:a16="http://schemas.microsoft.com/office/drawing/2014/main" id="{C6146E06-F718-439C-9E42-A3081C5F0559}"/>
+                <a16:creationId xmlns:a16="http://schemas.microsoft.com/office/drawing/2014/main" id="{2B8CF77D-755F-43DD-A637-4534DD905AD9}"/>
               </a:ext>
             </a:extLst>
           </p:cNvPr>
@@ -13751,7 +13826,7 @@
           <p:cNvPr id="15" name="">
             <a:extLst xmlns:a="http://schemas.openxmlformats.org/drawingml/2006/main">
               <a:ext uri="{FF2B5EF4-FFF2-40B4-BE49-F238E27FC236}">
-                <a16:creationId xmlns:a16="http://schemas.microsoft.com/office/drawing/2014/main" id="{5A17F447-9852-4756-BB73-F7461CF194D7}"/>
+                <a16:creationId xmlns:a16="http://schemas.microsoft.com/office/drawing/2014/main" id="{E02B25DB-108A-40E1-99FA-464E10EC6296}"/>
               </a:ext>
             </a:extLst>
           </p:cNvPr>
@@ -13782,7 +13857,7 @@
           <p:cNvPr id="16" name="">
             <a:extLst xmlns:a="http://schemas.openxmlformats.org/drawingml/2006/main">
               <a:ext uri="{FF2B5EF4-FFF2-40B4-BE49-F238E27FC236}">
-                <a16:creationId xmlns:a16="http://schemas.microsoft.com/office/drawing/2014/main" id="{95FC5C79-5DAD-41C8-A513-D8C46EEA526B}"/>
+                <a16:creationId xmlns:a16="http://schemas.microsoft.com/office/drawing/2014/main" id="{4C4A7AE6-FF6C-4286-B048-418D74BA48C0}"/>
               </a:ext>
             </a:extLst>
           </p:cNvPr>
@@ -13841,7 +13916,7 @@
           <p:cNvPr id="17" name="">
             <a:extLst xmlns:a="http://schemas.openxmlformats.org/drawingml/2006/main">
               <a:ext uri="{FF2B5EF4-FFF2-40B4-BE49-F238E27FC236}">
-                <a16:creationId xmlns:a16="http://schemas.microsoft.com/office/drawing/2014/main" id="{ADF0444E-4188-4184-807B-39D45ED05122}"/>
+                <a16:creationId xmlns:a16="http://schemas.microsoft.com/office/drawing/2014/main" id="{EBFF099D-2882-4682-81D4-8025799EF6DF}"/>
               </a:ext>
             </a:extLst>
           </p:cNvPr>
@@ -13872,7 +13947,7 @@
           <p:cNvPr id="18" name="">
             <a:extLst xmlns:a="http://schemas.openxmlformats.org/drawingml/2006/main">
               <a:ext uri="{FF2B5EF4-FFF2-40B4-BE49-F238E27FC236}">
-                <a16:creationId xmlns:a16="http://schemas.microsoft.com/office/drawing/2014/main" id="{3959D1C5-87D7-477A-94A5-B0753939F3F5}"/>
+                <a16:creationId xmlns:a16="http://schemas.microsoft.com/office/drawing/2014/main" id="{FCA36446-2973-477F-A023-E29D5619B5A2}"/>
               </a:ext>
             </a:extLst>
           </p:cNvPr>
@@ -13931,7 +14006,7 @@
           <p:cNvPr id="19" name="">
             <a:extLst xmlns:a="http://schemas.openxmlformats.org/drawingml/2006/main">
               <a:ext uri="{FF2B5EF4-FFF2-40B4-BE49-F238E27FC236}">
-                <a16:creationId xmlns:a16="http://schemas.microsoft.com/office/drawing/2014/main" id="{B3120BEF-22D8-452C-BA68-14A1900147E5}"/>
+                <a16:creationId xmlns:a16="http://schemas.microsoft.com/office/drawing/2014/main" id="{61157E7A-0849-4D0B-8B2B-AF007EE2CCE8}"/>
               </a:ext>
             </a:extLst>
           </p:cNvPr>
@@ -13962,7 +14037,7 @@
           <p:cNvPr id="20" name="">
             <a:extLst xmlns:a="http://schemas.openxmlformats.org/drawingml/2006/main">
               <a:ext uri="{FF2B5EF4-FFF2-40B4-BE49-F238E27FC236}">
-                <a16:creationId xmlns:a16="http://schemas.microsoft.com/office/drawing/2014/main" id="{DF20E41C-48E0-41FB-8880-244D7D9E192D}"/>
+                <a16:creationId xmlns:a16="http://schemas.microsoft.com/office/drawing/2014/main" id="{E48E39AD-B521-44C8-88EB-2BD1021D62ED}"/>
               </a:ext>
             </a:extLst>
           </p:cNvPr>
@@ -14021,7 +14096,7 @@
           <p:cNvPr id="21" name="">
             <a:extLst xmlns:a="http://schemas.openxmlformats.org/drawingml/2006/main">
               <a:ext uri="{FF2B5EF4-FFF2-40B4-BE49-F238E27FC236}">
-                <a16:creationId xmlns:a16="http://schemas.microsoft.com/office/drawing/2014/main" id="{3E5BD6EC-5952-4EDB-A830-072CC196B941}"/>
+                <a16:creationId xmlns:a16="http://schemas.microsoft.com/office/drawing/2014/main" id="{564BD31E-9193-451F-9AA9-0322F1E9A60F}"/>
               </a:ext>
             </a:extLst>
           </p:cNvPr>
@@ -14052,7 +14127,7 @@
           <p:cNvPr id="22" name="">
             <a:extLst xmlns:a="http://schemas.openxmlformats.org/drawingml/2006/main">
               <a:ext uri="{FF2B5EF4-FFF2-40B4-BE49-F238E27FC236}">
-                <a16:creationId xmlns:a16="http://schemas.microsoft.com/office/drawing/2014/main" id="{F1AFDC2B-9E36-47ED-94A4-BF362C59E69E}"/>
+                <a16:creationId xmlns:a16="http://schemas.microsoft.com/office/drawing/2014/main" id="{E49F18B0-A97E-43ED-AF33-B216CED35056}"/>
               </a:ext>
             </a:extLst>
           </p:cNvPr>
@@ -14111,7 +14186,7 @@
           <p:cNvPr id="23" name="">
             <a:extLst xmlns:a="http://schemas.openxmlformats.org/drawingml/2006/main">
               <a:ext uri="{FF2B5EF4-FFF2-40B4-BE49-F238E27FC236}">
-                <a16:creationId xmlns:a16="http://schemas.microsoft.com/office/drawing/2014/main" id="{742D2B3F-D129-44CB-8BD2-80EEA95C7D55}"/>
+                <a16:creationId xmlns:a16="http://schemas.microsoft.com/office/drawing/2014/main" id="{BEE53CD9-1BEE-4C1F-8008-8C4629C8DED0}"/>
               </a:ext>
             </a:extLst>
           </p:cNvPr>
@@ -14142,7 +14217,7 @@
           <p:cNvPr id="24" name="">
             <a:extLst xmlns:a="http://schemas.openxmlformats.org/drawingml/2006/main">
               <a:ext uri="{FF2B5EF4-FFF2-40B4-BE49-F238E27FC236}">
-                <a16:creationId xmlns:a16="http://schemas.microsoft.com/office/drawing/2014/main" id="{33D49953-267A-475A-A2EA-834BBF093DA9}"/>
+                <a16:creationId xmlns:a16="http://schemas.microsoft.com/office/drawing/2014/main" id="{B861B555-5B1F-4FE4-8F17-E548633CA6F7}"/>
               </a:ext>
             </a:extLst>
           </p:cNvPr>
@@ -14201,7 +14276,7 @@
           <p:cNvPr id="25" name="">
             <a:extLst xmlns:a="http://schemas.openxmlformats.org/drawingml/2006/main">
               <a:ext uri="{FF2B5EF4-FFF2-40B4-BE49-F238E27FC236}">
-                <a16:creationId xmlns:a16="http://schemas.microsoft.com/office/drawing/2014/main" id="{23699928-4E3D-492E-93FF-75A8D36C84DC}"/>
+                <a16:creationId xmlns:a16="http://schemas.microsoft.com/office/drawing/2014/main" id="{C1EF42D9-CF2C-41FD-B613-B8621A404B54}"/>
               </a:ext>
             </a:extLst>
           </p:cNvPr>
@@ -14232,7 +14307,7 @@
           <p:cNvPr id="26" name="">
             <a:extLst xmlns:a="http://schemas.openxmlformats.org/drawingml/2006/main">
               <a:ext uri="{FF2B5EF4-FFF2-40B4-BE49-F238E27FC236}">
-                <a16:creationId xmlns:a16="http://schemas.microsoft.com/office/drawing/2014/main" id="{41304676-FE58-40EF-9B27-F782DFCFD778}"/>
+                <a16:creationId xmlns:a16="http://schemas.microsoft.com/office/drawing/2014/main" id="{403D0F78-63C7-49F6-B85F-9E60DE06DA34}"/>
               </a:ext>
             </a:extLst>
           </p:cNvPr>
@@ -14291,7 +14366,7 @@
           <p:cNvPr id="27" name="">
             <a:extLst xmlns:a="http://schemas.openxmlformats.org/drawingml/2006/main">
               <a:ext uri="{FF2B5EF4-FFF2-40B4-BE49-F238E27FC236}">
-                <a16:creationId xmlns:a16="http://schemas.microsoft.com/office/drawing/2014/main" id="{55FBD734-5030-47B1-B701-F53E2196BE29}"/>
+                <a16:creationId xmlns:a16="http://schemas.microsoft.com/office/drawing/2014/main" id="{6CCA666C-7EDE-47EC-A39C-1CC410771D25}"/>
               </a:ext>
             </a:extLst>
           </p:cNvPr>
@@ -14322,7 +14397,7 @@
           <p:cNvPr id="28" name="">
             <a:extLst xmlns:a="http://schemas.openxmlformats.org/drawingml/2006/main">
               <a:ext uri="{FF2B5EF4-FFF2-40B4-BE49-F238E27FC236}">
-                <a16:creationId xmlns:a16="http://schemas.microsoft.com/office/drawing/2014/main" id="{C800055A-0B61-49A7-B502-50B97C24C0FC}"/>
+                <a16:creationId xmlns:a16="http://schemas.microsoft.com/office/drawing/2014/main" id="{2C42D6C6-A835-486E-AC29-CC25F3AA52FD}"/>
               </a:ext>
             </a:extLst>
           </p:cNvPr>
@@ -14381,7 +14456,7 @@
           <p:cNvPr id="29" name="">
             <a:extLst xmlns:a="http://schemas.openxmlformats.org/drawingml/2006/main">
               <a:ext uri="{FF2B5EF4-FFF2-40B4-BE49-F238E27FC236}">
-                <a16:creationId xmlns:a16="http://schemas.microsoft.com/office/drawing/2014/main" id="{420107D8-895E-462F-8E13-69015BC1D705}"/>
+                <a16:creationId xmlns:a16="http://schemas.microsoft.com/office/drawing/2014/main" id="{E0DEF70B-5EEB-481E-9F83-22D0C0D23DE6}"/>
               </a:ext>
             </a:extLst>
           </p:cNvPr>
@@ -14412,7 +14487,7 @@
           <p:cNvPr id="30" name="">
             <a:extLst xmlns:a="http://schemas.openxmlformats.org/drawingml/2006/main">
               <a:ext uri="{FF2B5EF4-FFF2-40B4-BE49-F238E27FC236}">
-                <a16:creationId xmlns:a16="http://schemas.microsoft.com/office/drawing/2014/main" id="{45664B7D-B3D2-46AA-908F-9A87DAC6C74A}"/>
+                <a16:creationId xmlns:a16="http://schemas.microsoft.com/office/drawing/2014/main" id="{1519817F-0333-4CFD-ACF3-BA47D18A93A4}"/>
               </a:ext>
             </a:extLst>
           </p:cNvPr>
@@ -14471,7 +14546,7 @@
           <p:cNvPr id="31" name="">
             <a:extLst xmlns:a="http://schemas.openxmlformats.org/drawingml/2006/main">
               <a:ext uri="{FF2B5EF4-FFF2-40B4-BE49-F238E27FC236}">
-                <a16:creationId xmlns:a16="http://schemas.microsoft.com/office/drawing/2014/main" id="{4255CEA0-719F-4ACF-92CA-8634672E0668}"/>
+                <a16:creationId xmlns:a16="http://schemas.microsoft.com/office/drawing/2014/main" id="{A903B75C-E161-4555-9278-F492C46BB2FB}"/>
               </a:ext>
             </a:extLst>
           </p:cNvPr>
@@ -14502,7 +14577,7 @@
           <p:cNvPr id="32" name="">
             <a:extLst xmlns:a="http://schemas.openxmlformats.org/drawingml/2006/main">
               <a:ext uri="{FF2B5EF4-FFF2-40B4-BE49-F238E27FC236}">
-                <a16:creationId xmlns:a16="http://schemas.microsoft.com/office/drawing/2014/main" id="{1D8BA21C-9396-41B6-86A3-D3BA9F69F322}"/>
+                <a16:creationId xmlns:a16="http://schemas.microsoft.com/office/drawing/2014/main" id="{03984CB6-D63F-47EE-AA6B-B5E60FF973E5}"/>
               </a:ext>
             </a:extLst>
           </p:cNvPr>
@@ -14561,7 +14636,7 @@
           <p:cNvPr id="33" name="">
             <a:extLst xmlns:a="http://schemas.openxmlformats.org/drawingml/2006/main">
               <a:ext uri="{FF2B5EF4-FFF2-40B4-BE49-F238E27FC236}">
-                <a16:creationId xmlns:a16="http://schemas.microsoft.com/office/drawing/2014/main" id="{9C8F6D69-2943-4A71-843D-4160F16F2B2D}"/>
+                <a16:creationId xmlns:a16="http://schemas.microsoft.com/office/drawing/2014/main" id="{4B73D138-A737-469B-8031-82E97538B824}"/>
               </a:ext>
             </a:extLst>
           </p:cNvPr>
@@ -14592,7 +14667,7 @@
           <p:cNvPr id="34" name="">
             <a:extLst xmlns:a="http://schemas.openxmlformats.org/drawingml/2006/main">
               <a:ext uri="{FF2B5EF4-FFF2-40B4-BE49-F238E27FC236}">
-                <a16:creationId xmlns:a16="http://schemas.microsoft.com/office/drawing/2014/main" id="{35CCD57D-C153-4B2B-A78F-41E7BA54EEC7}"/>
+                <a16:creationId xmlns:a16="http://schemas.microsoft.com/office/drawing/2014/main" id="{CA41954C-CD51-4E3A-9F57-E95905C5C7C9}"/>
               </a:ext>
             </a:extLst>
           </p:cNvPr>
@@ -14651,7 +14726,7 @@
           <p:cNvPr id="35" name="">
             <a:extLst xmlns:a="http://schemas.openxmlformats.org/drawingml/2006/main">
               <a:ext uri="{FF2B5EF4-FFF2-40B4-BE49-F238E27FC236}">
-                <a16:creationId xmlns:a16="http://schemas.microsoft.com/office/drawing/2014/main" id="{CF508FA4-9AE3-4A1C-92B9-405D7F788636}"/>
+                <a16:creationId xmlns:a16="http://schemas.microsoft.com/office/drawing/2014/main" id="{8D4B872C-3899-4598-9ECE-F199592614A5}"/>
               </a:ext>
             </a:extLst>
           </p:cNvPr>
@@ -14706,7 +14781,7 @@
     </p:spTree>
     <p:extLst>
       <p:ext uri="{BB962C8B-B14F-4D97-AF65-F5344CB8AC3E}">
-        <p14:creationId xmlns:p14="http://schemas.microsoft.com/office/powerpoint/2010/main" val="1790918976"/>
+        <p14:creationId xmlns:p14="http://schemas.microsoft.com/office/powerpoint/2010/main" val="2070606449"/>
       </p:ext>
     </p:extLst>
   </p:cSld>
@@ -14737,7 +14812,7 @@
           <p:cNvPr id="5" name="">
             <a:extLst xmlns:a="http://schemas.openxmlformats.org/drawingml/2006/main">
               <a:ext uri="{FF2B5EF4-FFF2-40B4-BE49-F238E27FC236}">
-                <a16:creationId xmlns:a16="http://schemas.microsoft.com/office/drawing/2014/main" id="{C1C781CB-8B6F-45E2-B8C4-F1AE6CF2C0EF}"/>
+                <a16:creationId xmlns:a16="http://schemas.microsoft.com/office/drawing/2014/main" id="{C993CF2D-2D1B-419C-8F88-055C38B6E03E}"/>
               </a:ext>
             </a:extLst>
           </p:cNvPr>
@@ -14794,7 +14869,7 @@
           <p:cNvPr id="2" name="title-rule">
             <a:extLst xmlns:a="http://schemas.openxmlformats.org/drawingml/2006/main">
               <a:ext uri="{FF2B5EF4-FFF2-40B4-BE49-F238E27FC236}">
-                <a16:creationId xmlns:a16="http://schemas.microsoft.com/office/drawing/2014/main" id="{7F5B8687-7BA4-4877-98C9-6CEA355E80C1}"/>
+                <a16:creationId xmlns:a16="http://schemas.microsoft.com/office/drawing/2014/main" id="{59A11F9E-FAAD-4E6C-8F7D-911611C3E360}"/>
               </a:ext>
             </a:extLst>
           </p:cNvPr>
@@ -14834,11 +14909,11 @@
             <a:tbl>
               <a:tblPr firstRow="1" bandRow="1"/>
               <a:tblGrid>
-                <a:gridCol w="2384156"/>
-                <a:gridCol w="1833966"/>
-                <a:gridCol w="1833966"/>
-                <a:gridCol w="1833966"/>
-                <a:gridCol w="2934346"/>
+                <a:gridCol w="3043238"/>
+                <a:gridCol w="1690688"/>
+                <a:gridCol w="1690688"/>
+                <a:gridCol w="1690688"/>
+                <a:gridCol w="2705100"/>
               </a:tblGrid>
               <a:tr h="552450">
                 <a:tc>
@@ -15641,7 +15716,7 @@
           <p:cNvPr id="4" name="">
             <a:extLst xmlns:a="http://schemas.openxmlformats.org/drawingml/2006/main">
               <a:ext uri="{FF2B5EF4-FFF2-40B4-BE49-F238E27FC236}">
-                <a16:creationId xmlns:a16="http://schemas.microsoft.com/office/drawing/2014/main" id="{BB5FB495-E63C-494F-A97A-7528DB1E6746}"/>
+                <a16:creationId xmlns:a16="http://schemas.microsoft.com/office/drawing/2014/main" id="{C39FAFCD-6133-4B9C-9B7C-A416F21B7B95}"/>
               </a:ext>
             </a:extLst>
           </p:cNvPr>
@@ -15696,7 +15771,7 @@
     </p:spTree>
     <p:extLst>
       <p:ext uri="{BB962C8B-B14F-4D97-AF65-F5344CB8AC3E}">
-        <p14:creationId xmlns:p14="http://schemas.microsoft.com/office/powerpoint/2010/main" val="1327198457"/>
+        <p14:creationId xmlns:p14="http://schemas.microsoft.com/office/powerpoint/2010/main" val="713811589"/>
       </p:ext>
     </p:extLst>
   </p:cSld>
@@ -15727,7 +15802,7 @@
           <p:cNvPr id="5" name="">
             <a:extLst xmlns:a="http://schemas.openxmlformats.org/drawingml/2006/main">
               <a:ext uri="{FF2B5EF4-FFF2-40B4-BE49-F238E27FC236}">
-                <a16:creationId xmlns:a16="http://schemas.microsoft.com/office/drawing/2014/main" id="{FD9FFA94-652F-4A18-BEC3-298C68D53136}"/>
+                <a16:creationId xmlns:a16="http://schemas.microsoft.com/office/drawing/2014/main" id="{2D7CBD82-D033-40BB-9E3E-C899034D4001}"/>
               </a:ext>
             </a:extLst>
           </p:cNvPr>
@@ -15784,7 +15859,7 @@
           <p:cNvPr id="2" name="title-rule">
             <a:extLst xmlns:a="http://schemas.openxmlformats.org/drawingml/2006/main">
               <a:ext uri="{FF2B5EF4-FFF2-40B4-BE49-F238E27FC236}">
-                <a16:creationId xmlns:a16="http://schemas.microsoft.com/office/drawing/2014/main" id="{54FE4873-3598-4A82-AA63-F232CEE8A5DA}"/>
+                <a16:creationId xmlns:a16="http://schemas.microsoft.com/office/drawing/2014/main" id="{4FEF87A4-4FED-4FD6-87BF-FF4F67313259}"/>
               </a:ext>
             </a:extLst>
           </p:cNvPr>
@@ -15824,9 +15899,9 @@
             <a:tbl>
               <a:tblPr firstRow="1" bandRow="1"/>
               <a:tblGrid>
-                <a:gridCol w="2038626"/>
-                <a:gridCol w="2509078"/>
-                <a:gridCol w="6272696"/>
+                <a:gridCol w="2631989"/>
+                <a:gridCol w="2339546"/>
+                <a:gridCol w="5848865"/>
               </a:tblGrid>
               <a:tr h="552450">
                 <a:tc>
@@ -16317,7 +16392,7 @@
           <p:cNvPr id="4" name="">
             <a:extLst xmlns:a="http://schemas.openxmlformats.org/drawingml/2006/main">
               <a:ext uri="{FF2B5EF4-FFF2-40B4-BE49-F238E27FC236}">
-                <a16:creationId xmlns:a16="http://schemas.microsoft.com/office/drawing/2014/main" id="{5AB870C4-5C46-491F-A566-B9778E2C5070}"/>
+                <a16:creationId xmlns:a16="http://schemas.microsoft.com/office/drawing/2014/main" id="{2B2FBACC-6B8B-4949-A038-0A7D7D1A6718}"/>
               </a:ext>
             </a:extLst>
           </p:cNvPr>
@@ -16372,7 +16447,7 @@
     </p:spTree>
     <p:extLst>
       <p:ext uri="{BB962C8B-B14F-4D97-AF65-F5344CB8AC3E}">
-        <p14:creationId xmlns:p14="http://schemas.microsoft.com/office/powerpoint/2010/main" val="1085657545"/>
+        <p14:creationId xmlns:p14="http://schemas.microsoft.com/office/powerpoint/2010/main" val="1488690962"/>
       </p:ext>
     </p:extLst>
   </p:cSld>
@@ -16403,7 +16478,7 @@
           <p:cNvPr id="7" name="">
             <a:extLst xmlns:a="http://schemas.openxmlformats.org/drawingml/2006/main">
               <a:ext uri="{FF2B5EF4-FFF2-40B4-BE49-F238E27FC236}">
-                <a16:creationId xmlns:a16="http://schemas.microsoft.com/office/drawing/2014/main" id="{9064A1C5-82F7-44C5-877B-DBE6B70FF41D}"/>
+                <a16:creationId xmlns:a16="http://schemas.microsoft.com/office/drawing/2014/main" id="{E905971B-304B-470C-BD07-73778E6BD51D}"/>
               </a:ext>
             </a:extLst>
           </p:cNvPr>
@@ -16460,7 +16535,7 @@
           <p:cNvPr id="2" name="title-rule">
             <a:extLst xmlns:a="http://schemas.openxmlformats.org/drawingml/2006/main">
               <a:ext uri="{FF2B5EF4-FFF2-40B4-BE49-F238E27FC236}">
-                <a16:creationId xmlns:a16="http://schemas.microsoft.com/office/drawing/2014/main" id="{F78ACBCE-F5E2-4B01-B864-B9EAAA0BAB97}"/>
+                <a16:creationId xmlns:a16="http://schemas.microsoft.com/office/drawing/2014/main" id="{181C67D1-E284-4F0B-BF3D-C9C7D8715F8F}"/>
               </a:ext>
             </a:extLst>
           </p:cNvPr>
@@ -16490,18 +16565,18 @@
           <p:cNvPr id="3" name="">
             <a:extLst xmlns:a="http://schemas.openxmlformats.org/drawingml/2006/main">
               <a:ext uri="{FF2B5EF4-FFF2-40B4-BE49-F238E27FC236}">
-                <a16:creationId xmlns:a16="http://schemas.microsoft.com/office/drawing/2014/main" id="{D79C728F-48A3-4878-941C-792A437BBE9E}"/>
-              </a:ext>
-            </a:extLst>
-          </p:cNvPr>
-          <p:cNvSpPr>
-            <a:spLocks xmlns:a="http://schemas.openxmlformats.org/drawingml/2006/main" noGrp="1"/>
-          </p:cNvSpPr>
-          <p:nvPr/>
-        </p:nvSpPr>
-        <p:spPr>
-          <a:xfrm xmlns:a="http://schemas.openxmlformats.org/drawingml/2006/main">
-            <a:off x="914400" y="1600200"/>
+                <a16:creationId xmlns:a16="http://schemas.microsoft.com/office/drawing/2014/main" id="{ADFFE75F-4C84-44F9-8360-6ACEE71EDD5D}"/>
+              </a:ext>
+            </a:extLst>
+          </p:cNvPr>
+          <p:cNvSpPr>
+            <a:spLocks xmlns:a="http://schemas.openxmlformats.org/drawingml/2006/main" noGrp="1"/>
+          </p:cNvSpPr>
+          <p:nvPr/>
+        </p:nvSpPr>
+        <p:spPr>
+          <a:xfrm xmlns:a="http://schemas.openxmlformats.org/drawingml/2006/main">
+            <a:off x="914400" y="1990725"/>
             <a:ext cx="10134600" cy="847725"/>
           </a:xfrm>
           <a:prstGeom xmlns:a="http://schemas.openxmlformats.org/drawingml/2006/main" prst="rect">
@@ -16547,18 +16622,18 @@
           <p:cNvPr id="4" name="">
             <a:extLst xmlns:a="http://schemas.openxmlformats.org/drawingml/2006/main">
               <a:ext uri="{FF2B5EF4-FFF2-40B4-BE49-F238E27FC236}">
-                <a16:creationId xmlns:a16="http://schemas.microsoft.com/office/drawing/2014/main" id="{6456DF29-D068-4A85-B1F6-BECE89FE4F44}"/>
-              </a:ext>
-            </a:extLst>
-          </p:cNvPr>
-          <p:cNvSpPr>
-            <a:spLocks xmlns:a="http://schemas.openxmlformats.org/drawingml/2006/main" noGrp="1"/>
-          </p:cNvSpPr>
-          <p:nvPr/>
-        </p:nvSpPr>
-        <p:spPr>
-          <a:xfrm xmlns:a="http://schemas.openxmlformats.org/drawingml/2006/main">
-            <a:off x="914400" y="2638425"/>
+                <a16:creationId xmlns:a16="http://schemas.microsoft.com/office/drawing/2014/main" id="{6E7FDFF3-9AFC-4156-BD14-334D86609627}"/>
+              </a:ext>
+            </a:extLst>
+          </p:cNvPr>
+          <p:cNvSpPr>
+            <a:spLocks xmlns:a="http://schemas.openxmlformats.org/drawingml/2006/main" noGrp="1"/>
+          </p:cNvSpPr>
+          <p:nvPr/>
+        </p:nvSpPr>
+        <p:spPr>
+          <a:xfrm xmlns:a="http://schemas.openxmlformats.org/drawingml/2006/main">
+            <a:off x="914400" y="3028950"/>
             <a:ext cx="10134600" cy="1104900"/>
           </a:xfrm>
           <a:prstGeom xmlns:a="http://schemas.openxmlformats.org/drawingml/2006/main" prst="rect">
@@ -16604,18 +16679,18 @@
           <p:cNvPr id="5" name="">
             <a:extLst xmlns:a="http://schemas.openxmlformats.org/drawingml/2006/main">
               <a:ext uri="{FF2B5EF4-FFF2-40B4-BE49-F238E27FC236}">
-                <a16:creationId xmlns:a16="http://schemas.microsoft.com/office/drawing/2014/main" id="{D2ED96E9-6E29-4A8A-AF63-DB9406DE24C2}"/>
-              </a:ext>
-            </a:extLst>
-          </p:cNvPr>
-          <p:cNvSpPr>
-            <a:spLocks xmlns:a="http://schemas.openxmlformats.org/drawingml/2006/main" noGrp="1"/>
-          </p:cNvSpPr>
-          <p:nvPr/>
-        </p:nvSpPr>
-        <p:spPr>
-          <a:xfrm xmlns:a="http://schemas.openxmlformats.org/drawingml/2006/main">
-            <a:off x="914400" y="3933825"/>
+                <a16:creationId xmlns:a16="http://schemas.microsoft.com/office/drawing/2014/main" id="{1CDE94C9-3142-4B1D-841E-098F3773387A}"/>
+              </a:ext>
+            </a:extLst>
+          </p:cNvPr>
+          <p:cNvSpPr>
+            <a:spLocks xmlns:a="http://schemas.openxmlformats.org/drawingml/2006/main" noGrp="1"/>
+          </p:cNvSpPr>
+          <p:nvPr/>
+        </p:nvSpPr>
+        <p:spPr>
+          <a:xfrm xmlns:a="http://schemas.openxmlformats.org/drawingml/2006/main">
+            <a:off x="914400" y="4324350"/>
             <a:ext cx="10134600" cy="1362075"/>
           </a:xfrm>
           <a:prstGeom xmlns:a="http://schemas.openxmlformats.org/drawingml/2006/main" prst="rect">
@@ -16661,7 +16736,7 @@
           <p:cNvPr id="6" name="">
             <a:extLst xmlns:a="http://schemas.openxmlformats.org/drawingml/2006/main">
               <a:ext uri="{FF2B5EF4-FFF2-40B4-BE49-F238E27FC236}">
-                <a16:creationId xmlns:a16="http://schemas.microsoft.com/office/drawing/2014/main" id="{DFCD30DC-CA23-41FB-A4D2-D3598BD2F041}"/>
+                <a16:creationId xmlns:a16="http://schemas.microsoft.com/office/drawing/2014/main" id="{519BFCB4-CAFF-4797-8DD8-C077DE28425B}"/>
               </a:ext>
             </a:extLst>
           </p:cNvPr>
@@ -16716,7 +16791,7 @@
     </p:spTree>
     <p:extLst>
       <p:ext uri="{BB962C8B-B14F-4D97-AF65-F5344CB8AC3E}">
-        <p14:creationId xmlns:p14="http://schemas.microsoft.com/office/powerpoint/2010/main" val="627571945"/>
+        <p14:creationId xmlns:p14="http://schemas.microsoft.com/office/powerpoint/2010/main" val="1359838596"/>
       </p:ext>
     </p:extLst>
   </p:cSld>
@@ -16747,7 +16822,7 @@
           <p:cNvPr id="5" name="">
             <a:extLst xmlns:a="http://schemas.openxmlformats.org/drawingml/2006/main">
               <a:ext uri="{FF2B5EF4-FFF2-40B4-BE49-F238E27FC236}">
-                <a16:creationId xmlns:a16="http://schemas.microsoft.com/office/drawing/2014/main" id="{C406419F-F3BF-4089-91EB-311F34CF59A3}"/>
+                <a16:creationId xmlns:a16="http://schemas.microsoft.com/office/drawing/2014/main" id="{DD43DDD3-4D12-4EB9-84C4-52EE65E1500F}"/>
               </a:ext>
             </a:extLst>
           </p:cNvPr>
@@ -16804,7 +16879,7 @@
           <p:cNvPr id="2" name="title-rule">
             <a:extLst xmlns:a="http://schemas.openxmlformats.org/drawingml/2006/main">
               <a:ext uri="{FF2B5EF4-FFF2-40B4-BE49-F238E27FC236}">
-                <a16:creationId xmlns:a16="http://schemas.microsoft.com/office/drawing/2014/main" id="{B3C21C9E-283A-47EB-9E5C-0012122037C3}"/>
+                <a16:creationId xmlns:a16="http://schemas.microsoft.com/office/drawing/2014/main" id="{2F381E9F-0D0D-424D-A5F3-AF2A2C6F2708}"/>
               </a:ext>
             </a:extLst>
           </p:cNvPr>
@@ -16844,10 +16919,10 @@
             <a:tbl>
               <a:tblPr firstRow="1" bandRow="1"/>
               <a:tblGrid>
-                <a:gridCol w="1057633"/>
-                <a:gridCol w="3254256"/>
-                <a:gridCol w="3254256"/>
-                <a:gridCol w="3254256"/>
+                <a:gridCol w="1411357"/>
+                <a:gridCol w="3136348"/>
+                <a:gridCol w="3136348"/>
+                <a:gridCol w="3136348"/>
               </a:tblGrid>
               <a:tr h="552450">
                 <a:tc>
@@ -17388,7 +17463,7 @@
           <p:cNvPr id="4" name="">
             <a:extLst xmlns:a="http://schemas.openxmlformats.org/drawingml/2006/main">
               <a:ext uri="{FF2B5EF4-FFF2-40B4-BE49-F238E27FC236}">
-                <a16:creationId xmlns:a16="http://schemas.microsoft.com/office/drawing/2014/main" id="{563158E4-FD9D-4FDC-A375-78AE37822A7F}"/>
+                <a16:creationId xmlns:a16="http://schemas.microsoft.com/office/drawing/2014/main" id="{2658F001-DE76-4F73-BBC5-1278ECED104D}"/>
               </a:ext>
             </a:extLst>
           </p:cNvPr>
@@ -17443,7 +17518,7 @@
     </p:spTree>
     <p:extLst>
       <p:ext uri="{BB962C8B-B14F-4D97-AF65-F5344CB8AC3E}">
-        <p14:creationId xmlns:p14="http://schemas.microsoft.com/office/powerpoint/2010/main" val="1182267027"/>
+        <p14:creationId xmlns:p14="http://schemas.microsoft.com/office/powerpoint/2010/main" val="1742111274"/>
       </p:ext>
     </p:extLst>
   </p:cSld>
@@ -17474,7 +17549,7 @@
           <p:cNvPr id="5" name="">
             <a:extLst xmlns:a="http://schemas.openxmlformats.org/drawingml/2006/main">
               <a:ext uri="{FF2B5EF4-FFF2-40B4-BE49-F238E27FC236}">
-                <a16:creationId xmlns:a16="http://schemas.microsoft.com/office/drawing/2014/main" id="{30D03805-04EA-444A-910F-C2907AE7B0F4}"/>
+                <a16:creationId xmlns:a16="http://schemas.microsoft.com/office/drawing/2014/main" id="{D6060E7A-28B8-4C09-B6D2-DC1782AFE1C0}"/>
               </a:ext>
             </a:extLst>
           </p:cNvPr>
@@ -17531,7 +17606,7 @@
           <p:cNvPr id="2" name="title-rule">
             <a:extLst xmlns:a="http://schemas.openxmlformats.org/drawingml/2006/main">
               <a:ext uri="{FF2B5EF4-FFF2-40B4-BE49-F238E27FC236}">
-                <a16:creationId xmlns:a16="http://schemas.microsoft.com/office/drawing/2014/main" id="{5782E95D-9509-4DD0-86BB-0201F6EA6830}"/>
+                <a16:creationId xmlns:a16="http://schemas.microsoft.com/office/drawing/2014/main" id="{B9ED4C58-997E-4464-BF07-FE0709FBB835}"/>
               </a:ext>
             </a:extLst>
           </p:cNvPr>
@@ -17571,11 +17646,11 @@
             <a:tbl>
               <a:tblPr firstRow="1" bandRow="1"/>
               <a:tblGrid>
-                <a:gridCol w="1826821"/>
-                <a:gridCol w="2248395"/>
-                <a:gridCol w="2248395"/>
-                <a:gridCol w="2248395"/>
-                <a:gridCol w="2248395"/>
+                <a:gridCol w="2375210"/>
+                <a:gridCol w="2111298"/>
+                <a:gridCol w="2111298"/>
+                <a:gridCol w="2111298"/>
+                <a:gridCol w="2111298"/>
               </a:tblGrid>
               <a:tr h="552450">
                 <a:tc>
@@ -18246,7 +18321,7 @@
           <p:cNvPr id="4" name="">
             <a:extLst xmlns:a="http://schemas.openxmlformats.org/drawingml/2006/main">
               <a:ext uri="{FF2B5EF4-FFF2-40B4-BE49-F238E27FC236}">
-                <a16:creationId xmlns:a16="http://schemas.microsoft.com/office/drawing/2014/main" id="{4F2AA7A8-2759-4C66-8E16-54DFDC3C8BEB}"/>
+                <a16:creationId xmlns:a16="http://schemas.microsoft.com/office/drawing/2014/main" id="{7D3433C3-9931-4179-B073-C3CA35D4E7D6}"/>
               </a:ext>
             </a:extLst>
           </p:cNvPr>
@@ -18301,7 +18376,7 @@
     </p:spTree>
     <p:extLst>
       <p:ext uri="{BB962C8B-B14F-4D97-AF65-F5344CB8AC3E}">
-        <p14:creationId xmlns:p14="http://schemas.microsoft.com/office/powerpoint/2010/main" val="847549032"/>
+        <p14:creationId xmlns:p14="http://schemas.microsoft.com/office/powerpoint/2010/main" val="1104836348"/>
       </p:ext>
     </p:extLst>
   </p:cSld>
@@ -18332,7 +18407,7 @@
           <p:cNvPr id="5" name="">
             <a:extLst xmlns:a="http://schemas.openxmlformats.org/drawingml/2006/main">
               <a:ext uri="{FF2B5EF4-FFF2-40B4-BE49-F238E27FC236}">
-                <a16:creationId xmlns:a16="http://schemas.microsoft.com/office/drawing/2014/main" id="{434CC175-6AC2-4DB7-8420-F4FC09C919E0}"/>
+                <a16:creationId xmlns:a16="http://schemas.microsoft.com/office/drawing/2014/main" id="{D7CF0D0B-FDD4-4C21-BC13-DA3AB2FE0B99}"/>
               </a:ext>
             </a:extLst>
           </p:cNvPr>
@@ -18389,7 +18464,7 @@
           <p:cNvPr id="2" name="title-rule">
             <a:extLst xmlns:a="http://schemas.openxmlformats.org/drawingml/2006/main">
               <a:ext uri="{FF2B5EF4-FFF2-40B4-BE49-F238E27FC236}">
-                <a16:creationId xmlns:a16="http://schemas.microsoft.com/office/drawing/2014/main" id="{745C75FB-AFBC-4DB1-AB93-00365CCC817D}"/>
+                <a16:creationId xmlns:a16="http://schemas.microsoft.com/office/drawing/2014/main" id="{80E73C75-B475-4BDD-8E78-2DEF838A9DB5}"/>
               </a:ext>
             </a:extLst>
           </p:cNvPr>
@@ -18422,15 +18497,15 @@
         </p:nvGraphicFramePr>
         <p:xfrm>
           <a:off xmlns:a="http://schemas.openxmlformats.org/drawingml/2006/main" x="685800" y="1562100"/>
-          <a:ext xmlns:a="http://schemas.openxmlformats.org/drawingml/2006/main" cx="10820400" cy="3771900"/>
+          <a:ext xmlns:a="http://schemas.openxmlformats.org/drawingml/2006/main" cx="10820400" cy="3952875"/>
         </p:xfrm>
         <a:graphic xmlns:a="http://schemas.openxmlformats.org/drawingml/2006/main">
           <a:graphicData uri="http://schemas.openxmlformats.org/drawingml/2006/table">
             <a:tbl>
               <a:tblPr firstRow="1" bandRow="1"/>
               <a:tblGrid>
-                <a:gridCol w="2654060"/>
-                <a:gridCol w="8166340"/>
+                <a:gridCol w="3358055"/>
+                <a:gridCol w="7462345"/>
               </a:tblGrid>
               <a:tr h="552450">
                 <a:tc>
@@ -18540,7 +18615,7 @@
                   </a:tcPr>
                 </a:tc>
               </a:tr>
-              <a:tr h="714375">
+              <a:tr h="895350">
                 <a:tc>
                   <a:txBody>
                     <a:bodyPr>
@@ -18711,7 +18786,7 @@
           <p:cNvPr id="4" name="">
             <a:extLst xmlns:a="http://schemas.openxmlformats.org/drawingml/2006/main">
               <a:ext uri="{FF2B5EF4-FFF2-40B4-BE49-F238E27FC236}">
-                <a16:creationId xmlns:a16="http://schemas.microsoft.com/office/drawing/2014/main" id="{44E8B399-CFAD-4535-87E5-87501F8377DF}"/>
+                <a16:creationId xmlns:a16="http://schemas.microsoft.com/office/drawing/2014/main" id="{10869919-7ACF-444D-96CA-994A2D87946B}"/>
               </a:ext>
             </a:extLst>
           </p:cNvPr>
@@ -18766,7 +18841,7 @@
     </p:spTree>
     <p:extLst>
       <p:ext uri="{BB962C8B-B14F-4D97-AF65-F5344CB8AC3E}">
-        <p14:creationId xmlns:p14="http://schemas.microsoft.com/office/powerpoint/2010/main" val="1104759145"/>
+        <p14:creationId xmlns:p14="http://schemas.microsoft.com/office/powerpoint/2010/main" val="1370042350"/>
       </p:ext>
     </p:extLst>
   </p:cSld>
@@ -18797,7 +18872,7 @@
           <p:cNvPr id="7" name="">
             <a:extLst xmlns:a="http://schemas.openxmlformats.org/drawingml/2006/main">
               <a:ext uri="{FF2B5EF4-FFF2-40B4-BE49-F238E27FC236}">
-                <a16:creationId xmlns:a16="http://schemas.microsoft.com/office/drawing/2014/main" id="{C3412188-C750-4E9E-8D77-3F9CD4C9C938}"/>
+                <a16:creationId xmlns:a16="http://schemas.microsoft.com/office/drawing/2014/main" id="{2599D284-8FFB-461B-86F7-5CB8FC45304B}"/>
               </a:ext>
             </a:extLst>
           </p:cNvPr>
@@ -18854,7 +18929,7 @@
           <p:cNvPr id="2" name="title-rule">
             <a:extLst xmlns:a="http://schemas.openxmlformats.org/drawingml/2006/main">
               <a:ext uri="{FF2B5EF4-FFF2-40B4-BE49-F238E27FC236}">
-                <a16:creationId xmlns:a16="http://schemas.microsoft.com/office/drawing/2014/main" id="{CA89258E-A046-4049-B7ED-73672A09DEF0}"/>
+                <a16:creationId xmlns:a16="http://schemas.microsoft.com/office/drawing/2014/main" id="{23ECB964-02BF-489F-BA09-CBFCE749D8B7}"/>
               </a:ext>
             </a:extLst>
           </p:cNvPr>
@@ -18884,18 +18959,18 @@
           <p:cNvPr id="3" name="">
             <a:extLst xmlns:a="http://schemas.openxmlformats.org/drawingml/2006/main">
               <a:ext uri="{FF2B5EF4-FFF2-40B4-BE49-F238E27FC236}">
-                <a16:creationId xmlns:a16="http://schemas.microsoft.com/office/drawing/2014/main" id="{CA937790-F775-4096-AE54-6E70742705BF}"/>
-              </a:ext>
-            </a:extLst>
-          </p:cNvPr>
-          <p:cNvSpPr>
-            <a:spLocks xmlns:a="http://schemas.openxmlformats.org/drawingml/2006/main" noGrp="1"/>
-          </p:cNvSpPr>
-          <p:nvPr/>
-        </p:nvSpPr>
-        <p:spPr>
-          <a:xfrm xmlns:a="http://schemas.openxmlformats.org/drawingml/2006/main">
-            <a:off x="914400" y="1600200"/>
+                <a16:creationId xmlns:a16="http://schemas.microsoft.com/office/drawing/2014/main" id="{2F828F97-25EE-49CE-A699-F24C924041BE}"/>
+              </a:ext>
+            </a:extLst>
+          </p:cNvPr>
+          <p:cNvSpPr>
+            <a:spLocks xmlns:a="http://schemas.openxmlformats.org/drawingml/2006/main" noGrp="1"/>
+          </p:cNvSpPr>
+          <p:nvPr/>
+        </p:nvSpPr>
+        <p:spPr>
+          <a:xfrm xmlns:a="http://schemas.openxmlformats.org/drawingml/2006/main">
+            <a:off x="914400" y="2328863"/>
             <a:ext cx="10134600" cy="638175"/>
           </a:xfrm>
           <a:prstGeom xmlns:a="http://schemas.openxmlformats.org/drawingml/2006/main" prst="rect">
@@ -18941,18 +19016,18 @@
           <p:cNvPr id="4" name="">
             <a:extLst xmlns:a="http://schemas.openxmlformats.org/drawingml/2006/main">
               <a:ext uri="{FF2B5EF4-FFF2-40B4-BE49-F238E27FC236}">
-                <a16:creationId xmlns:a16="http://schemas.microsoft.com/office/drawing/2014/main" id="{BA0789B8-FDA1-4720-9B4B-09426B9EDB06}"/>
-              </a:ext>
-            </a:extLst>
-          </p:cNvPr>
-          <p:cNvSpPr>
-            <a:spLocks xmlns:a="http://schemas.openxmlformats.org/drawingml/2006/main" noGrp="1"/>
-          </p:cNvSpPr>
-          <p:nvPr/>
-        </p:nvSpPr>
-        <p:spPr>
-          <a:xfrm xmlns:a="http://schemas.openxmlformats.org/drawingml/2006/main">
-            <a:off x="914400" y="2505075"/>
+                <a16:creationId xmlns:a16="http://schemas.microsoft.com/office/drawing/2014/main" id="{A25614F6-10D9-4C01-8AA5-D5477FAEBD67}"/>
+              </a:ext>
+            </a:extLst>
+          </p:cNvPr>
+          <p:cNvSpPr>
+            <a:spLocks xmlns:a="http://schemas.openxmlformats.org/drawingml/2006/main" noGrp="1"/>
+          </p:cNvSpPr>
+          <p:nvPr/>
+        </p:nvSpPr>
+        <p:spPr>
+          <a:xfrm xmlns:a="http://schemas.openxmlformats.org/drawingml/2006/main">
+            <a:off x="914400" y="3233738"/>
             <a:ext cx="10134600" cy="923925"/>
           </a:xfrm>
           <a:prstGeom xmlns:a="http://schemas.openxmlformats.org/drawingml/2006/main" prst="rect">
@@ -18998,18 +19073,18 @@
           <p:cNvPr id="5" name="">
             <a:extLst xmlns:a="http://schemas.openxmlformats.org/drawingml/2006/main">
               <a:ext uri="{FF2B5EF4-FFF2-40B4-BE49-F238E27FC236}">
-                <a16:creationId xmlns:a16="http://schemas.microsoft.com/office/drawing/2014/main" id="{0B851AF5-1205-4721-AFA6-698E8C3958D6}"/>
-              </a:ext>
-            </a:extLst>
-          </p:cNvPr>
-          <p:cNvSpPr>
-            <a:spLocks xmlns:a="http://schemas.openxmlformats.org/drawingml/2006/main" noGrp="1"/>
-          </p:cNvSpPr>
-          <p:nvPr/>
-        </p:nvSpPr>
-        <p:spPr>
-          <a:xfrm xmlns:a="http://schemas.openxmlformats.org/drawingml/2006/main">
-            <a:off x="914400" y="3695700"/>
+                <a16:creationId xmlns:a16="http://schemas.microsoft.com/office/drawing/2014/main" id="{D8386BD2-82AD-4769-9284-3F2ABBA41214}"/>
+              </a:ext>
+            </a:extLst>
+          </p:cNvPr>
+          <p:cNvSpPr>
+            <a:spLocks xmlns:a="http://schemas.openxmlformats.org/drawingml/2006/main" noGrp="1"/>
+          </p:cNvSpPr>
+          <p:nvPr/>
+        </p:nvSpPr>
+        <p:spPr>
+          <a:xfrm xmlns:a="http://schemas.openxmlformats.org/drawingml/2006/main">
+            <a:off x="914400" y="4424363"/>
             <a:ext cx="10134600" cy="923925"/>
           </a:xfrm>
           <a:prstGeom xmlns:a="http://schemas.openxmlformats.org/drawingml/2006/main" prst="rect">
@@ -19055,7 +19130,7 @@
           <p:cNvPr id="6" name="">
             <a:extLst xmlns:a="http://schemas.openxmlformats.org/drawingml/2006/main">
               <a:ext uri="{FF2B5EF4-FFF2-40B4-BE49-F238E27FC236}">
-                <a16:creationId xmlns:a16="http://schemas.microsoft.com/office/drawing/2014/main" id="{E8E7C8A3-4636-4262-8633-3224A237C662}"/>
+                <a16:creationId xmlns:a16="http://schemas.microsoft.com/office/drawing/2014/main" id="{CF7220F0-ECD8-4F91-83F8-F33673CAF3AD}"/>
               </a:ext>
             </a:extLst>
           </p:cNvPr>
@@ -19110,7 +19185,7 @@
     </p:spTree>
     <p:extLst>
       <p:ext uri="{BB962C8B-B14F-4D97-AF65-F5344CB8AC3E}">
-        <p14:creationId xmlns:p14="http://schemas.microsoft.com/office/powerpoint/2010/main" val="1659192610"/>
+        <p14:creationId xmlns:p14="http://schemas.microsoft.com/office/powerpoint/2010/main" val="801507199"/>
       </p:ext>
     </p:extLst>
   </p:cSld>
@@ -19141,7 +19216,7 @@
           <p:cNvPr id="9" name="">
             <a:extLst xmlns:a="http://schemas.openxmlformats.org/drawingml/2006/main">
               <a:ext uri="{FF2B5EF4-FFF2-40B4-BE49-F238E27FC236}">
-                <a16:creationId xmlns:a16="http://schemas.microsoft.com/office/drawing/2014/main" id="{199879E1-4F2D-4C90-9C48-78A3FC75D07A}"/>
+                <a16:creationId xmlns:a16="http://schemas.microsoft.com/office/drawing/2014/main" id="{6E7EAA71-EEA3-421D-A405-395C7C5F95BE}"/>
               </a:ext>
             </a:extLst>
           </p:cNvPr>
@@ -19198,7 +19273,7 @@
           <p:cNvPr id="2" name="title-rule">
             <a:extLst xmlns:a="http://schemas.openxmlformats.org/drawingml/2006/main">
               <a:ext uri="{FF2B5EF4-FFF2-40B4-BE49-F238E27FC236}">
-                <a16:creationId xmlns:a16="http://schemas.microsoft.com/office/drawing/2014/main" id="{ADAB6CF2-878E-4B87-A456-3DFFFACA2EF0}"/>
+                <a16:creationId xmlns:a16="http://schemas.microsoft.com/office/drawing/2014/main" id="{B8008D0A-08B3-4AD4-88B4-9D61902575B4}"/>
               </a:ext>
             </a:extLst>
           </p:cNvPr>
@@ -19228,7 +19303,7 @@
           <p:cNvPr id="3" name="">
             <a:extLst xmlns:a="http://schemas.openxmlformats.org/drawingml/2006/main">
               <a:ext uri="{FF2B5EF4-FFF2-40B4-BE49-F238E27FC236}">
-                <a16:creationId xmlns:a16="http://schemas.microsoft.com/office/drawing/2014/main" id="{3C00F41F-C6C8-4E19-A494-040E11E59698}"/>
+                <a16:creationId xmlns:a16="http://schemas.microsoft.com/office/drawing/2014/main" id="{40C85BAB-BB3A-49C6-AF64-FF1D4C192992}"/>
               </a:ext>
             </a:extLst>
           </p:cNvPr>
@@ -19285,7 +19360,7 @@
           <p:cNvPr id="4" name="">
             <a:extLst xmlns:a="http://schemas.openxmlformats.org/drawingml/2006/main">
               <a:ext uri="{FF2B5EF4-FFF2-40B4-BE49-F238E27FC236}">
-                <a16:creationId xmlns:a16="http://schemas.microsoft.com/office/drawing/2014/main" id="{87B57F1C-CD40-4A0D-BC30-72297DF22CA3}"/>
+                <a16:creationId xmlns:a16="http://schemas.microsoft.com/office/drawing/2014/main" id="{5974E04D-38B1-40DB-B2E9-D94F2712A44A}"/>
               </a:ext>
             </a:extLst>
           </p:cNvPr>
@@ -19342,7 +19417,7 @@
           <p:cNvPr id="5" name="">
             <a:extLst xmlns:a="http://schemas.openxmlformats.org/drawingml/2006/main">
               <a:ext uri="{FF2B5EF4-FFF2-40B4-BE49-F238E27FC236}">
-                <a16:creationId xmlns:a16="http://schemas.microsoft.com/office/drawing/2014/main" id="{76AF9D30-12EF-4E7A-8D90-CAC05CAB7239}"/>
+                <a16:creationId xmlns:a16="http://schemas.microsoft.com/office/drawing/2014/main" id="{61C46217-7219-406E-937B-B2A54860FEEC}"/>
               </a:ext>
             </a:extLst>
           </p:cNvPr>
@@ -19399,7 +19474,7 @@
           <p:cNvPr id="6" name="">
             <a:extLst xmlns:a="http://schemas.openxmlformats.org/drawingml/2006/main">
               <a:ext uri="{FF2B5EF4-FFF2-40B4-BE49-F238E27FC236}">
-                <a16:creationId xmlns:a16="http://schemas.microsoft.com/office/drawing/2014/main" id="{4320AD9E-2FA0-4EB4-BAF3-3BF7FC83E771}"/>
+                <a16:creationId xmlns:a16="http://schemas.microsoft.com/office/drawing/2014/main" id="{8EF27FAB-4A2A-4829-A142-1EF14B6AD599}"/>
               </a:ext>
             </a:extLst>
           </p:cNvPr>
@@ -19456,7 +19531,7 @@
           <p:cNvPr id="7" name="">
             <a:extLst xmlns:a="http://schemas.openxmlformats.org/drawingml/2006/main">
               <a:ext uri="{FF2B5EF4-FFF2-40B4-BE49-F238E27FC236}">
-                <a16:creationId xmlns:a16="http://schemas.microsoft.com/office/drawing/2014/main" id="{909643BB-57D2-4BC8-B7A0-1E5142916167}"/>
+                <a16:creationId xmlns:a16="http://schemas.microsoft.com/office/drawing/2014/main" id="{FC35647E-E9FE-44DA-B009-4801DEE5ABF0}"/>
               </a:ext>
             </a:extLst>
           </p:cNvPr>
@@ -19513,7 +19588,7 @@
           <p:cNvPr id="8" name="">
             <a:extLst xmlns:a="http://schemas.openxmlformats.org/drawingml/2006/main">
               <a:ext uri="{FF2B5EF4-FFF2-40B4-BE49-F238E27FC236}">
-                <a16:creationId xmlns:a16="http://schemas.microsoft.com/office/drawing/2014/main" id="{70DE636A-ADD7-4D82-BED7-FD7229604AB8}"/>
+                <a16:creationId xmlns:a16="http://schemas.microsoft.com/office/drawing/2014/main" id="{2977BA49-D158-4E40-969F-1B86E32C2831}"/>
               </a:ext>
             </a:extLst>
           </p:cNvPr>
@@ -19568,7 +19643,7 @@
     </p:spTree>
     <p:extLst>
       <p:ext uri="{BB962C8B-B14F-4D97-AF65-F5344CB8AC3E}">
-        <p14:creationId xmlns:p14="http://schemas.microsoft.com/office/powerpoint/2010/main" val="1497233139"/>
+        <p14:creationId xmlns:p14="http://schemas.microsoft.com/office/powerpoint/2010/main" val="1667834425"/>
       </p:ext>
     </p:extLst>
   </p:cSld>
@@ -19599,7 +19674,7 @@
           <p:cNvPr id="5" name="">
             <a:extLst xmlns:a="http://schemas.openxmlformats.org/drawingml/2006/main">
               <a:ext uri="{FF2B5EF4-FFF2-40B4-BE49-F238E27FC236}">
-                <a16:creationId xmlns:a16="http://schemas.microsoft.com/office/drawing/2014/main" id="{CFD670A2-19EE-443E-AE6C-F1B61341B313}"/>
+                <a16:creationId xmlns:a16="http://schemas.microsoft.com/office/drawing/2014/main" id="{6AEEC253-27F5-4AC3-BF6A-69879EED0418}"/>
               </a:ext>
             </a:extLst>
           </p:cNvPr>
@@ -19656,7 +19731,7 @@
           <p:cNvPr id="2" name="title-rule">
             <a:extLst xmlns:a="http://schemas.openxmlformats.org/drawingml/2006/main">
               <a:ext uri="{FF2B5EF4-FFF2-40B4-BE49-F238E27FC236}">
-                <a16:creationId xmlns:a16="http://schemas.microsoft.com/office/drawing/2014/main" id="{E402A895-7A14-49EE-AEDB-CF0761014BCE}"/>
+                <a16:creationId xmlns:a16="http://schemas.microsoft.com/office/drawing/2014/main" id="{B8783353-D060-47A4-A132-3B60B0B7CE17}"/>
               </a:ext>
             </a:extLst>
           </p:cNvPr>
@@ -19689,17 +19764,17 @@
         </p:nvGraphicFramePr>
         <p:xfrm>
           <a:off xmlns:a="http://schemas.openxmlformats.org/drawingml/2006/main" x="685800" y="1562100"/>
-          <a:ext xmlns:a="http://schemas.openxmlformats.org/drawingml/2006/main" cx="10820400" cy="3238500"/>
+          <a:ext xmlns:a="http://schemas.openxmlformats.org/drawingml/2006/main" cx="10820400" cy="3419475"/>
         </p:xfrm>
         <a:graphic xmlns:a="http://schemas.openxmlformats.org/drawingml/2006/main">
           <a:graphicData uri="http://schemas.openxmlformats.org/drawingml/2006/table">
             <a:tbl>
               <a:tblPr firstRow="1" bandRow="1"/>
               <a:tblGrid>
-                <a:gridCol w="1654885"/>
-                <a:gridCol w="2036781"/>
-                <a:gridCol w="2036781"/>
-                <a:gridCol w="5091953"/>
+                <a:gridCol w="2164080"/>
+                <a:gridCol w="1923627"/>
+                <a:gridCol w="1923627"/>
+                <a:gridCol w="4809067"/>
               </a:tblGrid>
               <a:tr h="552450">
                 <a:tc>
@@ -20019,7 +20094,7 @@
                   </a:tcPr>
                 </a:tc>
               </a:tr>
-              <a:tr h="895350">
+              <a:tr h="1076325">
                 <a:tc>
                   <a:txBody>
                     <a:bodyPr>
@@ -20134,7 +20209,7 @@
           <p:cNvPr id="4" name="">
             <a:extLst xmlns:a="http://schemas.openxmlformats.org/drawingml/2006/main">
               <a:ext uri="{FF2B5EF4-FFF2-40B4-BE49-F238E27FC236}">
-                <a16:creationId xmlns:a16="http://schemas.microsoft.com/office/drawing/2014/main" id="{D36A0265-6221-4A0E-8AB4-7A952260953A}"/>
+                <a16:creationId xmlns:a16="http://schemas.microsoft.com/office/drawing/2014/main" id="{A955A7AD-2587-46F0-A12B-65A6E7E6EBDD}"/>
               </a:ext>
             </a:extLst>
           </p:cNvPr>
@@ -20189,7 +20264,7 @@
     </p:spTree>
     <p:extLst>
       <p:ext uri="{BB962C8B-B14F-4D97-AF65-F5344CB8AC3E}">
-        <p14:creationId xmlns:p14="http://schemas.microsoft.com/office/powerpoint/2010/main" val="1272538513"/>
+        <p14:creationId xmlns:p14="http://schemas.microsoft.com/office/powerpoint/2010/main" val="978564643"/>
       </p:ext>
     </p:extLst>
   </p:cSld>
@@ -20220,7 +20295,7 @@
           <p:cNvPr id="5" name="">
             <a:extLst xmlns:a="http://schemas.openxmlformats.org/drawingml/2006/main">
               <a:ext uri="{FF2B5EF4-FFF2-40B4-BE49-F238E27FC236}">
-                <a16:creationId xmlns:a16="http://schemas.microsoft.com/office/drawing/2014/main" id="{8D79AF58-59F6-4967-8728-98D1008121BF}"/>
+                <a16:creationId xmlns:a16="http://schemas.microsoft.com/office/drawing/2014/main" id="{10049427-847A-40CD-AAC4-5EC55D876E5D}"/>
               </a:ext>
             </a:extLst>
           </p:cNvPr>
@@ -20277,7 +20352,7 @@
           <p:cNvPr id="2" name="title-rule">
             <a:extLst xmlns:a="http://schemas.openxmlformats.org/drawingml/2006/main">
               <a:ext uri="{FF2B5EF4-FFF2-40B4-BE49-F238E27FC236}">
-                <a16:creationId xmlns:a16="http://schemas.microsoft.com/office/drawing/2014/main" id="{A93D8CF3-1D81-406B-A096-88835B739DB1}"/>
+                <a16:creationId xmlns:a16="http://schemas.microsoft.com/office/drawing/2014/main" id="{788E1FBC-285C-49C0-A49F-DF6F42AA9175}"/>
               </a:ext>
             </a:extLst>
           </p:cNvPr>
@@ -20317,10 +20392,10 @@
             <a:tbl>
               <a:tblPr firstRow="1" bandRow="1"/>
               <a:tblGrid>
-                <a:gridCol w="1654885"/>
-                <a:gridCol w="2036781"/>
-                <a:gridCol w="2036781"/>
-                <a:gridCol w="5091953"/>
+                <a:gridCol w="2164080"/>
+                <a:gridCol w="1923627"/>
+                <a:gridCol w="1923627"/>
+                <a:gridCol w="4809067"/>
               </a:tblGrid>
               <a:tr h="552450">
                 <a:tc>
@@ -20755,7 +20830,7 @@
           <p:cNvPr id="4" name="">
             <a:extLst xmlns:a="http://schemas.openxmlformats.org/drawingml/2006/main">
               <a:ext uri="{FF2B5EF4-FFF2-40B4-BE49-F238E27FC236}">
-                <a16:creationId xmlns:a16="http://schemas.microsoft.com/office/drawing/2014/main" id="{C27A7FF8-485F-4D35-9F6C-9F3BCD9C2535}"/>
+                <a16:creationId xmlns:a16="http://schemas.microsoft.com/office/drawing/2014/main" id="{8EE29AB2-161F-4C61-B831-1C4A9D73727E}"/>
               </a:ext>
             </a:extLst>
           </p:cNvPr>
@@ -20810,7 +20885,7 @@
     </p:spTree>
     <p:extLst>
       <p:ext uri="{BB962C8B-B14F-4D97-AF65-F5344CB8AC3E}">
-        <p14:creationId xmlns:p14="http://schemas.microsoft.com/office/powerpoint/2010/main" val="1467790450"/>
+        <p14:creationId xmlns:p14="http://schemas.microsoft.com/office/powerpoint/2010/main" val="237085642"/>
       </p:ext>
     </p:extLst>
   </p:cSld>
@@ -20841,7 +20916,7 @@
           <p:cNvPr id="6" name="">
             <a:extLst xmlns:a="http://schemas.openxmlformats.org/drawingml/2006/main">
               <a:ext uri="{FF2B5EF4-FFF2-40B4-BE49-F238E27FC236}">
-                <a16:creationId xmlns:a16="http://schemas.microsoft.com/office/drawing/2014/main" id="{A0216EEE-68C8-4FCF-85AC-065729B3C01C}"/>
+                <a16:creationId xmlns:a16="http://schemas.microsoft.com/office/drawing/2014/main" id="{F4A9E0E1-7FC8-41C4-9648-F94DCAC4CE32}"/>
               </a:ext>
             </a:extLst>
           </p:cNvPr>
@@ -20898,7 +20973,7 @@
           <p:cNvPr id="2" name="title-rule">
             <a:extLst xmlns:a="http://schemas.openxmlformats.org/drawingml/2006/main">
               <a:ext uri="{FF2B5EF4-FFF2-40B4-BE49-F238E27FC236}">
-                <a16:creationId xmlns:a16="http://schemas.microsoft.com/office/drawing/2014/main" id="{9FAC14AF-6CAF-4992-8C54-2C50225A2D38}"/>
+                <a16:creationId xmlns:a16="http://schemas.microsoft.com/office/drawing/2014/main" id="{9C9D83D1-A2CD-462D-9C01-2C5692EF94C7}"/>
               </a:ext>
             </a:extLst>
           </p:cNvPr>
@@ -20928,18 +21003,18 @@
           <p:cNvPr id="3" name="">
             <a:extLst xmlns:a="http://schemas.openxmlformats.org/drawingml/2006/main">
               <a:ext uri="{FF2B5EF4-FFF2-40B4-BE49-F238E27FC236}">
-                <a16:creationId xmlns:a16="http://schemas.microsoft.com/office/drawing/2014/main" id="{3269289E-B935-423C-A9B6-6FB379D8DFC8}"/>
-              </a:ext>
-            </a:extLst>
-          </p:cNvPr>
-          <p:cNvSpPr>
-            <a:spLocks xmlns:a="http://schemas.openxmlformats.org/drawingml/2006/main" noGrp="1"/>
-          </p:cNvSpPr>
-          <p:nvPr/>
-        </p:nvSpPr>
-        <p:spPr>
-          <a:xfrm xmlns:a="http://schemas.openxmlformats.org/drawingml/2006/main">
-            <a:off x="914400" y="1600200"/>
+                <a16:creationId xmlns:a16="http://schemas.microsoft.com/office/drawing/2014/main" id="{59659755-6A25-445F-9955-A42D19616033}"/>
+              </a:ext>
+            </a:extLst>
+          </p:cNvPr>
+          <p:cNvSpPr>
+            <a:spLocks xmlns:a="http://schemas.openxmlformats.org/drawingml/2006/main" noGrp="1"/>
+          </p:cNvSpPr>
+          <p:nvPr/>
+        </p:nvSpPr>
+        <p:spPr>
+          <a:xfrm xmlns:a="http://schemas.openxmlformats.org/drawingml/2006/main">
+            <a:off x="914400" y="2747963"/>
             <a:ext cx="10134600" cy="990600"/>
           </a:xfrm>
           <a:prstGeom xmlns:a="http://schemas.openxmlformats.org/drawingml/2006/main" prst="rect">
@@ -20985,18 +21060,18 @@
           <p:cNvPr id="4" name="">
             <a:extLst xmlns:a="http://schemas.openxmlformats.org/drawingml/2006/main">
               <a:ext uri="{FF2B5EF4-FFF2-40B4-BE49-F238E27FC236}">
-                <a16:creationId xmlns:a16="http://schemas.microsoft.com/office/drawing/2014/main" id="{C5E62A63-2316-4343-B8D5-D6A8FCB14849}"/>
-              </a:ext>
-            </a:extLst>
-          </p:cNvPr>
-          <p:cNvSpPr>
-            <a:spLocks xmlns:a="http://schemas.openxmlformats.org/drawingml/2006/main" noGrp="1"/>
-          </p:cNvSpPr>
-          <p:nvPr/>
-        </p:nvSpPr>
-        <p:spPr>
-          <a:xfrm xmlns:a="http://schemas.openxmlformats.org/drawingml/2006/main">
-            <a:off x="914400" y="2857500"/>
+                <a16:creationId xmlns:a16="http://schemas.microsoft.com/office/drawing/2014/main" id="{59B0149D-BBF1-4674-A87F-70B9ADD7FCB9}"/>
+              </a:ext>
+            </a:extLst>
+          </p:cNvPr>
+          <p:cNvSpPr>
+            <a:spLocks xmlns:a="http://schemas.openxmlformats.org/drawingml/2006/main" noGrp="1"/>
+          </p:cNvSpPr>
+          <p:nvPr/>
+        </p:nvSpPr>
+        <p:spPr>
+          <a:xfrm xmlns:a="http://schemas.openxmlformats.org/drawingml/2006/main">
+            <a:off x="914400" y="4005263"/>
             <a:ext cx="10134600" cy="923925"/>
           </a:xfrm>
           <a:prstGeom xmlns:a="http://schemas.openxmlformats.org/drawingml/2006/main" prst="rect">
@@ -21042,7 +21117,7 @@
           <p:cNvPr id="5" name="">
             <a:extLst xmlns:a="http://schemas.openxmlformats.org/drawingml/2006/main">
               <a:ext uri="{FF2B5EF4-FFF2-40B4-BE49-F238E27FC236}">
-                <a16:creationId xmlns:a16="http://schemas.microsoft.com/office/drawing/2014/main" id="{BEB80BD6-F88A-46C5-A20A-775B02D2D4CA}"/>
+                <a16:creationId xmlns:a16="http://schemas.microsoft.com/office/drawing/2014/main" id="{AE387D85-C32F-4BDE-BAA7-BDF69B87A5F8}"/>
               </a:ext>
             </a:extLst>
           </p:cNvPr>
@@ -21097,7 +21172,7 @@
     </p:spTree>
     <p:extLst>
       <p:ext uri="{BB962C8B-B14F-4D97-AF65-F5344CB8AC3E}">
-        <p14:creationId xmlns:p14="http://schemas.microsoft.com/office/powerpoint/2010/main" val="327570462"/>
+        <p14:creationId xmlns:p14="http://schemas.microsoft.com/office/powerpoint/2010/main" val="303114828"/>
       </p:ext>
     </p:extLst>
   </p:cSld>
@@ -21128,7 +21203,7 @@
           <p:cNvPr id="14" name="">
             <a:extLst xmlns:a="http://schemas.openxmlformats.org/drawingml/2006/main">
               <a:ext uri="{FF2B5EF4-FFF2-40B4-BE49-F238E27FC236}">
-                <a16:creationId xmlns:a16="http://schemas.microsoft.com/office/drawing/2014/main" id="{760CF817-51C3-40AB-90BC-B81C20A10848}"/>
+                <a16:creationId xmlns:a16="http://schemas.microsoft.com/office/drawing/2014/main" id="{3ACA330D-634D-4692-B1C8-2CDF16AE699B}"/>
               </a:ext>
             </a:extLst>
           </p:cNvPr>
@@ -21185,7 +21260,7 @@
           <p:cNvPr id="2" name="">
             <a:extLst xmlns:a="http://schemas.openxmlformats.org/drawingml/2006/main">
               <a:ext uri="{FF2B5EF4-FFF2-40B4-BE49-F238E27FC236}">
-                <a16:creationId xmlns:a16="http://schemas.microsoft.com/office/drawing/2014/main" id="{FD768898-4FC3-4C64-8445-2469CFCDCD22}"/>
+                <a16:creationId xmlns:a16="http://schemas.microsoft.com/office/drawing/2014/main" id="{CD0081C4-A04B-46FD-8358-3D4492D78D3A}"/>
               </a:ext>
             </a:extLst>
           </p:cNvPr>
@@ -21242,7 +21317,7 @@
           <p:cNvPr id="3" name="title-rule">
             <a:extLst xmlns:a="http://schemas.openxmlformats.org/drawingml/2006/main">
               <a:ext uri="{FF2B5EF4-FFF2-40B4-BE49-F238E27FC236}">
-                <a16:creationId xmlns:a16="http://schemas.microsoft.com/office/drawing/2014/main" id="{C1A5ED53-54E2-45B0-92EB-150891374CBB}"/>
+                <a16:creationId xmlns:a16="http://schemas.microsoft.com/office/drawing/2014/main" id="{35594DAA-62CE-464F-BC88-108AC3E8A2D0}"/>
               </a:ext>
             </a:extLst>
           </p:cNvPr>
@@ -21279,7 +21354,7 @@
         </p:xfrm>
         <a:graphic xmlns:a="http://schemas.openxmlformats.org/drawingml/2006/main">
           <a:graphicData uri="http://schemas.openxmlformats.org/drawingml/2006/chart">
-            <c:chart xmlns:r="http://schemas.openxmlformats.org/officeDocument/2006/relationships" xmlns:c="http://schemas.openxmlformats.org/drawingml/2006/chart" r:id="R6d7c8b19d1014da3"/>
+            <c:chart xmlns:r="http://schemas.openxmlformats.org/officeDocument/2006/relationships" xmlns:c="http://schemas.openxmlformats.org/drawingml/2006/chart" r:id="R975d8084e2bb4a28"/>
           </a:graphicData>
         </a:graphic>
       </p:graphicFrame>
@@ -21288,7 +21363,7 @@
           <p:cNvPr id="5" name="">
             <a:extLst xmlns:a="http://schemas.openxmlformats.org/drawingml/2006/main">
               <a:ext uri="{FF2B5EF4-FFF2-40B4-BE49-F238E27FC236}">
-                <a16:creationId xmlns:a16="http://schemas.microsoft.com/office/drawing/2014/main" id="{F34FB7F0-615C-46CC-96F8-91D6BAFD396B}"/>
+                <a16:creationId xmlns:a16="http://schemas.microsoft.com/office/drawing/2014/main" id="{71A3A050-D8A9-4C44-B8AA-CD8866AD82AE}"/>
               </a:ext>
             </a:extLst>
           </p:cNvPr>
@@ -21319,24 +21394,26 @@
           <p:cNvPr id="6" name="">
             <a:extLst xmlns:a="http://schemas.openxmlformats.org/drawingml/2006/main">
               <a:ext uri="{FF2B5EF4-FFF2-40B4-BE49-F238E27FC236}">
-                <a16:creationId xmlns:a16="http://schemas.microsoft.com/office/drawing/2014/main" id="{BB6A923C-439F-40C5-AAC2-8029D6E231DD}"/>
-              </a:ext>
-            </a:extLst>
-          </p:cNvPr>
-          <p:cNvSpPr>
-            <a:spLocks xmlns:a="http://schemas.openxmlformats.org/drawingml/2006/main" noGrp="1"/>
-          </p:cNvSpPr>
-          <p:nvPr/>
-        </p:nvSpPr>
-        <p:spPr>
-          <a:xfrm xmlns:a="http://schemas.openxmlformats.org/drawingml/2006/main">
-            <a:off x="2219325" y="4535550"/>
-            <a:ext cx="819150" cy="190500"/>
+                <a16:creationId xmlns:a16="http://schemas.microsoft.com/office/drawing/2014/main" id="{A2442DB6-4010-4757-BC17-337FD65B12D9}"/>
+              </a:ext>
+            </a:extLst>
+          </p:cNvPr>
+          <p:cNvSpPr>
+            <a:spLocks xmlns:a="http://schemas.openxmlformats.org/drawingml/2006/main" noGrp="1"/>
+          </p:cNvSpPr>
+          <p:nvPr/>
+        </p:nvSpPr>
+        <p:spPr>
+          <a:xfrm xmlns:a="http://schemas.openxmlformats.org/drawingml/2006/main">
+            <a:off x="2190750" y="4535550"/>
+            <a:ext cx="876300" cy="190500"/>
           </a:xfrm>
           <a:prstGeom xmlns:a="http://schemas.openxmlformats.org/drawingml/2006/main" prst="rect">
             <a:avLst/>
           </a:prstGeom>
-          <a:noFill xmlns:a="http://schemas.openxmlformats.org/drawingml/2006/main"/>
+          <a:solidFill xmlns:a="http://schemas.openxmlformats.org/drawingml/2006/main">
+            <a:srgbClr val="F5FAF7"/>
+          </a:solidFill>
           <a:ln xmlns:a="http://schemas.openxmlformats.org/drawingml/2006/main" w="0">
             <a:noFill/>
           </a:ln>
@@ -21376,7 +21453,7 @@
           <p:cNvPr id="7" name="">
             <a:extLst xmlns:a="http://schemas.openxmlformats.org/drawingml/2006/main">
               <a:ext uri="{FF2B5EF4-FFF2-40B4-BE49-F238E27FC236}">
-                <a16:creationId xmlns:a16="http://schemas.microsoft.com/office/drawing/2014/main" id="{F7FA82DA-D67F-4E2B-8CD6-5C56359D34F9}"/>
+                <a16:creationId xmlns:a16="http://schemas.microsoft.com/office/drawing/2014/main" id="{B08FC247-BD9F-4047-9E20-EB0FF1479A44}"/>
               </a:ext>
             </a:extLst>
           </p:cNvPr>
@@ -21407,24 +21484,26 @@
           <p:cNvPr id="8" name="">
             <a:extLst xmlns:a="http://schemas.openxmlformats.org/drawingml/2006/main">
               <a:ext uri="{FF2B5EF4-FFF2-40B4-BE49-F238E27FC236}">
-                <a16:creationId xmlns:a16="http://schemas.microsoft.com/office/drawing/2014/main" id="{301CE223-846D-449B-9BDD-5441884D18F7}"/>
-              </a:ext>
-            </a:extLst>
-          </p:cNvPr>
-          <p:cNvSpPr>
-            <a:spLocks xmlns:a="http://schemas.openxmlformats.org/drawingml/2006/main" noGrp="1"/>
-          </p:cNvSpPr>
-          <p:nvPr/>
-        </p:nvSpPr>
-        <p:spPr>
-          <a:xfrm xmlns:a="http://schemas.openxmlformats.org/drawingml/2006/main">
-            <a:off x="4657725" y="4619004"/>
-            <a:ext cx="819150" cy="190500"/>
+                <a16:creationId xmlns:a16="http://schemas.microsoft.com/office/drawing/2014/main" id="{A6DA60E3-E7F3-4AA6-8F16-A8C4A0DC8D2B}"/>
+              </a:ext>
+            </a:extLst>
+          </p:cNvPr>
+          <p:cNvSpPr>
+            <a:spLocks xmlns:a="http://schemas.openxmlformats.org/drawingml/2006/main" noGrp="1"/>
+          </p:cNvSpPr>
+          <p:nvPr/>
+        </p:nvSpPr>
+        <p:spPr>
+          <a:xfrm xmlns:a="http://schemas.openxmlformats.org/drawingml/2006/main">
+            <a:off x="4629150" y="4619004"/>
+            <a:ext cx="876300" cy="190500"/>
           </a:xfrm>
           <a:prstGeom xmlns:a="http://schemas.openxmlformats.org/drawingml/2006/main" prst="rect">
             <a:avLst/>
           </a:prstGeom>
-          <a:noFill xmlns:a="http://schemas.openxmlformats.org/drawingml/2006/main"/>
+          <a:solidFill xmlns:a="http://schemas.openxmlformats.org/drawingml/2006/main">
+            <a:srgbClr val="F5FAF7"/>
+          </a:solidFill>
           <a:ln xmlns:a="http://schemas.openxmlformats.org/drawingml/2006/main" w="0">
             <a:noFill/>
           </a:ln>
@@ -21464,7 +21543,7 @@
           <p:cNvPr id="9" name="">
             <a:extLst xmlns:a="http://schemas.openxmlformats.org/drawingml/2006/main">
               <a:ext uri="{FF2B5EF4-FFF2-40B4-BE49-F238E27FC236}">
-                <a16:creationId xmlns:a16="http://schemas.microsoft.com/office/drawing/2014/main" id="{C935AA46-5AD3-4D53-97CF-03160C5E6E00}"/>
+                <a16:creationId xmlns:a16="http://schemas.microsoft.com/office/drawing/2014/main" id="{0A215580-3928-47CF-98F6-29095CF5ECCA}"/>
               </a:ext>
             </a:extLst>
           </p:cNvPr>
@@ -21495,24 +21574,26 @@
           <p:cNvPr id="10" name="">
             <a:extLst xmlns:a="http://schemas.openxmlformats.org/drawingml/2006/main">
               <a:ext uri="{FF2B5EF4-FFF2-40B4-BE49-F238E27FC236}">
-                <a16:creationId xmlns:a16="http://schemas.microsoft.com/office/drawing/2014/main" id="{B28FCD7B-11F6-4A74-9392-1847FC845E07}"/>
-              </a:ext>
-            </a:extLst>
-          </p:cNvPr>
-          <p:cNvSpPr>
-            <a:spLocks xmlns:a="http://schemas.openxmlformats.org/drawingml/2006/main" noGrp="1"/>
-          </p:cNvSpPr>
-          <p:nvPr/>
-        </p:nvSpPr>
-        <p:spPr>
-          <a:xfrm xmlns:a="http://schemas.openxmlformats.org/drawingml/2006/main">
-            <a:off x="7096125" y="3009461"/>
-            <a:ext cx="819150" cy="190500"/>
+                <a16:creationId xmlns:a16="http://schemas.microsoft.com/office/drawing/2014/main" id="{A1053EA9-D34E-423F-9972-F92ACBE0E365}"/>
+              </a:ext>
+            </a:extLst>
+          </p:cNvPr>
+          <p:cNvSpPr>
+            <a:spLocks xmlns:a="http://schemas.openxmlformats.org/drawingml/2006/main" noGrp="1"/>
+          </p:cNvSpPr>
+          <p:nvPr/>
+        </p:nvSpPr>
+        <p:spPr>
+          <a:xfrm xmlns:a="http://schemas.openxmlformats.org/drawingml/2006/main">
+            <a:off x="7067550" y="3009461"/>
+            <a:ext cx="876300" cy="190500"/>
           </a:xfrm>
           <a:prstGeom xmlns:a="http://schemas.openxmlformats.org/drawingml/2006/main" prst="rect">
             <a:avLst/>
           </a:prstGeom>
-          <a:noFill xmlns:a="http://schemas.openxmlformats.org/drawingml/2006/main"/>
+          <a:solidFill xmlns:a="http://schemas.openxmlformats.org/drawingml/2006/main">
+            <a:srgbClr val="F5FAF7"/>
+          </a:solidFill>
           <a:ln xmlns:a="http://schemas.openxmlformats.org/drawingml/2006/main" w="0">
             <a:noFill/>
           </a:ln>
@@ -21552,7 +21633,7 @@
           <p:cNvPr id="11" name="">
             <a:extLst xmlns:a="http://schemas.openxmlformats.org/drawingml/2006/main">
               <a:ext uri="{FF2B5EF4-FFF2-40B4-BE49-F238E27FC236}">
-                <a16:creationId xmlns:a16="http://schemas.microsoft.com/office/drawing/2014/main" id="{740088B0-3F2C-42A5-8511-827FDE669C40}"/>
+                <a16:creationId xmlns:a16="http://schemas.microsoft.com/office/drawing/2014/main" id="{D5DFB637-78A3-4634-A7EC-F5468C98ED4D}"/>
               </a:ext>
             </a:extLst>
           </p:cNvPr>
@@ -21583,19 +21664,78 @@
           <p:cNvPr id="12" name="">
             <a:extLst xmlns:a="http://schemas.openxmlformats.org/drawingml/2006/main">
               <a:ext uri="{FF2B5EF4-FFF2-40B4-BE49-F238E27FC236}">
-                <a16:creationId xmlns:a16="http://schemas.microsoft.com/office/drawing/2014/main" id="{6FA13CD6-A3B5-42B8-AD2A-D7E1CAA33038}"/>
-              </a:ext>
-            </a:extLst>
-          </p:cNvPr>
-          <p:cNvSpPr>
-            <a:spLocks xmlns:a="http://schemas.openxmlformats.org/drawingml/2006/main" noGrp="1"/>
-          </p:cNvSpPr>
-          <p:nvPr/>
-        </p:nvSpPr>
-        <p:spPr>
-          <a:xfrm xmlns:a="http://schemas.openxmlformats.org/drawingml/2006/main">
-            <a:off x="9534525" y="1457915"/>
-            <a:ext cx="819150" cy="190500"/>
+                <a16:creationId xmlns:a16="http://schemas.microsoft.com/office/drawing/2014/main" id="{93CDEA96-8D9B-4794-9CC6-721DFCF177D8}"/>
+              </a:ext>
+            </a:extLst>
+          </p:cNvPr>
+          <p:cNvSpPr>
+            <a:spLocks xmlns:a="http://schemas.openxmlformats.org/drawingml/2006/main" noGrp="1"/>
+          </p:cNvSpPr>
+          <p:nvPr/>
+        </p:nvSpPr>
+        <p:spPr>
+          <a:xfrm xmlns:a="http://schemas.openxmlformats.org/drawingml/2006/main">
+            <a:off x="9505950" y="1457915"/>
+            <a:ext cx="876300" cy="190500"/>
+          </a:xfrm>
+          <a:prstGeom xmlns:a="http://schemas.openxmlformats.org/drawingml/2006/main" prst="rect">
+            <a:avLst/>
+          </a:prstGeom>
+          <a:solidFill xmlns:a="http://schemas.openxmlformats.org/drawingml/2006/main">
+            <a:srgbClr val="F5FAF7"/>
+          </a:solidFill>
+          <a:ln xmlns:a="http://schemas.openxmlformats.org/drawingml/2006/main" w="0">
+            <a:noFill/>
+          </a:ln>
+        </p:spPr>
+        <p:txBody>
+          <a:bodyPr xmlns:a="http://schemas.openxmlformats.org/drawingml/2006/main">
+            <a:noAutofit/>
+          </a:bodyPr>
+          <a:lstStyle xmlns:a="http://schemas.openxmlformats.org/drawingml/2006/main"/>
+          <a:p xmlns:a="http://schemas.openxmlformats.org/drawingml/2006/main">
+            <a:pPr algn="ctr">
+              <a:defRPr sz="900" b="1">
+                <a:solidFill>
+                  <a:srgbClr val="12372A"/>
+                </a:solidFill>
+                <a:latin typeface="Calibri"/>
+                <a:ea typeface="Calibri"/>
+                <a:cs typeface="Calibri"/>
+              </a:defRPr>
+            </a:pPr>
+            <a:r>
+              <a:rPr sz="900" b="1">
+                <a:solidFill>
+                  <a:srgbClr val="12372A"/>
+                </a:solidFill>
+                <a:latin typeface="Calibri"/>
+                <a:ea typeface="Calibri"/>
+                <a:cs typeface="Calibri"/>
+              </a:rPr>
+              <a:t>$20.4M</a:t>
+            </a:r>
+          </a:p>
+        </p:txBody>
+      </p:sp>
+      <p:sp>
+        <p:nvSpPr>
+          <p:cNvPr id="13" name="">
+            <a:extLst xmlns:a="http://schemas.openxmlformats.org/drawingml/2006/main">
+              <a:ext uri="{FF2B5EF4-FFF2-40B4-BE49-F238E27FC236}">
+                <a16:creationId xmlns:a16="http://schemas.microsoft.com/office/drawing/2014/main" id="{E380980B-FCBC-431D-839E-1282AD738CEC}"/>
+              </a:ext>
+            </a:extLst>
+          </p:cNvPr>
+          <p:cNvSpPr>
+            <a:spLocks xmlns:a="http://schemas.openxmlformats.org/drawingml/2006/main" noGrp="1"/>
+          </p:cNvSpPr>
+          <p:nvPr/>
+        </p:nvSpPr>
+        <p:spPr>
+          <a:xfrm xmlns:a="http://schemas.openxmlformats.org/drawingml/2006/main">
+            <a:off x="10953750" y="6438900"/>
+            <a:ext cx="552450" cy="171450"/>
           </a:xfrm>
           <a:prstGeom xmlns:a="http://schemas.openxmlformats.org/drawingml/2006/main" prst="rect">
             <a:avLst/>
@@ -21611,63 +21751,6 @@
           </a:bodyPr>
           <a:lstStyle xmlns:a="http://schemas.openxmlformats.org/drawingml/2006/main"/>
           <a:p xmlns:a="http://schemas.openxmlformats.org/drawingml/2006/main">
-            <a:pPr algn="ctr">
-              <a:defRPr sz="900" b="1">
-                <a:solidFill>
-                  <a:srgbClr val="12372A"/>
-                </a:solidFill>
-                <a:latin typeface="Calibri"/>
-                <a:ea typeface="Calibri"/>
-                <a:cs typeface="Calibri"/>
-              </a:defRPr>
-            </a:pPr>
-            <a:r>
-              <a:rPr sz="900" b="1">
-                <a:solidFill>
-                  <a:srgbClr val="12372A"/>
-                </a:solidFill>
-                <a:latin typeface="Calibri"/>
-                <a:ea typeface="Calibri"/>
-                <a:cs typeface="Calibri"/>
-              </a:rPr>
-              <a:t>$20.4M</a:t>
-            </a:r>
-          </a:p>
-        </p:txBody>
-      </p:sp>
-      <p:sp>
-        <p:nvSpPr>
-          <p:cNvPr id="13" name="">
-            <a:extLst xmlns:a="http://schemas.openxmlformats.org/drawingml/2006/main">
-              <a:ext uri="{FF2B5EF4-FFF2-40B4-BE49-F238E27FC236}">
-                <a16:creationId xmlns:a16="http://schemas.microsoft.com/office/drawing/2014/main" id="{62AF56E5-FAEC-4417-A3E9-337DF8E318EA}"/>
-              </a:ext>
-            </a:extLst>
-          </p:cNvPr>
-          <p:cNvSpPr>
-            <a:spLocks xmlns:a="http://schemas.openxmlformats.org/drawingml/2006/main" noGrp="1"/>
-          </p:cNvSpPr>
-          <p:nvPr/>
-        </p:nvSpPr>
-        <p:spPr>
-          <a:xfrm xmlns:a="http://schemas.openxmlformats.org/drawingml/2006/main">
-            <a:off x="10953750" y="6438900"/>
-            <a:ext cx="552450" cy="171450"/>
-          </a:xfrm>
-          <a:prstGeom xmlns:a="http://schemas.openxmlformats.org/drawingml/2006/main" prst="rect">
-            <a:avLst/>
-          </a:prstGeom>
-          <a:noFill xmlns:a="http://schemas.openxmlformats.org/drawingml/2006/main"/>
-          <a:ln xmlns:a="http://schemas.openxmlformats.org/drawingml/2006/main" w="0">
-            <a:noFill/>
-          </a:ln>
-        </p:spPr>
-        <p:txBody>
-          <a:bodyPr xmlns:a="http://schemas.openxmlformats.org/drawingml/2006/main">
-            <a:noAutofit/>
-          </a:bodyPr>
-          <a:lstStyle xmlns:a="http://schemas.openxmlformats.org/drawingml/2006/main"/>
-          <a:p xmlns:a="http://schemas.openxmlformats.org/drawingml/2006/main">
             <a:pPr algn="r">
               <a:defRPr sz="750">
                 <a:solidFill>
@@ -21695,7 +21778,7 @@
     </p:spTree>
     <p:extLst>
       <p:ext uri="{BB962C8B-B14F-4D97-AF65-F5344CB8AC3E}">
-        <p14:creationId xmlns:p14="http://schemas.microsoft.com/office/powerpoint/2010/main" val="2039618681"/>
+        <p14:creationId xmlns:p14="http://schemas.microsoft.com/office/powerpoint/2010/main" val="52493374"/>
       </p:ext>
     </p:extLst>
   </p:cSld>
@@ -21726,7 +21809,7 @@
           <p:cNvPr id="7" name="">
             <a:extLst xmlns:a="http://schemas.openxmlformats.org/drawingml/2006/main">
               <a:ext uri="{FF2B5EF4-FFF2-40B4-BE49-F238E27FC236}">
-                <a16:creationId xmlns:a16="http://schemas.microsoft.com/office/drawing/2014/main" id="{38AFB36D-AAB8-478F-A932-29726F8F4D72}"/>
+                <a16:creationId xmlns:a16="http://schemas.microsoft.com/office/drawing/2014/main" id="{42426506-B068-4702-823E-0203C8466107}"/>
               </a:ext>
             </a:extLst>
           </p:cNvPr>
@@ -21783,7 +21866,7 @@
           <p:cNvPr id="2" name="title-rule">
             <a:extLst xmlns:a="http://schemas.openxmlformats.org/drawingml/2006/main">
               <a:ext uri="{FF2B5EF4-FFF2-40B4-BE49-F238E27FC236}">
-                <a16:creationId xmlns:a16="http://schemas.microsoft.com/office/drawing/2014/main" id="{1DFADB82-8A05-47AA-9CF6-277F53BB64F3}"/>
+                <a16:creationId xmlns:a16="http://schemas.microsoft.com/office/drawing/2014/main" id="{FA0FD0FE-3E50-43E0-B38E-324C2E6A734A}"/>
               </a:ext>
             </a:extLst>
           </p:cNvPr>
@@ -21813,18 +21896,18 @@
           <p:cNvPr id="3" name="">
             <a:extLst xmlns:a="http://schemas.openxmlformats.org/drawingml/2006/main">
               <a:ext uri="{FF2B5EF4-FFF2-40B4-BE49-F238E27FC236}">
-                <a16:creationId xmlns:a16="http://schemas.microsoft.com/office/drawing/2014/main" id="{57BD9149-E768-4BCB-A727-2186DA7114D1}"/>
-              </a:ext>
-            </a:extLst>
-          </p:cNvPr>
-          <p:cNvSpPr>
-            <a:spLocks xmlns:a="http://schemas.openxmlformats.org/drawingml/2006/main" noGrp="1"/>
-          </p:cNvSpPr>
-          <p:nvPr/>
-        </p:nvSpPr>
-        <p:spPr>
-          <a:xfrm xmlns:a="http://schemas.openxmlformats.org/drawingml/2006/main">
-            <a:off x="914400" y="1600200"/>
+                <a16:creationId xmlns:a16="http://schemas.microsoft.com/office/drawing/2014/main" id="{E15CD2BD-E471-44C9-929B-53E05C4A1AB8}"/>
+              </a:ext>
+            </a:extLst>
+          </p:cNvPr>
+          <p:cNvSpPr>
+            <a:spLocks xmlns:a="http://schemas.openxmlformats.org/drawingml/2006/main" noGrp="1"/>
+          </p:cNvSpPr>
+          <p:nvPr/>
+        </p:nvSpPr>
+        <p:spPr>
+          <a:xfrm xmlns:a="http://schemas.openxmlformats.org/drawingml/2006/main">
+            <a:off x="914400" y="1862138"/>
             <a:ext cx="10134600" cy="1104900"/>
           </a:xfrm>
           <a:prstGeom xmlns:a="http://schemas.openxmlformats.org/drawingml/2006/main" prst="rect">
@@ -21870,18 +21953,18 @@
           <p:cNvPr id="4" name="">
             <a:extLst xmlns:a="http://schemas.openxmlformats.org/drawingml/2006/main">
               <a:ext uri="{FF2B5EF4-FFF2-40B4-BE49-F238E27FC236}">
-                <a16:creationId xmlns:a16="http://schemas.microsoft.com/office/drawing/2014/main" id="{9953AF64-924D-4B2D-97A0-02532959733B}"/>
-              </a:ext>
-            </a:extLst>
-          </p:cNvPr>
-          <p:cNvSpPr>
-            <a:spLocks xmlns:a="http://schemas.openxmlformats.org/drawingml/2006/main" noGrp="1"/>
-          </p:cNvSpPr>
-          <p:nvPr/>
-        </p:nvSpPr>
-        <p:spPr>
-          <a:xfrm xmlns:a="http://schemas.openxmlformats.org/drawingml/2006/main">
-            <a:off x="914400" y="2895600"/>
+                <a16:creationId xmlns:a16="http://schemas.microsoft.com/office/drawing/2014/main" id="{ED0CF850-3994-4E0C-B104-6238CAAC6691}"/>
+              </a:ext>
+            </a:extLst>
+          </p:cNvPr>
+          <p:cNvSpPr>
+            <a:spLocks xmlns:a="http://schemas.openxmlformats.org/drawingml/2006/main" noGrp="1"/>
+          </p:cNvSpPr>
+          <p:nvPr/>
+        </p:nvSpPr>
+        <p:spPr>
+          <a:xfrm xmlns:a="http://schemas.openxmlformats.org/drawingml/2006/main">
+            <a:off x="914400" y="3157538"/>
             <a:ext cx="10134600" cy="1362075"/>
           </a:xfrm>
           <a:prstGeom xmlns:a="http://schemas.openxmlformats.org/drawingml/2006/main" prst="rect">
@@ -21927,18 +22010,18 @@
           <p:cNvPr id="5" name="">
             <a:extLst xmlns:a="http://schemas.openxmlformats.org/drawingml/2006/main">
               <a:ext uri="{FF2B5EF4-FFF2-40B4-BE49-F238E27FC236}">
-                <a16:creationId xmlns:a16="http://schemas.microsoft.com/office/drawing/2014/main" id="{F0C0D1E3-2A60-4BBD-97C0-53DB0EF08297}"/>
-              </a:ext>
-            </a:extLst>
-          </p:cNvPr>
-          <p:cNvSpPr>
-            <a:spLocks xmlns:a="http://schemas.openxmlformats.org/drawingml/2006/main" noGrp="1"/>
-          </p:cNvSpPr>
-          <p:nvPr/>
-        </p:nvSpPr>
-        <p:spPr>
-          <a:xfrm xmlns:a="http://schemas.openxmlformats.org/drawingml/2006/main">
-            <a:off x="914400" y="4448175"/>
+                <a16:creationId xmlns:a16="http://schemas.microsoft.com/office/drawing/2014/main" id="{8F7995A0-6714-4A99-9204-F1510096B1E4}"/>
+              </a:ext>
+            </a:extLst>
+          </p:cNvPr>
+          <p:cNvSpPr>
+            <a:spLocks xmlns:a="http://schemas.openxmlformats.org/drawingml/2006/main" noGrp="1"/>
+          </p:cNvSpPr>
+          <p:nvPr/>
+        </p:nvSpPr>
+        <p:spPr>
+          <a:xfrm xmlns:a="http://schemas.openxmlformats.org/drawingml/2006/main">
+            <a:off x="914400" y="4710113"/>
             <a:ext cx="10134600" cy="1104900"/>
           </a:xfrm>
           <a:prstGeom xmlns:a="http://schemas.openxmlformats.org/drawingml/2006/main" prst="rect">
@@ -21984,7 +22067,7 @@
           <p:cNvPr id="6" name="">
             <a:extLst xmlns:a="http://schemas.openxmlformats.org/drawingml/2006/main">
               <a:ext uri="{FF2B5EF4-FFF2-40B4-BE49-F238E27FC236}">
-                <a16:creationId xmlns:a16="http://schemas.microsoft.com/office/drawing/2014/main" id="{B62D6DB0-6DC3-4CC4-92A4-F149F07F81F2}"/>
+                <a16:creationId xmlns:a16="http://schemas.microsoft.com/office/drawing/2014/main" id="{9D2268D6-D550-46BC-8C64-291F2AA4970A}"/>
               </a:ext>
             </a:extLst>
           </p:cNvPr>
@@ -22039,7 +22122,7 @@
     </p:spTree>
     <p:extLst>
       <p:ext uri="{BB962C8B-B14F-4D97-AF65-F5344CB8AC3E}">
-        <p14:creationId xmlns:p14="http://schemas.microsoft.com/office/powerpoint/2010/main" val="1736005402"/>
+        <p14:creationId xmlns:p14="http://schemas.microsoft.com/office/powerpoint/2010/main" val="1648936422"/>
       </p:ext>
     </p:extLst>
   </p:cSld>
@@ -22070,7 +22153,7 @@
           <p:cNvPr id="7" name="">
             <a:extLst xmlns:a="http://schemas.openxmlformats.org/drawingml/2006/main">
               <a:ext uri="{FF2B5EF4-FFF2-40B4-BE49-F238E27FC236}">
-                <a16:creationId xmlns:a16="http://schemas.microsoft.com/office/drawing/2014/main" id="{525DF5A1-7FCA-4D22-A431-1F2280DEBF44}"/>
+                <a16:creationId xmlns:a16="http://schemas.microsoft.com/office/drawing/2014/main" id="{41F73BC6-AA60-49D2-92F0-D76258DF56EB}"/>
               </a:ext>
             </a:extLst>
           </p:cNvPr>
@@ -22127,7 +22210,7 @@
           <p:cNvPr id="2" name="title-rule">
             <a:extLst xmlns:a="http://schemas.openxmlformats.org/drawingml/2006/main">
               <a:ext uri="{FF2B5EF4-FFF2-40B4-BE49-F238E27FC236}">
-                <a16:creationId xmlns:a16="http://schemas.microsoft.com/office/drawing/2014/main" id="{54204ABE-DDA7-4E0D-B438-5059E42BA9AE}"/>
+                <a16:creationId xmlns:a16="http://schemas.microsoft.com/office/drawing/2014/main" id="{C7BD5C59-2FD3-4B1A-B2A1-C9ED20BFD669}"/>
               </a:ext>
             </a:extLst>
           </p:cNvPr>
@@ -22157,18 +22240,18 @@
           <p:cNvPr id="3" name="">
             <a:extLst xmlns:a="http://schemas.openxmlformats.org/drawingml/2006/main">
               <a:ext uri="{FF2B5EF4-FFF2-40B4-BE49-F238E27FC236}">
-                <a16:creationId xmlns:a16="http://schemas.microsoft.com/office/drawing/2014/main" id="{81B3B4B6-AFE1-4D72-8D92-FDBFE3FADE12}"/>
-              </a:ext>
-            </a:extLst>
-          </p:cNvPr>
-          <p:cNvSpPr>
-            <a:spLocks xmlns:a="http://schemas.openxmlformats.org/drawingml/2006/main" noGrp="1"/>
-          </p:cNvSpPr>
-          <p:nvPr/>
-        </p:nvSpPr>
-        <p:spPr>
-          <a:xfrm xmlns:a="http://schemas.openxmlformats.org/drawingml/2006/main">
-            <a:off x="914400" y="1600200"/>
+                <a16:creationId xmlns:a16="http://schemas.microsoft.com/office/drawing/2014/main" id="{77A4FBE9-CF28-4137-8998-FAD4C1226F18}"/>
+              </a:ext>
+            </a:extLst>
+          </p:cNvPr>
+          <p:cNvSpPr>
+            <a:spLocks xmlns:a="http://schemas.openxmlformats.org/drawingml/2006/main" noGrp="1"/>
+          </p:cNvSpPr>
+          <p:nvPr/>
+        </p:nvSpPr>
+        <p:spPr>
+          <a:xfrm xmlns:a="http://schemas.openxmlformats.org/drawingml/2006/main">
+            <a:off x="914400" y="1862138"/>
             <a:ext cx="10134600" cy="1104900"/>
           </a:xfrm>
           <a:prstGeom xmlns:a="http://schemas.openxmlformats.org/drawingml/2006/main" prst="rect">
@@ -22214,18 +22297,18 @@
           <p:cNvPr id="4" name="">
             <a:extLst xmlns:a="http://schemas.openxmlformats.org/drawingml/2006/main">
               <a:ext uri="{FF2B5EF4-FFF2-40B4-BE49-F238E27FC236}">
-                <a16:creationId xmlns:a16="http://schemas.microsoft.com/office/drawing/2014/main" id="{B3A9638F-86E2-4DF6-AD90-154899BD7720}"/>
-              </a:ext>
-            </a:extLst>
-          </p:cNvPr>
-          <p:cNvSpPr>
-            <a:spLocks xmlns:a="http://schemas.openxmlformats.org/drawingml/2006/main" noGrp="1"/>
-          </p:cNvSpPr>
-          <p:nvPr/>
-        </p:nvSpPr>
-        <p:spPr>
-          <a:xfrm xmlns:a="http://schemas.openxmlformats.org/drawingml/2006/main">
-            <a:off x="914400" y="2895600"/>
+                <a16:creationId xmlns:a16="http://schemas.microsoft.com/office/drawing/2014/main" id="{C9B523A5-D89E-464F-B889-6213688877F3}"/>
+              </a:ext>
+            </a:extLst>
+          </p:cNvPr>
+          <p:cNvSpPr>
+            <a:spLocks xmlns:a="http://schemas.openxmlformats.org/drawingml/2006/main" noGrp="1"/>
+          </p:cNvSpPr>
+          <p:nvPr/>
+        </p:nvSpPr>
+        <p:spPr>
+          <a:xfrm xmlns:a="http://schemas.openxmlformats.org/drawingml/2006/main">
+            <a:off x="914400" y="3157538"/>
             <a:ext cx="10134600" cy="1362075"/>
           </a:xfrm>
           <a:prstGeom xmlns:a="http://schemas.openxmlformats.org/drawingml/2006/main" prst="rect">
@@ -22271,18 +22354,18 @@
           <p:cNvPr id="5" name="">
             <a:extLst xmlns:a="http://schemas.openxmlformats.org/drawingml/2006/main">
               <a:ext uri="{FF2B5EF4-FFF2-40B4-BE49-F238E27FC236}">
-                <a16:creationId xmlns:a16="http://schemas.microsoft.com/office/drawing/2014/main" id="{C8B74BB9-9124-4DC6-AB18-B03FA6E730DA}"/>
-              </a:ext>
-            </a:extLst>
-          </p:cNvPr>
-          <p:cNvSpPr>
-            <a:spLocks xmlns:a="http://schemas.openxmlformats.org/drawingml/2006/main" noGrp="1"/>
-          </p:cNvSpPr>
-          <p:nvPr/>
-        </p:nvSpPr>
-        <p:spPr>
-          <a:xfrm xmlns:a="http://schemas.openxmlformats.org/drawingml/2006/main">
-            <a:off x="914400" y="4448175"/>
+                <a16:creationId xmlns:a16="http://schemas.microsoft.com/office/drawing/2014/main" id="{5F687C72-C035-4622-A95F-34A63D04792F}"/>
+              </a:ext>
+            </a:extLst>
+          </p:cNvPr>
+          <p:cNvSpPr>
+            <a:spLocks xmlns:a="http://schemas.openxmlformats.org/drawingml/2006/main" noGrp="1"/>
+          </p:cNvSpPr>
+          <p:nvPr/>
+        </p:nvSpPr>
+        <p:spPr>
+          <a:xfrm xmlns:a="http://schemas.openxmlformats.org/drawingml/2006/main">
+            <a:off x="914400" y="4710113"/>
             <a:ext cx="10134600" cy="1104900"/>
           </a:xfrm>
           <a:prstGeom xmlns:a="http://schemas.openxmlformats.org/drawingml/2006/main" prst="rect">
@@ -22328,7 +22411,7 @@
           <p:cNvPr id="6" name="">
             <a:extLst xmlns:a="http://schemas.openxmlformats.org/drawingml/2006/main">
               <a:ext uri="{FF2B5EF4-FFF2-40B4-BE49-F238E27FC236}">
-                <a16:creationId xmlns:a16="http://schemas.microsoft.com/office/drawing/2014/main" id="{5CF2078C-ADE7-40FB-906B-659E68B4F347}"/>
+                <a16:creationId xmlns:a16="http://schemas.microsoft.com/office/drawing/2014/main" id="{BCA7C47A-6BB5-4BB2-AF1A-DF7F658E3928}"/>
               </a:ext>
             </a:extLst>
           </p:cNvPr>
@@ -22383,7 +22466,7 @@
     </p:spTree>
     <p:extLst>
       <p:ext uri="{BB962C8B-B14F-4D97-AF65-F5344CB8AC3E}">
-        <p14:creationId xmlns:p14="http://schemas.microsoft.com/office/powerpoint/2010/main" val="1707620853"/>
+        <p14:creationId xmlns:p14="http://schemas.microsoft.com/office/powerpoint/2010/main" val="1507486832"/>
       </p:ext>
     </p:extLst>
   </p:cSld>
